--- a/presentation_sebastien_ulesie.pptx
+++ b/presentation_sebastien_ulesie.pptx
@@ -5,7 +5,7 @@
     <p:sldMasterId id="2147483659" r:id="rId1"/>
   </p:sldMasterIdLst>
   <p:notesMasterIdLst>
-    <p:notesMasterId r:id="rId20"/>
+    <p:notesMasterId r:id="rId23"/>
   </p:notesMasterIdLst>
   <p:sldIdLst>
     <p:sldId id="256" r:id="rId2"/>
@@ -25,31 +25,34 @@
     <p:sldId id="274" r:id="rId16"/>
     <p:sldId id="275" r:id="rId17"/>
     <p:sldId id="276" r:id="rId18"/>
-    <p:sldId id="271" r:id="rId19"/>
+    <p:sldId id="278" r:id="rId19"/>
+    <p:sldId id="279" r:id="rId20"/>
+    <p:sldId id="281" r:id="rId21"/>
+    <p:sldId id="271" r:id="rId22"/>
   </p:sldIdLst>
   <p:sldSz cx="9144000" cy="5143500" type="screen16x9"/>
   <p:notesSz cx="6858000" cy="9144000"/>
   <p:embeddedFontLst>
     <p:embeddedFont>
       <p:font typeface="Lato" panose="020F0502020204030203" pitchFamily="34" charset="0"/>
-      <p:regular r:id="rId21"/>
-      <p:bold r:id="rId22"/>
-      <p:italic r:id="rId23"/>
-      <p:boldItalic r:id="rId24"/>
+      <p:regular r:id="rId24"/>
+      <p:bold r:id="rId25"/>
+      <p:italic r:id="rId26"/>
+      <p:boldItalic r:id="rId27"/>
     </p:embeddedFont>
     <p:embeddedFont>
       <p:font typeface="Montserrat" panose="00000500000000000000" pitchFamily="2" charset="0"/>
-      <p:regular r:id="rId25"/>
-      <p:bold r:id="rId26"/>
-      <p:italic r:id="rId27"/>
-      <p:boldItalic r:id="rId28"/>
+      <p:regular r:id="rId28"/>
+      <p:bold r:id="rId29"/>
+      <p:italic r:id="rId30"/>
+      <p:boldItalic r:id="rId31"/>
     </p:embeddedFont>
     <p:embeddedFont>
       <p:font typeface="Segoe UI" panose="020B0502040204020203" pitchFamily="34" charset="0"/>
-      <p:regular r:id="rId29"/>
-      <p:bold r:id="rId30"/>
-      <p:italic r:id="rId31"/>
-      <p:boldItalic r:id="rId32"/>
+      <p:regular r:id="rId32"/>
+      <p:bold r:id="rId33"/>
+      <p:italic r:id="rId34"/>
+      <p:boldItalic r:id="rId35"/>
     </p:embeddedFont>
   </p:embeddedFontLst>
   <p:defaultTextStyle>
@@ -10702,7 +10705,7 @@
         </p:spPr>
         <p:txBody>
           <a:bodyPr spcFirstLastPara="1" wrap="square" lIns="91425" tIns="91425" rIns="91425" bIns="91425" anchor="t" anchorCtr="0">
-            <a:normAutofit fontScale="92500" lnSpcReduction="10000"/>
+            <a:normAutofit fontScale="92500" lnSpcReduction="20000"/>
           </a:bodyPr>
           <a:lstStyle/>
           <a:p>
@@ -10742,7 +10745,7 @@
             <a:pPr lvl="0"/>
             <a:r>
               <a:rPr lang="fr-FR" dirty="0"/>
-              <a:t>Renforcer la gouvernance des données sensibles en supprimant ou masquant les informations personnelles non nécessaires pour l’analyse,</a:t>
+              <a:t>Renforcer la gouvernance des données sensibles en supprimant les informations personnelles non nécessaires pour l’analyse,</a:t>
             </a:r>
           </a:p>
           <a:p>
@@ -10764,7 +10767,18 @@
             <a:pPr lvl="0"/>
             <a:r>
               <a:rPr lang="fr-FR" dirty="0"/>
-              <a:t>Améliorer le typage et la qualité des données.</a:t>
+              <a:t>Améliorer le typage et la qualité des données,</a:t>
+            </a:r>
+          </a:p>
+          <a:p>
+            <a:pPr lvl="0"/>
+            <a:endParaRPr lang="fr-FR" dirty="0"/>
+          </a:p>
+          <a:p>
+            <a:pPr lvl="0"/>
+            <a:r>
+              <a:rPr lang="fr-FR" dirty="0"/>
+              <a:t>Automatiser le remplissage de tables de logs.</a:t>
             </a:r>
           </a:p>
           <a:p>
@@ -10884,7 +10898,7 @@
           <p:nvPr>
             <p:extLst>
               <p:ext uri="{D42A27DB-BD31-4B8C-83A1-F6EECF244321}">
-                <p14:modId xmlns:p14="http://schemas.microsoft.com/office/powerpoint/2010/main" val="2027639414"/>
+                <p14:modId xmlns:p14="http://schemas.microsoft.com/office/powerpoint/2010/main" val="565486964"/>
               </p:ext>
             </p:extLst>
           </p:nvPr>
@@ -12532,7 +12546,7 @@
                         <a:buNone/>
                       </a:pPr>
                       <a:r>
-                        <a:rPr lang="fr-FR" sz="900">
+                        <a:rPr lang="fr-FR" sz="900" dirty="0">
                           <a:solidFill>
                             <a:srgbClr val="000000"/>
                           </a:solidFill>
@@ -12540,9 +12554,9 @@
                           <a:latin typeface="Arial" panose="020B0604020202020204" pitchFamily="34" charset="0"/>
                           <a:ea typeface="Times New Roman" panose="02020603050405020304" pitchFamily="18" charset="0"/>
                         </a:rPr>
-                        <a:t>Origine des anomalies non identifiable</a:t>
+                        <a:t>Origine non identifiable des anomalies</a:t>
                       </a:r>
-                      <a:endParaRPr lang="fr-FR" sz="1000">
+                      <a:endParaRPr lang="fr-FR" sz="1000" dirty="0">
                         <a:effectLst/>
                         <a:latin typeface="Segoe UI" panose="020B0502040204020203" pitchFamily="34" charset="0"/>
                         <a:ea typeface="Quattrocento Sans" panose="020B0502050000020003" pitchFamily="34" charset="0"/>
@@ -12983,7 +12997,7 @@
                         <a:buNone/>
                       </a:pPr>
                       <a:r>
-                        <a:rPr lang="fr-FR" sz="900">
+                        <a:rPr lang="fr-FR" sz="900" dirty="0">
                           <a:solidFill>
                             <a:srgbClr val="000000"/>
                           </a:solidFill>
@@ -12993,7 +13007,7 @@
                         </a:rPr>
                         <a:t>Risque sécurité / conformité</a:t>
                       </a:r>
-                      <a:endParaRPr lang="fr-FR" sz="1000">
+                      <a:endParaRPr lang="fr-FR" sz="1000" dirty="0">
                         <a:effectLst/>
                         <a:latin typeface="Segoe UI" panose="020B0502040204020203" pitchFamily="34" charset="0"/>
                         <a:ea typeface="Quattrocento Sans" panose="020B0502050000020003" pitchFamily="34" charset="0"/>
@@ -13360,7 +13374,7 @@
                         <a:buNone/>
                       </a:pPr>
                       <a:r>
-                        <a:rPr lang="fr-FR" sz="900">
+                        <a:rPr lang="fr-FR" sz="900" dirty="0">
                           <a:solidFill>
                             <a:srgbClr val="000000"/>
                           </a:solidFill>
@@ -13370,7 +13384,7 @@
                         </a:rPr>
                         <a:t>Documentation insuffisante</a:t>
                       </a:r>
-                      <a:endParaRPr lang="fr-FR" sz="1000">
+                      <a:endParaRPr lang="fr-FR" sz="1000" dirty="0">
                         <a:effectLst/>
                         <a:latin typeface="Segoe UI" panose="020B0502040204020203" pitchFamily="34" charset="0"/>
                         <a:ea typeface="Quattrocento Sans" panose="020B0502050000020003" pitchFamily="34" charset="0"/>
@@ -13434,7 +13448,7 @@
                         <a:buNone/>
                       </a:pPr>
                       <a:r>
-                        <a:rPr lang="fr-FR" sz="900">
+                        <a:rPr lang="fr-FR" sz="900" dirty="0">
                           <a:solidFill>
                             <a:srgbClr val="000000"/>
                           </a:solidFill>
@@ -13444,7 +13458,7 @@
                         </a:rPr>
                         <a:t>Mauvaise interprétation des données</a:t>
                       </a:r>
-                      <a:endParaRPr lang="fr-FR" sz="1000">
+                      <a:endParaRPr lang="fr-FR" sz="1000" dirty="0">
                         <a:effectLst/>
                         <a:latin typeface="Segoe UI" panose="020B0502040204020203" pitchFamily="34" charset="0"/>
                         <a:ea typeface="Quattrocento Sans" panose="020B0502050000020003" pitchFamily="34" charset="0"/>
@@ -14472,7 +14486,7 @@
           <a:p>
             <a:r>
               <a:rPr lang="fr-FR" dirty="0"/>
-              <a:t>Cette table est complétée grâce à une procédure qui peut être appelée sur le jour souhaité (voir Rapport d’audit)</a:t>
+              <a:t>Cette table est complétée grâce à une procédure qui peut être appelée sur le jour souhaité (voir Rapport d’audit – recommandation 1)</a:t>
             </a:r>
           </a:p>
         </p:txBody>
@@ -15522,13 +15536,13 @@
         </p:spPr>
         <p:txBody>
           <a:bodyPr>
-            <a:normAutofit fontScale="92500" lnSpcReduction="10000"/>
+            <a:normAutofit lnSpcReduction="10000"/>
           </a:bodyPr>
           <a:lstStyle/>
           <a:p>
             <a:r>
               <a:rPr lang="fr-FR" dirty="0"/>
-              <a:t>Supprimer ou masquer les colonnes non nécessaires à l’analyse BI, </a:t>
+              <a:t>Supprimer les colonnes non nécessaires à l’analyse BI, </a:t>
             </a:r>
             <a:r>
               <a:rPr lang="fr-FR" dirty="0" err="1"/>
@@ -15606,50 +15620,6 @@
             <a:r>
               <a:rPr lang="en-US" dirty="0" err="1"/>
               <a:t>date_debut</a:t>
-            </a:r>
-            <a:r>
-              <a:rPr lang="en-US" dirty="0"/>
-              <a:t>, </a:t>
-            </a:r>
-            <a:endParaRPr lang="fr-FR" dirty="0"/>
-          </a:p>
-          <a:p>
-            <a:pPr marL="146050" indent="0">
-              <a:buNone/>
-            </a:pPr>
-            <a:r>
-              <a:rPr lang="en-US" dirty="0"/>
-              <a:t>SUBSTRING(mail FROM 1 FOR 3) || ‘****' AS </a:t>
-            </a:r>
-            <a:r>
-              <a:rPr lang="en-US" dirty="0" err="1"/>
-              <a:t>obscured_mail</a:t>
-            </a:r>
-            <a:r>
-              <a:rPr lang="en-US" dirty="0"/>
-              <a:t>, </a:t>
-            </a:r>
-            <a:endParaRPr lang="fr-FR" dirty="0"/>
-          </a:p>
-          <a:p>
-            <a:pPr marL="146050" indent="0">
-              <a:buNone/>
-            </a:pPr>
-            <a:r>
-              <a:rPr lang="en-US" dirty="0"/>
-              <a:t>SUBSTRING(</a:t>
-            </a:r>
-            <a:r>
-              <a:rPr lang="en-US" dirty="0" err="1"/>
-              <a:t>hash_mdp</a:t>
-            </a:r>
-            <a:r>
-              <a:rPr lang="en-US" dirty="0"/>
-              <a:t> FROM 1 FOR 3) || ‘****' AS </a:t>
-            </a:r>
-            <a:r>
-              <a:rPr lang="en-US" dirty="0" err="1"/>
-              <a:t>obscured_hash_mdp</a:t>
             </a:r>
             <a:r>
               <a:rPr lang="en-US" dirty="0"/>
@@ -15713,10 +15683,10 @@
       </p:sp>
       <p:pic>
         <p:nvPicPr>
-          <p:cNvPr id="6" name="Image 5">
+          <p:cNvPr id="5" name="Image 4">
             <a:extLst>
               <a:ext uri="{FF2B5EF4-FFF2-40B4-BE49-F238E27FC236}">
-                <a16:creationId xmlns:a16="http://schemas.microsoft.com/office/drawing/2014/main" id="{EDC59DEB-B80E-6880-2093-3F744C90BE4F}"/>
+                <a16:creationId xmlns:a16="http://schemas.microsoft.com/office/drawing/2014/main" id="{3832F8A6-C504-7061-D8C0-4D6C050F4B3C}"/>
               </a:ext>
             </a:extLst>
           </p:cNvPr>
@@ -15733,8 +15703,8 @@
         </p:blipFill>
         <p:spPr>
           <a:xfrm>
-            <a:off x="4685186" y="3327601"/>
-            <a:ext cx="4360910" cy="1805549"/>
+            <a:off x="4370135" y="2317073"/>
+            <a:ext cx="3657917" cy="1813717"/>
           </a:xfrm>
           <a:prstGeom prst="rect">
             <a:avLst/>
@@ -15759,7 +15729,7 @@
   <p:cSld>
     <p:spTree>
       <p:nvGrpSpPr>
-        <p:cNvPr id="1" name="Shape 220"/>
+        <p:cNvPr id="1" name=""/>
         <p:cNvGrpSpPr/>
         <p:nvPr/>
       </p:nvGrpSpPr>
@@ -15773,52 +15743,92 @@
       </p:grpSpPr>
       <p:sp>
         <p:nvSpPr>
-          <p:cNvPr id="221" name="Google Shape;221;p28"/>
-          <p:cNvSpPr txBox="1">
+          <p:cNvPr id="3" name="Espace réservé du texte 2">
+            <a:extLst>
+              <a:ext uri="{FF2B5EF4-FFF2-40B4-BE49-F238E27FC236}">
+                <a16:creationId xmlns:a16="http://schemas.microsoft.com/office/drawing/2014/main" id="{B2D41D9A-B6C4-2944-516C-2C8870838FA5}"/>
+              </a:ext>
+            </a:extLst>
+          </p:cNvPr>
+          <p:cNvSpPr>
             <a:spLocks noGrp="1"/>
           </p:cNvSpPr>
           <p:nvPr>
-            <p:ph type="title"/>
+            <p:ph type="body" idx="1"/>
           </p:nvPr>
         </p:nvSpPr>
-        <p:spPr>
-          <a:xfrm>
-            <a:off x="311700" y="1388850"/>
-            <a:ext cx="8520600" cy="841800"/>
-          </a:xfrm>
-          <a:prstGeom prst="rect">
-            <a:avLst/>
-          </a:prstGeom>
-        </p:spPr>
+        <p:spPr/>
         <p:txBody>
-          <a:bodyPr spcFirstLastPara="1" wrap="square" lIns="91425" tIns="91425" rIns="91425" bIns="91425" anchor="ctr" anchorCtr="0">
+          <a:bodyPr>
             <a:normAutofit/>
           </a:bodyPr>
           <a:lstStyle/>
           <a:p>
-            <a:pPr marL="0" lvl="0" indent="0" algn="l" rtl="0">
-              <a:spcBef>
-                <a:spcPts val="0"/>
-              </a:spcBef>
-              <a:spcAft>
-                <a:spcPts val="0"/>
-              </a:spcAft>
+            <a:r>
+              <a:rPr lang="fr-FR" dirty="0"/>
+              <a:t>En complément de la supervision technique, mettre en place une automatisation afin de compléter instantanément , à chaque modification sur les tables métiers (</a:t>
+            </a:r>
+            <a:r>
+              <a:rPr lang="fr-FR" dirty="0" err="1"/>
+              <a:t>employe</a:t>
+            </a:r>
+            <a:r>
+              <a:rPr lang="fr-FR" dirty="0"/>
+              <a:t>, vente, produit, client), les logs pour chacune de ces tables. </a:t>
+            </a:r>
+          </a:p>
+          <a:p>
+            <a:r>
+              <a:rPr lang="fr-FR" dirty="0"/>
+              <a:t>Cela permet d’éviter d’avoir une seule table de logs générique pour toutes les tables, en séparant les logs par table métier.</a:t>
+            </a:r>
+          </a:p>
+          <a:p>
+            <a:r>
+              <a:rPr lang="fr-FR" dirty="0"/>
+              <a:t>Cela permet de disposer de tables de logs dédiées par table métier, ce qui facilite les contrôles et les comparaisons. </a:t>
+            </a:r>
+          </a:p>
+          <a:p>
+            <a:r>
+              <a:rPr lang="fr-FR" dirty="0"/>
+              <a:t>Pour ce faire, on utilise un trigger afin d’automatiser l’opération. </a:t>
+            </a:r>
+          </a:p>
+          <a:p>
+            <a:pPr marL="146050" indent="0">
               <a:buNone/>
             </a:pPr>
-            <a:r>
-              <a:rPr lang="fr"/>
-              <a:t>Conclusion</a:t>
-            </a:r>
-            <a:endParaRPr/>
+            <a:endParaRPr lang="fr-FR" dirty="0"/>
+          </a:p>
+          <a:p>
+            <a:pPr marL="146050" indent="0">
+              <a:buNone/>
+            </a:pPr>
+            <a:r>
+              <a:rPr lang="fr-FR" dirty="0"/>
+              <a:t>Exemple pour le log </a:t>
+            </a:r>
+            <a:r>
+              <a:rPr lang="fr-FR" dirty="0" err="1"/>
+              <a:t>employe</a:t>
+            </a:r>
+            <a:r>
+              <a:rPr lang="fr-FR" dirty="0"/>
+              <a:t> en slide suivante</a:t>
+            </a:r>
+          </a:p>
+          <a:p>
+            <a:endParaRPr lang="fr-FR" dirty="0"/>
           </a:p>
         </p:txBody>
       </p:sp>
       <p:sp>
         <p:nvSpPr>
-          <p:cNvPr id="2" name="Google Shape;141;p14">
+          <p:cNvPr id="4" name="Titre 1">
             <a:extLst>
               <a:ext uri="{FF2B5EF4-FFF2-40B4-BE49-F238E27FC236}">
-                <a16:creationId xmlns:a16="http://schemas.microsoft.com/office/drawing/2014/main" id="{722CD8E7-9D36-EE44-12F0-ABB8A5FC2A2C}"/>
+                <a16:creationId xmlns:a16="http://schemas.microsoft.com/office/drawing/2014/main" id="{FC9EF1D9-FD35-A7F9-9EF2-13312FB84EEF}"/>
               </a:ext>
             </a:extLst>
           </p:cNvPr>
@@ -15829,16 +15839,20 @@
         </p:nvSpPr>
         <p:spPr>
           <a:xfrm>
-            <a:off x="147776" y="2230650"/>
-            <a:ext cx="5768930" cy="2911200"/>
+            <a:off x="1449900" y="546150"/>
+            <a:ext cx="7038900" cy="914100"/>
           </a:xfrm>
           <a:prstGeom prst="rect">
             <a:avLst/>
           </a:prstGeom>
+          <a:noFill/>
+          <a:ln>
+            <a:noFill/>
+          </a:ln>
         </p:spPr>
         <p:txBody>
           <a:bodyPr spcFirstLastPara="1" wrap="square" lIns="91425" tIns="91425" rIns="91425" bIns="91425" anchor="t" anchorCtr="0">
-            <a:normAutofit lnSpcReduction="10000"/>
+            <a:normAutofit/>
           </a:bodyPr>
           <a:lstStyle>
             <a:defPPr marR="0" lvl="0" algn="l" rtl="0">
@@ -15863,17 +15877,19 @@
                 <a:spcPts val="0"/>
               </a:spcAft>
               <a:buClr>
-                <a:srgbClr val="000000"/>
+                <a:schemeClr val="lt1"/>
               </a:buClr>
-              <a:buFont typeface="Arial"/>
-              <a:defRPr sz="1400" b="0" i="0" u="none" strike="noStrike" cap="none">
+              <a:buSzPts val="2400"/>
+              <a:buFont typeface="Montserrat"/>
+              <a:buNone/>
+              <a:defRPr sz="2400" b="0" i="0" u="none" strike="noStrike" cap="none">
                 <a:solidFill>
-                  <a:srgbClr val="000000"/>
+                  <a:schemeClr val="lt1"/>
                 </a:solidFill>
-                <a:latin typeface="Arial"/>
-                <a:ea typeface="Arial"/>
-                <a:cs typeface="Arial"/>
-                <a:sym typeface="Arial"/>
+                <a:latin typeface="Montserrat"/>
+                <a:ea typeface="Montserrat"/>
+                <a:cs typeface="Montserrat"/>
+                <a:sym typeface="Montserrat"/>
               </a:defRPr>
             </a:lvl1pPr>
             <a:lvl2pPr marR="0" lvl="1" algn="l" rtl="0">
@@ -15887,17 +15903,19 @@
                 <a:spcPts val="0"/>
               </a:spcAft>
               <a:buClr>
-                <a:srgbClr val="000000"/>
+                <a:schemeClr val="lt1"/>
               </a:buClr>
-              <a:buFont typeface="Arial"/>
-              <a:defRPr sz="1400" b="0" i="0" u="none" strike="noStrike" cap="none">
+              <a:buSzPts val="2400"/>
+              <a:buFont typeface="Montserrat"/>
+              <a:buNone/>
+              <a:defRPr sz="2400" b="0" i="0" u="none" strike="noStrike" cap="none">
                 <a:solidFill>
-                  <a:srgbClr val="000000"/>
+                  <a:schemeClr val="lt1"/>
                 </a:solidFill>
-                <a:latin typeface="Arial"/>
-                <a:ea typeface="Arial"/>
-                <a:cs typeface="Arial"/>
-                <a:sym typeface="Arial"/>
+                <a:latin typeface="Montserrat"/>
+                <a:ea typeface="Montserrat"/>
+                <a:cs typeface="Montserrat"/>
+                <a:sym typeface="Montserrat"/>
               </a:defRPr>
             </a:lvl2pPr>
             <a:lvl3pPr marR="0" lvl="2" algn="l" rtl="0">
@@ -15911,17 +15929,19 @@
                 <a:spcPts val="0"/>
               </a:spcAft>
               <a:buClr>
-                <a:srgbClr val="000000"/>
+                <a:schemeClr val="lt1"/>
               </a:buClr>
-              <a:buFont typeface="Arial"/>
-              <a:defRPr sz="1400" b="0" i="0" u="none" strike="noStrike" cap="none">
+              <a:buSzPts val="2400"/>
+              <a:buFont typeface="Montserrat"/>
+              <a:buNone/>
+              <a:defRPr sz="2400" b="0" i="0" u="none" strike="noStrike" cap="none">
                 <a:solidFill>
-                  <a:srgbClr val="000000"/>
+                  <a:schemeClr val="lt1"/>
                 </a:solidFill>
-                <a:latin typeface="Arial"/>
-                <a:ea typeface="Arial"/>
-                <a:cs typeface="Arial"/>
-                <a:sym typeface="Arial"/>
+                <a:latin typeface="Montserrat"/>
+                <a:ea typeface="Montserrat"/>
+                <a:cs typeface="Montserrat"/>
+                <a:sym typeface="Montserrat"/>
               </a:defRPr>
             </a:lvl3pPr>
             <a:lvl4pPr marR="0" lvl="3" algn="l" rtl="0">
@@ -15935,17 +15955,19 @@
                 <a:spcPts val="0"/>
               </a:spcAft>
               <a:buClr>
-                <a:srgbClr val="000000"/>
+                <a:schemeClr val="lt1"/>
               </a:buClr>
-              <a:buFont typeface="Arial"/>
-              <a:defRPr sz="1400" b="0" i="0" u="none" strike="noStrike" cap="none">
+              <a:buSzPts val="2400"/>
+              <a:buFont typeface="Montserrat"/>
+              <a:buNone/>
+              <a:defRPr sz="2400" b="0" i="0" u="none" strike="noStrike" cap="none">
                 <a:solidFill>
-                  <a:srgbClr val="000000"/>
+                  <a:schemeClr val="lt1"/>
                 </a:solidFill>
-                <a:latin typeface="Arial"/>
-                <a:ea typeface="Arial"/>
-                <a:cs typeface="Arial"/>
-                <a:sym typeface="Arial"/>
+                <a:latin typeface="Montserrat"/>
+                <a:ea typeface="Montserrat"/>
+                <a:cs typeface="Montserrat"/>
+                <a:sym typeface="Montserrat"/>
               </a:defRPr>
             </a:lvl4pPr>
             <a:lvl5pPr marR="0" lvl="4" algn="l" rtl="0">
@@ -15959,17 +15981,19 @@
                 <a:spcPts val="0"/>
               </a:spcAft>
               <a:buClr>
-                <a:srgbClr val="000000"/>
+                <a:schemeClr val="lt1"/>
               </a:buClr>
-              <a:buFont typeface="Arial"/>
-              <a:defRPr sz="1400" b="0" i="0" u="none" strike="noStrike" cap="none">
+              <a:buSzPts val="2400"/>
+              <a:buFont typeface="Montserrat"/>
+              <a:buNone/>
+              <a:defRPr sz="2400" b="0" i="0" u="none" strike="noStrike" cap="none">
                 <a:solidFill>
-                  <a:srgbClr val="000000"/>
+                  <a:schemeClr val="lt1"/>
                 </a:solidFill>
-                <a:latin typeface="Arial"/>
-                <a:ea typeface="Arial"/>
-                <a:cs typeface="Arial"/>
-                <a:sym typeface="Arial"/>
+                <a:latin typeface="Montserrat"/>
+                <a:ea typeface="Montserrat"/>
+                <a:cs typeface="Montserrat"/>
+                <a:sym typeface="Montserrat"/>
               </a:defRPr>
             </a:lvl5pPr>
             <a:lvl6pPr marR="0" lvl="5" algn="l" rtl="0">
@@ -15983,17 +16007,19 @@
                 <a:spcPts val="0"/>
               </a:spcAft>
               <a:buClr>
-                <a:srgbClr val="000000"/>
+                <a:schemeClr val="lt1"/>
               </a:buClr>
-              <a:buFont typeface="Arial"/>
-              <a:defRPr sz="1400" b="0" i="0" u="none" strike="noStrike" cap="none">
+              <a:buSzPts val="2400"/>
+              <a:buFont typeface="Montserrat"/>
+              <a:buNone/>
+              <a:defRPr sz="2400" b="0" i="0" u="none" strike="noStrike" cap="none">
                 <a:solidFill>
-                  <a:srgbClr val="000000"/>
+                  <a:schemeClr val="lt1"/>
                 </a:solidFill>
-                <a:latin typeface="Arial"/>
-                <a:ea typeface="Arial"/>
-                <a:cs typeface="Arial"/>
-                <a:sym typeface="Arial"/>
+                <a:latin typeface="Montserrat"/>
+                <a:ea typeface="Montserrat"/>
+                <a:cs typeface="Montserrat"/>
+                <a:sym typeface="Montserrat"/>
               </a:defRPr>
             </a:lvl6pPr>
             <a:lvl7pPr marR="0" lvl="6" algn="l" rtl="0">
@@ -16007,17 +16033,19 @@
                 <a:spcPts val="0"/>
               </a:spcAft>
               <a:buClr>
-                <a:srgbClr val="000000"/>
+                <a:schemeClr val="lt1"/>
               </a:buClr>
-              <a:buFont typeface="Arial"/>
-              <a:defRPr sz="1400" b="0" i="0" u="none" strike="noStrike" cap="none">
+              <a:buSzPts val="2400"/>
+              <a:buFont typeface="Montserrat"/>
+              <a:buNone/>
+              <a:defRPr sz="2400" b="0" i="0" u="none" strike="noStrike" cap="none">
                 <a:solidFill>
-                  <a:srgbClr val="000000"/>
+                  <a:schemeClr val="lt1"/>
                 </a:solidFill>
-                <a:latin typeface="Arial"/>
-                <a:ea typeface="Arial"/>
-                <a:cs typeface="Arial"/>
-                <a:sym typeface="Arial"/>
+                <a:latin typeface="Montserrat"/>
+                <a:ea typeface="Montserrat"/>
+                <a:cs typeface="Montserrat"/>
+                <a:sym typeface="Montserrat"/>
               </a:defRPr>
             </a:lvl7pPr>
             <a:lvl8pPr marR="0" lvl="7" algn="l" rtl="0">
@@ -16031,17 +16059,19 @@
                 <a:spcPts val="0"/>
               </a:spcAft>
               <a:buClr>
-                <a:srgbClr val="000000"/>
+                <a:schemeClr val="lt1"/>
               </a:buClr>
-              <a:buFont typeface="Arial"/>
-              <a:defRPr sz="1400" b="0" i="0" u="none" strike="noStrike" cap="none">
+              <a:buSzPts val="2400"/>
+              <a:buFont typeface="Montserrat"/>
+              <a:buNone/>
+              <a:defRPr sz="2400" b="0" i="0" u="none" strike="noStrike" cap="none">
                 <a:solidFill>
-                  <a:srgbClr val="000000"/>
+                  <a:schemeClr val="lt1"/>
                 </a:solidFill>
-                <a:latin typeface="Arial"/>
-                <a:ea typeface="Arial"/>
-                <a:cs typeface="Arial"/>
-                <a:sym typeface="Arial"/>
+                <a:latin typeface="Montserrat"/>
+                <a:ea typeface="Montserrat"/>
+                <a:cs typeface="Montserrat"/>
+                <a:sym typeface="Montserrat"/>
               </a:defRPr>
             </a:lvl8pPr>
             <a:lvl9pPr marR="0" lvl="8" algn="l" rtl="0">
@@ -16055,86 +16085,438 @@
                 <a:spcPts val="0"/>
               </a:spcAft>
               <a:buClr>
-                <a:srgbClr val="000000"/>
+                <a:schemeClr val="lt1"/>
               </a:buClr>
-              <a:buFont typeface="Arial"/>
-              <a:defRPr sz="1400" b="0" i="0" u="none" strike="noStrike" cap="none">
+              <a:buSzPts val="2400"/>
+              <a:buFont typeface="Montserrat"/>
+              <a:buNone/>
+              <a:defRPr sz="2400" b="0" i="0" u="none" strike="noStrike" cap="none">
                 <a:solidFill>
-                  <a:srgbClr val="000000"/>
+                  <a:schemeClr val="lt1"/>
                 </a:solidFill>
-                <a:latin typeface="Arial"/>
-                <a:ea typeface="Arial"/>
-                <a:cs typeface="Arial"/>
-                <a:sym typeface="Arial"/>
+                <a:latin typeface="Montserrat"/>
+                <a:ea typeface="Montserrat"/>
+                <a:cs typeface="Montserrat"/>
+                <a:sym typeface="Montserrat"/>
               </a:defRPr>
             </a:lvl9pPr>
           </a:lstStyle>
           <a:p>
             <a:r>
-              <a:rPr lang="fr-FR" dirty="0">
-                <a:solidFill>
-                  <a:schemeClr val="bg1"/>
-                </a:solidFill>
-              </a:rPr>
-              <a:t>L’audit a confirmé que le chiffre d’affaires correct du 14 août 2024 est de 284 243,88 €.</a:t>
-            </a:r>
-          </a:p>
-          <a:p>
-            <a:r>
-              <a:rPr lang="fr-FR" dirty="0">
-                <a:solidFill>
-                  <a:schemeClr val="bg1"/>
-                </a:solidFill>
-              </a:rPr>
-              <a:t>L’écart avec le premier montant observé, soit 275 186,59 €, s’explique par l’intégration tardive de certaines ventes. Ces ventes, bien que rattachées à la journée du 14 août 2024, ont été insérées le 15 août 2024.</a:t>
-            </a:r>
-          </a:p>
-          <a:p>
-            <a:r>
-              <a:rPr lang="fr-FR" dirty="0">
-                <a:solidFill>
-                  <a:schemeClr val="bg1"/>
-                </a:solidFill>
-              </a:rPr>
-              <a:t>Le problème principal n’est donc pas un problème de calcul du chiffre d’affaires, mais un problème de fiabilité du processus d’intégration et de publication des données.</a:t>
-            </a:r>
-          </a:p>
-          <a:p>
-            <a:r>
-              <a:rPr lang="fr-FR" dirty="0">
-                <a:solidFill>
-                  <a:schemeClr val="bg1"/>
-                </a:solidFill>
-              </a:rPr>
-              <a:t>La mise en œuvre de ces actions est importante pour restaurer la confiance dans les indicateurs BI et permettre à </a:t>
-            </a:r>
-            <a:r>
-              <a:rPr lang="fr-FR" dirty="0" err="1">
-                <a:solidFill>
-                  <a:schemeClr val="bg1"/>
-                </a:solidFill>
-              </a:rPr>
-              <a:t>SuperSmartMarket</a:t>
-            </a:r>
-            <a:r>
-              <a:rPr lang="fr-FR" dirty="0">
-                <a:solidFill>
-                  <a:schemeClr val="bg1"/>
-                </a:solidFill>
-              </a:rPr>
-              <a:t> de poursuivre son ambition de personnalisation client sur des bases de données fiables.</a:t>
-            </a:r>
-          </a:p>
-          <a:p>
-            <a:endParaRPr lang="fr-FR" dirty="0">
-              <a:solidFill>
-                <a:schemeClr val="bg1"/>
-              </a:solidFill>
-            </a:endParaRPr>
+              <a:rPr lang="fr-FR" dirty="0"/>
+              <a:t>Recommandation pour l’entreprise</a:t>
+            </a:r>
+            <a:br>
+              <a:rPr lang="fr-FR" dirty="0"/>
+            </a:br>
+            <a:r>
+              <a:rPr lang="fr-FR" sz="2000" dirty="0"/>
+              <a:t>Automatiser le remplissage des tables de logs</a:t>
+            </a:r>
+            <a:endParaRPr lang="fr-FR" dirty="0"/>
           </a:p>
         </p:txBody>
       </p:sp>
     </p:spTree>
+    <p:extLst>
+      <p:ext uri="{BB962C8B-B14F-4D97-AF65-F5344CB8AC3E}">
+        <p14:creationId xmlns:p14="http://schemas.microsoft.com/office/powerpoint/2010/main" val="1094260605"/>
+      </p:ext>
+    </p:extLst>
+  </p:cSld>
+  <p:clrMapOvr>
+    <a:masterClrMapping/>
+  </p:clrMapOvr>
+</p:sld>
+</file>
+
+<file path=ppt/slides/slide19.xml><?xml version="1.0" encoding="utf-8"?>
+<p:sld xmlns:a="http://schemas.openxmlformats.org/drawingml/2006/main" xmlns:r="http://schemas.openxmlformats.org/officeDocument/2006/relationships" xmlns:p="http://schemas.openxmlformats.org/presentationml/2006/main">
+  <p:cSld>
+    <p:spTree>
+      <p:nvGrpSpPr>
+        <p:cNvPr id="1" name=""/>
+        <p:cNvGrpSpPr/>
+        <p:nvPr/>
+      </p:nvGrpSpPr>
+      <p:grpSpPr>
+        <a:xfrm>
+          <a:off x="0" y="0"/>
+          <a:ext cx="0" cy="0"/>
+          <a:chOff x="0" y="0"/>
+          <a:chExt cx="0" cy="0"/>
+        </a:xfrm>
+      </p:grpSpPr>
+      <p:sp>
+        <p:nvSpPr>
+          <p:cNvPr id="2" name="Titre 1">
+            <a:extLst>
+              <a:ext uri="{FF2B5EF4-FFF2-40B4-BE49-F238E27FC236}">
+                <a16:creationId xmlns:a16="http://schemas.microsoft.com/office/drawing/2014/main" id="{ABA43302-D0E7-203E-0F83-1329BD7379AE}"/>
+              </a:ext>
+            </a:extLst>
+          </p:cNvPr>
+          <p:cNvSpPr>
+            <a:spLocks noGrp="1"/>
+          </p:cNvSpPr>
+          <p:nvPr>
+            <p:ph type="title"/>
+          </p:nvPr>
+        </p:nvSpPr>
+        <p:spPr/>
+        <p:txBody>
+          <a:bodyPr>
+            <a:normAutofit fontScale="90000"/>
+          </a:bodyPr>
+          <a:lstStyle/>
+          <a:p>
+            <a:r>
+              <a:rPr lang="fr-FR" dirty="0"/>
+              <a:t>Recommandation pour l’entreprise</a:t>
+            </a:r>
+            <a:br>
+              <a:rPr lang="fr-FR" dirty="0"/>
+            </a:br>
+            <a:r>
+              <a:rPr lang="fr-FR" dirty="0"/>
+              <a:t>Automatiser le remplissage des tables de logs</a:t>
+            </a:r>
+            <a:br>
+              <a:rPr lang="fr-FR" dirty="0"/>
+            </a:br>
+            <a:endParaRPr lang="fr-FR" dirty="0"/>
+          </a:p>
+        </p:txBody>
+      </p:sp>
+      <p:sp>
+        <p:nvSpPr>
+          <p:cNvPr id="3" name="Espace réservé du texte 2">
+            <a:extLst>
+              <a:ext uri="{FF2B5EF4-FFF2-40B4-BE49-F238E27FC236}">
+                <a16:creationId xmlns:a16="http://schemas.microsoft.com/office/drawing/2014/main" id="{23E19556-E177-A858-4707-B3A47257B015}"/>
+              </a:ext>
+            </a:extLst>
+          </p:cNvPr>
+          <p:cNvSpPr>
+            <a:spLocks noGrp="1"/>
+          </p:cNvSpPr>
+          <p:nvPr>
+            <p:ph type="body" idx="1"/>
+          </p:nvPr>
+        </p:nvSpPr>
+        <p:spPr>
+          <a:xfrm>
+            <a:off x="604659" y="1307850"/>
+            <a:ext cx="8424581" cy="3714626"/>
+          </a:xfrm>
+        </p:spPr>
+        <p:txBody>
+          <a:bodyPr>
+            <a:normAutofit fontScale="70000" lnSpcReduction="20000"/>
+          </a:bodyPr>
+          <a:lstStyle/>
+          <a:p>
+            <a:pPr marL="146050" indent="0">
+              <a:buNone/>
+            </a:pPr>
+            <a:r>
+              <a:rPr lang="en-US" dirty="0"/>
+              <a:t>CREATE OR REPLACE FUNCTION </a:t>
+            </a:r>
+            <a:r>
+              <a:rPr lang="en-US" dirty="0" err="1"/>
+              <a:t>logs_employe_trigger_function</a:t>
+            </a:r>
+            <a:r>
+              <a:rPr lang="en-US" dirty="0"/>
+              <a:t>()</a:t>
+            </a:r>
+            <a:endParaRPr lang="fr-FR" dirty="0"/>
+          </a:p>
+          <a:p>
+            <a:pPr marL="146050" indent="0">
+              <a:buNone/>
+            </a:pPr>
+            <a:r>
+              <a:rPr lang="en-US" dirty="0"/>
+              <a:t>RETURNS TRIGGER AS $$</a:t>
+            </a:r>
+            <a:endParaRPr lang="fr-FR" dirty="0"/>
+          </a:p>
+          <a:p>
+            <a:pPr marL="146050" indent="0">
+              <a:buNone/>
+            </a:pPr>
+            <a:r>
+              <a:rPr lang="en-US" dirty="0"/>
+              <a:t>	BEGIN</a:t>
+            </a:r>
+            <a:endParaRPr lang="fr-FR" dirty="0"/>
+          </a:p>
+          <a:p>
+            <a:pPr marL="146050" indent="0">
+              <a:buNone/>
+            </a:pPr>
+            <a:r>
+              <a:rPr lang="en-US" dirty="0"/>
+              <a:t>		IF TG_OP ='INSERT' THEN -- operation for which the trigger was fired: INSERT, UPDATE, DELETE, or TRUNCATE</a:t>
+            </a:r>
+            <a:endParaRPr lang="fr-FR" dirty="0"/>
+          </a:p>
+          <a:p>
+            <a:pPr marL="146050" indent="0">
+              <a:buNone/>
+            </a:pPr>
+            <a:r>
+              <a:rPr lang="en-US" dirty="0"/>
+              <a:t>			INSERT INTO </a:t>
+            </a:r>
+            <a:r>
+              <a:rPr lang="en-US" dirty="0" err="1"/>
+              <a:t>logs_employe</a:t>
+            </a:r>
+            <a:r>
+              <a:rPr lang="en-US" dirty="0"/>
+              <a:t> (</a:t>
+            </a:r>
+            <a:endParaRPr lang="fr-FR" dirty="0"/>
+          </a:p>
+          <a:p>
+            <a:pPr marL="146050" indent="0">
+              <a:buNone/>
+            </a:pPr>
+            <a:r>
+              <a:rPr lang="en-US" dirty="0"/>
+              <a:t>				</a:t>
+            </a:r>
+            <a:r>
+              <a:rPr lang="fr-FR" dirty="0" err="1"/>
+              <a:t>id_user</a:t>
+            </a:r>
+            <a:r>
+              <a:rPr lang="fr-FR" dirty="0"/>
+              <a:t>,</a:t>
+            </a:r>
+          </a:p>
+          <a:p>
+            <a:pPr marL="146050" indent="0">
+              <a:buNone/>
+            </a:pPr>
+            <a:r>
+              <a:rPr lang="fr-FR" dirty="0"/>
+              <a:t>				date,</a:t>
+            </a:r>
+          </a:p>
+          <a:p>
+            <a:pPr marL="146050" indent="0">
+              <a:buNone/>
+            </a:pPr>
+            <a:r>
+              <a:rPr lang="fr-FR" dirty="0"/>
+              <a:t>				action,</a:t>
+            </a:r>
+          </a:p>
+          <a:p>
+            <a:pPr marL="146050" indent="0">
+              <a:buNone/>
+            </a:pPr>
+            <a:r>
+              <a:rPr lang="fr-FR" dirty="0"/>
+              <a:t>				</a:t>
+            </a:r>
+            <a:r>
+              <a:rPr lang="fr-FR" dirty="0" err="1"/>
+              <a:t>id_ligne</a:t>
+            </a:r>
+            <a:r>
+              <a:rPr lang="fr-FR" dirty="0"/>
+              <a:t>,				</a:t>
+            </a:r>
+          </a:p>
+          <a:p>
+            <a:pPr marL="146050" indent="0">
+              <a:buNone/>
+            </a:pPr>
+            <a:r>
+              <a:rPr lang="fr-FR" dirty="0"/>
+              <a:t>				commentaire</a:t>
+            </a:r>
+          </a:p>
+          <a:p>
+            <a:pPr marL="146050" indent="0">
+              <a:buNone/>
+            </a:pPr>
+            <a:r>
+              <a:rPr lang="fr-FR" dirty="0"/>
+              <a:t>			)</a:t>
+            </a:r>
+          </a:p>
+          <a:p>
+            <a:pPr marL="146050" indent="0">
+              <a:buNone/>
+            </a:pPr>
+            <a:r>
+              <a:rPr lang="fr-FR" dirty="0"/>
+              <a:t>			VALUES (</a:t>
+            </a:r>
+          </a:p>
+          <a:p>
+            <a:pPr marL="146050" indent="0">
+              <a:buNone/>
+            </a:pPr>
+            <a:r>
+              <a:rPr lang="fr-FR" dirty="0"/>
+              <a:t>				CURRENT_USER, -- utilisateur PostgreSQL connecté</a:t>
+            </a:r>
+          </a:p>
+          <a:p>
+            <a:pPr marL="146050" indent="0">
+              <a:buNone/>
+            </a:pPr>
+            <a:r>
+              <a:rPr lang="fr-FR" dirty="0"/>
+              <a:t>				CURRENT_DATE - DATE '1899-12-30’, -- Ex pour 14/8/2024 on a 45518. Cela sert à faire le lien avec la table calendrier qui contient toutes les dates.</a:t>
+            </a:r>
+          </a:p>
+          <a:p>
+            <a:pPr marL="146050" indent="0">
+              <a:buNone/>
+            </a:pPr>
+            <a:r>
+              <a:rPr lang="fr-FR" dirty="0"/>
+              <a:t>				TG_OP,</a:t>
+            </a:r>
+          </a:p>
+          <a:p>
+            <a:pPr marL="146050" indent="0">
+              <a:buNone/>
+            </a:pPr>
+            <a:r>
+              <a:rPr lang="fr-FR" dirty="0"/>
+              <a:t>				</a:t>
+            </a:r>
+            <a:r>
+              <a:rPr lang="fr-FR" dirty="0" err="1"/>
+              <a:t>NEW.id_employe</a:t>
+            </a:r>
+            <a:r>
+              <a:rPr lang="fr-FR" dirty="0"/>
+              <a:t>,</a:t>
+            </a:r>
+          </a:p>
+          <a:p>
+            <a:pPr marL="146050" indent="0">
+              <a:buNone/>
+            </a:pPr>
+            <a:r>
+              <a:rPr lang="fr-FR" dirty="0"/>
+              <a:t>				'Nouvel employé'</a:t>
+            </a:r>
+          </a:p>
+          <a:p>
+            <a:pPr marL="146050" indent="0">
+              <a:buNone/>
+            </a:pPr>
+            <a:r>
+              <a:rPr lang="fr-FR" dirty="0"/>
+              <a:t>			</a:t>
+            </a:r>
+            <a:r>
+              <a:rPr lang="en-US" dirty="0"/>
+              <a:t>);</a:t>
+            </a:r>
+            <a:endParaRPr lang="fr-FR" dirty="0"/>
+          </a:p>
+          <a:p>
+            <a:pPr marL="146050" indent="0">
+              <a:buNone/>
+            </a:pPr>
+            <a:r>
+              <a:rPr lang="en-US" dirty="0"/>
+              <a:t>	</a:t>
+            </a:r>
+            <a:endParaRPr lang="fr-FR" dirty="0"/>
+          </a:p>
+          <a:p>
+            <a:pPr marL="146050" indent="0">
+              <a:buNone/>
+            </a:pPr>
+            <a:r>
+              <a:rPr lang="en-US" dirty="0"/>
+              <a:t>			RETURN NEW;</a:t>
+            </a:r>
+          </a:p>
+          <a:p>
+            <a:pPr marL="146050" indent="0">
+              <a:buNone/>
+            </a:pPr>
+            <a:r>
+              <a:rPr lang="en-US" dirty="0"/>
+              <a:t>	[… ELSIF UPDATE, DELETE…]</a:t>
+            </a:r>
+          </a:p>
+          <a:p>
+            <a:pPr marL="146050" indent="0">
+              <a:buNone/>
+            </a:pPr>
+            <a:endParaRPr lang="fr-FR" dirty="0"/>
+          </a:p>
+          <a:p>
+            <a:pPr marL="146050" indent="0">
+              <a:buNone/>
+            </a:pPr>
+            <a:r>
+              <a:rPr lang="en-US" dirty="0"/>
+              <a:t>		END IF;</a:t>
+            </a:r>
+            <a:endParaRPr lang="fr-FR" dirty="0"/>
+          </a:p>
+          <a:p>
+            <a:pPr marL="146050" indent="0">
+              <a:buNone/>
+            </a:pPr>
+            <a:r>
+              <a:rPr lang="en-US" dirty="0"/>
+              <a:t>		RETURN NULL;</a:t>
+            </a:r>
+            <a:endParaRPr lang="fr-FR" dirty="0"/>
+          </a:p>
+          <a:p>
+            <a:pPr marL="146050" indent="0">
+              <a:buNone/>
+            </a:pPr>
+            <a:r>
+              <a:rPr lang="en-US" dirty="0"/>
+              <a:t>	END;</a:t>
+            </a:r>
+            <a:endParaRPr lang="fr-FR" dirty="0"/>
+          </a:p>
+          <a:p>
+            <a:pPr marL="146050" indent="0">
+              <a:buNone/>
+            </a:pPr>
+            <a:r>
+              <a:rPr lang="en-US" dirty="0"/>
+              <a:t>$$ LANGUAGE </a:t>
+            </a:r>
+            <a:r>
+              <a:rPr lang="en-US" dirty="0" err="1"/>
+              <a:t>plpgsql</a:t>
+            </a:r>
+            <a:r>
+              <a:rPr lang="en-US" dirty="0"/>
+              <a:t>;</a:t>
+            </a:r>
+            <a:endParaRPr lang="fr-FR" dirty="0"/>
+          </a:p>
+        </p:txBody>
+      </p:sp>
+    </p:spTree>
+    <p:extLst>
+      <p:ext uri="{BB962C8B-B14F-4D97-AF65-F5344CB8AC3E}">
+        <p14:creationId xmlns:p14="http://schemas.microsoft.com/office/powerpoint/2010/main" val="677342059"/>
+      </p:ext>
+    </p:extLst>
   </p:cSld>
   <p:clrMapOvr>
     <a:masterClrMapping/>
@@ -16347,6 +16729,617 @@
               <a:t>- la part de chiffre d’affaires encaissé par employé.</a:t>
             </a:r>
             <a:endParaRPr dirty="0"/>
+          </a:p>
+        </p:txBody>
+      </p:sp>
+    </p:spTree>
+  </p:cSld>
+  <p:clrMapOvr>
+    <a:masterClrMapping/>
+  </p:clrMapOvr>
+</p:sld>
+</file>
+
+<file path=ppt/slides/slide20.xml><?xml version="1.0" encoding="utf-8"?>
+<p:sld xmlns:a="http://schemas.openxmlformats.org/drawingml/2006/main" xmlns:r="http://schemas.openxmlformats.org/officeDocument/2006/relationships" xmlns:p="http://schemas.openxmlformats.org/presentationml/2006/main">
+  <p:cSld>
+    <p:spTree>
+      <p:nvGrpSpPr>
+        <p:cNvPr id="1" name="">
+          <a:extLst>
+            <a:ext uri="{FF2B5EF4-FFF2-40B4-BE49-F238E27FC236}">
+              <a16:creationId xmlns:a16="http://schemas.microsoft.com/office/drawing/2014/main" id="{9EDB10CB-1015-7F5E-667E-FA3D05B5D3D5}"/>
+            </a:ext>
+          </a:extLst>
+        </p:cNvPr>
+        <p:cNvGrpSpPr/>
+        <p:nvPr/>
+      </p:nvGrpSpPr>
+      <p:grpSpPr>
+        <a:xfrm>
+          <a:off x="0" y="0"/>
+          <a:ext cx="0" cy="0"/>
+          <a:chOff x="0" y="0"/>
+          <a:chExt cx="0" cy="0"/>
+        </a:xfrm>
+      </p:grpSpPr>
+      <p:sp>
+        <p:nvSpPr>
+          <p:cNvPr id="2" name="Titre 1">
+            <a:extLst>
+              <a:ext uri="{FF2B5EF4-FFF2-40B4-BE49-F238E27FC236}">
+                <a16:creationId xmlns:a16="http://schemas.microsoft.com/office/drawing/2014/main" id="{0C58AFB1-9ABB-7BD4-A82A-D6C11EA07C68}"/>
+              </a:ext>
+            </a:extLst>
+          </p:cNvPr>
+          <p:cNvSpPr>
+            <a:spLocks noGrp="1"/>
+          </p:cNvSpPr>
+          <p:nvPr>
+            <p:ph type="title"/>
+          </p:nvPr>
+        </p:nvSpPr>
+        <p:spPr/>
+        <p:txBody>
+          <a:bodyPr>
+            <a:normAutofit fontScale="90000"/>
+          </a:bodyPr>
+          <a:lstStyle/>
+          <a:p>
+            <a:r>
+              <a:rPr lang="fr-FR" dirty="0"/>
+              <a:t>Recommandation pour l’entreprise</a:t>
+            </a:r>
+            <a:br>
+              <a:rPr lang="fr-FR" dirty="0"/>
+            </a:br>
+            <a:r>
+              <a:rPr lang="fr-FR" dirty="0"/>
+              <a:t>Automatiser le remplissage des tables de logs</a:t>
+            </a:r>
+            <a:br>
+              <a:rPr lang="fr-FR" dirty="0"/>
+            </a:br>
+            <a:endParaRPr lang="fr-FR" dirty="0"/>
+          </a:p>
+        </p:txBody>
+      </p:sp>
+      <p:sp>
+        <p:nvSpPr>
+          <p:cNvPr id="3" name="Espace réservé du texte 2">
+            <a:extLst>
+              <a:ext uri="{FF2B5EF4-FFF2-40B4-BE49-F238E27FC236}">
+                <a16:creationId xmlns:a16="http://schemas.microsoft.com/office/drawing/2014/main" id="{D43EA5C6-FC4B-D76F-9E70-044169092734}"/>
+              </a:ext>
+            </a:extLst>
+          </p:cNvPr>
+          <p:cNvSpPr>
+            <a:spLocks noGrp="1"/>
+          </p:cNvSpPr>
+          <p:nvPr>
+            <p:ph type="body" idx="1"/>
+          </p:nvPr>
+        </p:nvSpPr>
+        <p:spPr>
+          <a:xfrm>
+            <a:off x="604659" y="1307850"/>
+            <a:ext cx="8424581" cy="3714626"/>
+          </a:xfrm>
+        </p:spPr>
+        <p:txBody>
+          <a:bodyPr>
+            <a:normAutofit/>
+          </a:bodyPr>
+          <a:lstStyle/>
+          <a:p>
+            <a:pPr marL="146050" indent="0">
+              <a:buNone/>
+            </a:pPr>
+            <a:r>
+              <a:rPr lang="en-US" dirty="0"/>
+              <a:t>CREATE OR REPLACE TRIGGER </a:t>
+            </a:r>
+            <a:r>
+              <a:rPr lang="en-US" dirty="0" err="1"/>
+              <a:t>logs_employe_trigger</a:t>
+            </a:r>
+            <a:endParaRPr lang="fr-FR" dirty="0"/>
+          </a:p>
+          <a:p>
+            <a:pPr marL="146050" indent="0">
+              <a:buNone/>
+            </a:pPr>
+            <a:r>
+              <a:rPr lang="en-US" dirty="0"/>
+              <a:t>BEFORE INSERT OR UPDATE OR DELETE ON employe</a:t>
+            </a:r>
+            <a:endParaRPr lang="fr-FR" dirty="0"/>
+          </a:p>
+          <a:p>
+            <a:pPr marL="146050" indent="0">
+              <a:buNone/>
+            </a:pPr>
+            <a:r>
+              <a:rPr lang="en-US" dirty="0"/>
+              <a:t>	FOR EACH ROW</a:t>
+            </a:r>
+            <a:endParaRPr lang="fr-FR" dirty="0"/>
+          </a:p>
+          <a:p>
+            <a:pPr marL="146050" indent="0">
+              <a:buNone/>
+            </a:pPr>
+            <a:r>
+              <a:rPr lang="en-US" dirty="0"/>
+              <a:t>	EXECUTE FUNCTION </a:t>
+            </a:r>
+            <a:r>
+              <a:rPr lang="en-US" dirty="0" err="1"/>
+              <a:t>logs_employe_trigger_function</a:t>
+            </a:r>
+            <a:r>
+              <a:rPr lang="en-US" dirty="0"/>
+              <a:t>();</a:t>
+            </a:r>
+          </a:p>
+          <a:p>
+            <a:pPr marL="146050" indent="0">
+              <a:buNone/>
+            </a:pPr>
+            <a:endParaRPr lang="en-US" dirty="0"/>
+          </a:p>
+          <a:p>
+            <a:pPr marL="146050" indent="0">
+              <a:buNone/>
+            </a:pPr>
+            <a:r>
+              <a:rPr lang="en-US" dirty="0" err="1"/>
+              <a:t>Exemple</a:t>
+            </a:r>
+            <a:r>
+              <a:rPr lang="en-US" dirty="0"/>
+              <a:t> de </a:t>
+            </a:r>
+            <a:r>
+              <a:rPr lang="en-US" dirty="0" err="1"/>
+              <a:t>résultats</a:t>
+            </a:r>
+            <a:r>
+              <a:rPr lang="en-US" dirty="0"/>
+              <a:t> </a:t>
+            </a:r>
+            <a:r>
+              <a:rPr lang="en-US" dirty="0" err="1"/>
+              <a:t>d’insertion</a:t>
+            </a:r>
+            <a:r>
+              <a:rPr lang="en-US" dirty="0"/>
+              <a:t>, suppression, mise à jour:</a:t>
+            </a:r>
+            <a:endParaRPr lang="fr-FR" dirty="0"/>
+          </a:p>
+        </p:txBody>
+      </p:sp>
+      <p:pic>
+        <p:nvPicPr>
+          <p:cNvPr id="5" name="Image 4">
+            <a:extLst>
+              <a:ext uri="{FF2B5EF4-FFF2-40B4-BE49-F238E27FC236}">
+                <a16:creationId xmlns:a16="http://schemas.microsoft.com/office/drawing/2014/main" id="{B633ED99-4620-1314-018F-7CD8B201602A}"/>
+              </a:ext>
+            </a:extLst>
+          </p:cNvPr>
+          <p:cNvPicPr>
+            <a:picLocks noChangeAspect="1"/>
+          </p:cNvPicPr>
+          <p:nvPr/>
+        </p:nvPicPr>
+        <p:blipFill>
+          <a:blip r:embed="rId2"/>
+          <a:stretch>
+            <a:fillRect/>
+          </a:stretch>
+        </p:blipFill>
+        <p:spPr>
+          <a:xfrm>
+            <a:off x="1757689" y="2936033"/>
+            <a:ext cx="6690940" cy="1813717"/>
+          </a:xfrm>
+          <a:prstGeom prst="rect">
+            <a:avLst/>
+          </a:prstGeom>
+        </p:spPr>
+      </p:pic>
+    </p:spTree>
+    <p:extLst>
+      <p:ext uri="{BB962C8B-B14F-4D97-AF65-F5344CB8AC3E}">
+        <p14:creationId xmlns:p14="http://schemas.microsoft.com/office/powerpoint/2010/main" val="3939006677"/>
+      </p:ext>
+    </p:extLst>
+  </p:cSld>
+  <p:clrMapOvr>
+    <a:masterClrMapping/>
+  </p:clrMapOvr>
+</p:sld>
+</file>
+
+<file path=ppt/slides/slide21.xml><?xml version="1.0" encoding="utf-8"?>
+<p:sld xmlns:a="http://schemas.openxmlformats.org/drawingml/2006/main" xmlns:r="http://schemas.openxmlformats.org/officeDocument/2006/relationships" xmlns:p="http://schemas.openxmlformats.org/presentationml/2006/main">
+  <p:cSld>
+    <p:spTree>
+      <p:nvGrpSpPr>
+        <p:cNvPr id="1" name="Shape 220"/>
+        <p:cNvGrpSpPr/>
+        <p:nvPr/>
+      </p:nvGrpSpPr>
+      <p:grpSpPr>
+        <a:xfrm>
+          <a:off x="0" y="0"/>
+          <a:ext cx="0" cy="0"/>
+          <a:chOff x="0" y="0"/>
+          <a:chExt cx="0" cy="0"/>
+        </a:xfrm>
+      </p:grpSpPr>
+      <p:sp>
+        <p:nvSpPr>
+          <p:cNvPr id="221" name="Google Shape;221;p28"/>
+          <p:cNvSpPr txBox="1">
+            <a:spLocks noGrp="1"/>
+          </p:cNvSpPr>
+          <p:nvPr>
+            <p:ph type="title"/>
+          </p:nvPr>
+        </p:nvSpPr>
+        <p:spPr>
+          <a:xfrm>
+            <a:off x="311700" y="1388850"/>
+            <a:ext cx="8520600" cy="841800"/>
+          </a:xfrm>
+          <a:prstGeom prst="rect">
+            <a:avLst/>
+          </a:prstGeom>
+        </p:spPr>
+        <p:txBody>
+          <a:bodyPr spcFirstLastPara="1" wrap="square" lIns="91425" tIns="91425" rIns="91425" bIns="91425" anchor="ctr" anchorCtr="0">
+            <a:normAutofit/>
+          </a:bodyPr>
+          <a:lstStyle/>
+          <a:p>
+            <a:pPr marL="0" lvl="0" indent="0" algn="l" rtl="0">
+              <a:spcBef>
+                <a:spcPts val="0"/>
+              </a:spcBef>
+              <a:spcAft>
+                <a:spcPts val="0"/>
+              </a:spcAft>
+              <a:buNone/>
+            </a:pPr>
+            <a:r>
+              <a:rPr lang="fr"/>
+              <a:t>Conclusion</a:t>
+            </a:r>
+            <a:endParaRPr/>
+          </a:p>
+        </p:txBody>
+      </p:sp>
+      <p:sp>
+        <p:nvSpPr>
+          <p:cNvPr id="2" name="Google Shape;141;p14">
+            <a:extLst>
+              <a:ext uri="{FF2B5EF4-FFF2-40B4-BE49-F238E27FC236}">
+                <a16:creationId xmlns:a16="http://schemas.microsoft.com/office/drawing/2014/main" id="{722CD8E7-9D36-EE44-12F0-ABB8A5FC2A2C}"/>
+              </a:ext>
+            </a:extLst>
+          </p:cNvPr>
+          <p:cNvSpPr txBox="1">
+            <a:spLocks/>
+          </p:cNvSpPr>
+          <p:nvPr/>
+        </p:nvSpPr>
+        <p:spPr>
+          <a:xfrm>
+            <a:off x="147776" y="2230650"/>
+            <a:ext cx="5768930" cy="2911200"/>
+          </a:xfrm>
+          <a:prstGeom prst="rect">
+            <a:avLst/>
+          </a:prstGeom>
+        </p:spPr>
+        <p:txBody>
+          <a:bodyPr spcFirstLastPara="1" wrap="square" lIns="91425" tIns="91425" rIns="91425" bIns="91425" anchor="t" anchorCtr="0">
+            <a:normAutofit lnSpcReduction="10000"/>
+          </a:bodyPr>
+          <a:lstStyle>
+            <a:defPPr marR="0" lvl="0" algn="l" rtl="0">
+              <a:lnSpc>
+                <a:spcPct val="100000"/>
+              </a:lnSpc>
+              <a:spcBef>
+                <a:spcPts val="0"/>
+              </a:spcBef>
+              <a:spcAft>
+                <a:spcPts val="0"/>
+              </a:spcAft>
+            </a:defPPr>
+            <a:lvl1pPr marR="0" lvl="0" algn="l" rtl="0">
+              <a:lnSpc>
+                <a:spcPct val="100000"/>
+              </a:lnSpc>
+              <a:spcBef>
+                <a:spcPts val="0"/>
+              </a:spcBef>
+              <a:spcAft>
+                <a:spcPts val="0"/>
+              </a:spcAft>
+              <a:buClr>
+                <a:srgbClr val="000000"/>
+              </a:buClr>
+              <a:buFont typeface="Arial"/>
+              <a:defRPr sz="1400" b="0" i="0" u="none" strike="noStrike" cap="none">
+                <a:solidFill>
+                  <a:srgbClr val="000000"/>
+                </a:solidFill>
+                <a:latin typeface="Arial"/>
+                <a:ea typeface="Arial"/>
+                <a:cs typeface="Arial"/>
+                <a:sym typeface="Arial"/>
+              </a:defRPr>
+            </a:lvl1pPr>
+            <a:lvl2pPr marR="0" lvl="1" algn="l" rtl="0">
+              <a:lnSpc>
+                <a:spcPct val="100000"/>
+              </a:lnSpc>
+              <a:spcBef>
+                <a:spcPts val="0"/>
+              </a:spcBef>
+              <a:spcAft>
+                <a:spcPts val="0"/>
+              </a:spcAft>
+              <a:buClr>
+                <a:srgbClr val="000000"/>
+              </a:buClr>
+              <a:buFont typeface="Arial"/>
+              <a:defRPr sz="1400" b="0" i="0" u="none" strike="noStrike" cap="none">
+                <a:solidFill>
+                  <a:srgbClr val="000000"/>
+                </a:solidFill>
+                <a:latin typeface="Arial"/>
+                <a:ea typeface="Arial"/>
+                <a:cs typeface="Arial"/>
+                <a:sym typeface="Arial"/>
+              </a:defRPr>
+            </a:lvl2pPr>
+            <a:lvl3pPr marR="0" lvl="2" algn="l" rtl="0">
+              <a:lnSpc>
+                <a:spcPct val="100000"/>
+              </a:lnSpc>
+              <a:spcBef>
+                <a:spcPts val="0"/>
+              </a:spcBef>
+              <a:spcAft>
+                <a:spcPts val="0"/>
+              </a:spcAft>
+              <a:buClr>
+                <a:srgbClr val="000000"/>
+              </a:buClr>
+              <a:buFont typeface="Arial"/>
+              <a:defRPr sz="1400" b="0" i="0" u="none" strike="noStrike" cap="none">
+                <a:solidFill>
+                  <a:srgbClr val="000000"/>
+                </a:solidFill>
+                <a:latin typeface="Arial"/>
+                <a:ea typeface="Arial"/>
+                <a:cs typeface="Arial"/>
+                <a:sym typeface="Arial"/>
+              </a:defRPr>
+            </a:lvl3pPr>
+            <a:lvl4pPr marR="0" lvl="3" algn="l" rtl="0">
+              <a:lnSpc>
+                <a:spcPct val="100000"/>
+              </a:lnSpc>
+              <a:spcBef>
+                <a:spcPts val="0"/>
+              </a:spcBef>
+              <a:spcAft>
+                <a:spcPts val="0"/>
+              </a:spcAft>
+              <a:buClr>
+                <a:srgbClr val="000000"/>
+              </a:buClr>
+              <a:buFont typeface="Arial"/>
+              <a:defRPr sz="1400" b="0" i="0" u="none" strike="noStrike" cap="none">
+                <a:solidFill>
+                  <a:srgbClr val="000000"/>
+                </a:solidFill>
+                <a:latin typeface="Arial"/>
+                <a:ea typeface="Arial"/>
+                <a:cs typeface="Arial"/>
+                <a:sym typeface="Arial"/>
+              </a:defRPr>
+            </a:lvl4pPr>
+            <a:lvl5pPr marR="0" lvl="4" algn="l" rtl="0">
+              <a:lnSpc>
+                <a:spcPct val="100000"/>
+              </a:lnSpc>
+              <a:spcBef>
+                <a:spcPts val="0"/>
+              </a:spcBef>
+              <a:spcAft>
+                <a:spcPts val="0"/>
+              </a:spcAft>
+              <a:buClr>
+                <a:srgbClr val="000000"/>
+              </a:buClr>
+              <a:buFont typeface="Arial"/>
+              <a:defRPr sz="1400" b="0" i="0" u="none" strike="noStrike" cap="none">
+                <a:solidFill>
+                  <a:srgbClr val="000000"/>
+                </a:solidFill>
+                <a:latin typeface="Arial"/>
+                <a:ea typeface="Arial"/>
+                <a:cs typeface="Arial"/>
+                <a:sym typeface="Arial"/>
+              </a:defRPr>
+            </a:lvl5pPr>
+            <a:lvl6pPr marR="0" lvl="5" algn="l" rtl="0">
+              <a:lnSpc>
+                <a:spcPct val="100000"/>
+              </a:lnSpc>
+              <a:spcBef>
+                <a:spcPts val="0"/>
+              </a:spcBef>
+              <a:spcAft>
+                <a:spcPts val="0"/>
+              </a:spcAft>
+              <a:buClr>
+                <a:srgbClr val="000000"/>
+              </a:buClr>
+              <a:buFont typeface="Arial"/>
+              <a:defRPr sz="1400" b="0" i="0" u="none" strike="noStrike" cap="none">
+                <a:solidFill>
+                  <a:srgbClr val="000000"/>
+                </a:solidFill>
+                <a:latin typeface="Arial"/>
+                <a:ea typeface="Arial"/>
+                <a:cs typeface="Arial"/>
+                <a:sym typeface="Arial"/>
+              </a:defRPr>
+            </a:lvl6pPr>
+            <a:lvl7pPr marR="0" lvl="6" algn="l" rtl="0">
+              <a:lnSpc>
+                <a:spcPct val="100000"/>
+              </a:lnSpc>
+              <a:spcBef>
+                <a:spcPts val="0"/>
+              </a:spcBef>
+              <a:spcAft>
+                <a:spcPts val="0"/>
+              </a:spcAft>
+              <a:buClr>
+                <a:srgbClr val="000000"/>
+              </a:buClr>
+              <a:buFont typeface="Arial"/>
+              <a:defRPr sz="1400" b="0" i="0" u="none" strike="noStrike" cap="none">
+                <a:solidFill>
+                  <a:srgbClr val="000000"/>
+                </a:solidFill>
+                <a:latin typeface="Arial"/>
+                <a:ea typeface="Arial"/>
+                <a:cs typeface="Arial"/>
+                <a:sym typeface="Arial"/>
+              </a:defRPr>
+            </a:lvl7pPr>
+            <a:lvl8pPr marR="0" lvl="7" algn="l" rtl="0">
+              <a:lnSpc>
+                <a:spcPct val="100000"/>
+              </a:lnSpc>
+              <a:spcBef>
+                <a:spcPts val="0"/>
+              </a:spcBef>
+              <a:spcAft>
+                <a:spcPts val="0"/>
+              </a:spcAft>
+              <a:buClr>
+                <a:srgbClr val="000000"/>
+              </a:buClr>
+              <a:buFont typeface="Arial"/>
+              <a:defRPr sz="1400" b="0" i="0" u="none" strike="noStrike" cap="none">
+                <a:solidFill>
+                  <a:srgbClr val="000000"/>
+                </a:solidFill>
+                <a:latin typeface="Arial"/>
+                <a:ea typeface="Arial"/>
+                <a:cs typeface="Arial"/>
+                <a:sym typeface="Arial"/>
+              </a:defRPr>
+            </a:lvl8pPr>
+            <a:lvl9pPr marR="0" lvl="8" algn="l" rtl="0">
+              <a:lnSpc>
+                <a:spcPct val="100000"/>
+              </a:lnSpc>
+              <a:spcBef>
+                <a:spcPts val="0"/>
+              </a:spcBef>
+              <a:spcAft>
+                <a:spcPts val="0"/>
+              </a:spcAft>
+              <a:buClr>
+                <a:srgbClr val="000000"/>
+              </a:buClr>
+              <a:buFont typeface="Arial"/>
+              <a:defRPr sz="1400" b="0" i="0" u="none" strike="noStrike" cap="none">
+                <a:solidFill>
+                  <a:srgbClr val="000000"/>
+                </a:solidFill>
+                <a:latin typeface="Arial"/>
+                <a:ea typeface="Arial"/>
+                <a:cs typeface="Arial"/>
+                <a:sym typeface="Arial"/>
+              </a:defRPr>
+            </a:lvl9pPr>
+          </a:lstStyle>
+          <a:p>
+            <a:r>
+              <a:rPr lang="fr-FR" dirty="0">
+                <a:solidFill>
+                  <a:schemeClr val="bg1"/>
+                </a:solidFill>
+              </a:rPr>
+              <a:t>L’audit a confirmé que le chiffre d’affaires correct du 14 août 2024 est de 284 243,88 €.</a:t>
+            </a:r>
+          </a:p>
+          <a:p>
+            <a:r>
+              <a:rPr lang="fr-FR" dirty="0">
+                <a:solidFill>
+                  <a:schemeClr val="bg1"/>
+                </a:solidFill>
+              </a:rPr>
+              <a:t>L’écart avec le premier montant observé, soit 275 186,59 €, s’explique par l’intégration tardive de certaines ventes. Ces ventes, bien que rattachées à la journée du 14 août 2024, ont été insérées le 15 août 2024.</a:t>
+            </a:r>
+          </a:p>
+          <a:p>
+            <a:r>
+              <a:rPr lang="fr-FR" dirty="0">
+                <a:solidFill>
+                  <a:schemeClr val="bg1"/>
+                </a:solidFill>
+              </a:rPr>
+              <a:t>Le problème principal n’est donc pas un problème de calcul du chiffre d’affaires, mais un problème de fiabilité du processus d’intégration et de publication des données.</a:t>
+            </a:r>
+          </a:p>
+          <a:p>
+            <a:r>
+              <a:rPr lang="fr-FR" dirty="0">
+                <a:solidFill>
+                  <a:schemeClr val="bg1"/>
+                </a:solidFill>
+              </a:rPr>
+              <a:t>La mise en œuvre de ces actions est importante pour restaurer la confiance dans les indicateurs BI et permettre à </a:t>
+            </a:r>
+            <a:r>
+              <a:rPr lang="fr-FR" dirty="0" err="1">
+                <a:solidFill>
+                  <a:schemeClr val="bg1"/>
+                </a:solidFill>
+              </a:rPr>
+              <a:t>SuperSmartMarket</a:t>
+            </a:r>
+            <a:r>
+              <a:rPr lang="fr-FR" dirty="0">
+                <a:solidFill>
+                  <a:schemeClr val="bg1"/>
+                </a:solidFill>
+              </a:rPr>
+              <a:t> de poursuivre son ambition de personnalisation client sur des bases de données fiables.</a:t>
+            </a:r>
+          </a:p>
+          <a:p>
+            <a:endParaRPr lang="fr-FR" dirty="0">
+              <a:solidFill>
+                <a:schemeClr val="bg1"/>
+              </a:solidFill>
+            </a:endParaRPr>
           </a:p>
         </p:txBody>
       </p:sp>
@@ -16783,7 +17776,7 @@
           <p:nvPr>
             <p:extLst>
               <p:ext uri="{D42A27DB-BD31-4B8C-83A1-F6EECF244321}">
-                <p14:modId xmlns:p14="http://schemas.microsoft.com/office/powerpoint/2010/main" val="1294868801"/>
+                <p14:modId xmlns:p14="http://schemas.microsoft.com/office/powerpoint/2010/main" val="4150577595"/>
               </p:ext>
             </p:extLst>
           </p:nvPr>

--- a/presentation_sebastien_ulesie.pptx
+++ b/presentation_sebastien_ulesie.pptx
@@ -5,54 +5,55 @@
     <p:sldMasterId id="2147483659" r:id="rId1"/>
   </p:sldMasterIdLst>
   <p:notesMasterIdLst>
-    <p:notesMasterId r:id="rId23"/>
+    <p:notesMasterId r:id="rId24"/>
   </p:notesMasterIdLst>
   <p:sldIdLst>
     <p:sldId id="256" r:id="rId2"/>
     <p:sldId id="257" r:id="rId3"/>
     <p:sldId id="259" r:id="rId4"/>
     <p:sldId id="260" r:id="rId5"/>
-    <p:sldId id="272" r:id="rId6"/>
-    <p:sldId id="261" r:id="rId7"/>
-    <p:sldId id="262" r:id="rId8"/>
-    <p:sldId id="263" r:id="rId9"/>
-    <p:sldId id="264" r:id="rId10"/>
-    <p:sldId id="265" r:id="rId11"/>
-    <p:sldId id="266" r:id="rId12"/>
-    <p:sldId id="267" r:id="rId13"/>
-    <p:sldId id="277" r:id="rId14"/>
-    <p:sldId id="273" r:id="rId15"/>
-    <p:sldId id="274" r:id="rId16"/>
-    <p:sldId id="275" r:id="rId17"/>
-    <p:sldId id="276" r:id="rId18"/>
-    <p:sldId id="278" r:id="rId19"/>
-    <p:sldId id="279" r:id="rId20"/>
-    <p:sldId id="281" r:id="rId21"/>
-    <p:sldId id="271" r:id="rId22"/>
+    <p:sldId id="282" r:id="rId6"/>
+    <p:sldId id="272" r:id="rId7"/>
+    <p:sldId id="261" r:id="rId8"/>
+    <p:sldId id="262" r:id="rId9"/>
+    <p:sldId id="263" r:id="rId10"/>
+    <p:sldId id="264" r:id="rId11"/>
+    <p:sldId id="265" r:id="rId12"/>
+    <p:sldId id="266" r:id="rId13"/>
+    <p:sldId id="267" r:id="rId14"/>
+    <p:sldId id="277" r:id="rId15"/>
+    <p:sldId id="273" r:id="rId16"/>
+    <p:sldId id="274" r:id="rId17"/>
+    <p:sldId id="275" r:id="rId18"/>
+    <p:sldId id="276" r:id="rId19"/>
+    <p:sldId id="278" r:id="rId20"/>
+    <p:sldId id="279" r:id="rId21"/>
+    <p:sldId id="281" r:id="rId22"/>
+    <p:sldId id="271" r:id="rId23"/>
   </p:sldIdLst>
   <p:sldSz cx="9144000" cy="5143500" type="screen16x9"/>
   <p:notesSz cx="6858000" cy="9144000"/>
   <p:embeddedFontLst>
     <p:embeddedFont>
       <p:font typeface="Lato" panose="020F0502020204030203" pitchFamily="34" charset="0"/>
-      <p:regular r:id="rId24"/>
-      <p:bold r:id="rId25"/>
-      <p:italic r:id="rId26"/>
-      <p:boldItalic r:id="rId27"/>
+      <p:regular r:id="rId25"/>
+      <p:bold r:id="rId26"/>
+      <p:italic r:id="rId27"/>
+      <p:boldItalic r:id="rId28"/>
     </p:embeddedFont>
     <p:embeddedFont>
       <p:font typeface="Montserrat" panose="00000500000000000000" pitchFamily="2" charset="0"/>
-      <p:regular r:id="rId28"/>
-      <p:bold r:id="rId29"/>
-      <p:italic r:id="rId30"/>
-      <p:boldItalic r:id="rId31"/>
+      <p:regular r:id="rId29"/>
+      <p:bold r:id="rId30"/>
+      <p:italic r:id="rId31"/>
+      <p:boldItalic r:id="rId32"/>
     </p:embeddedFont>
     <p:embeddedFont>
       <p:font typeface="Segoe UI" panose="020B0502040204020203" pitchFamily="34" charset="0"/>
-      <p:regular r:id="rId32"/>
-      <p:bold r:id="rId33"/>
-      <p:italic r:id="rId34"/>
-      <p:boldItalic r:id="rId35"/>
+      <p:regular r:id="rId33"/>
+      <p:bold r:id="rId34"/>
+      <p:italic r:id="rId35"/>
+      <p:boldItalic r:id="rId36"/>
     </p:embeddedFont>
   </p:embeddedFontLst>
   <p:defaultTextStyle>
@@ -853,6 +854,110 @@
   <p:cSld>
     <p:spTree>
       <p:nvGrpSpPr>
+        <p:cNvPr id="1" name="Shape 184"/>
+        <p:cNvGrpSpPr/>
+        <p:nvPr/>
+      </p:nvGrpSpPr>
+      <p:grpSpPr>
+        <a:xfrm>
+          <a:off x="0" y="0"/>
+          <a:ext cx="0" cy="0"/>
+          <a:chOff x="0" y="0"/>
+          <a:chExt cx="0" cy="0"/>
+        </a:xfrm>
+      </p:grpSpPr>
+      <p:sp>
+        <p:nvSpPr>
+          <p:cNvPr id="185" name="Google Shape;185;g2efd6a1ad4f_0_15:notes"/>
+          <p:cNvSpPr>
+            <a:spLocks noGrp="1" noRot="1" noChangeAspect="1"/>
+          </p:cNvSpPr>
+          <p:nvPr>
+            <p:ph type="sldImg" idx="2"/>
+          </p:nvPr>
+        </p:nvSpPr>
+        <p:spPr>
+          <a:xfrm>
+            <a:off x="381000" y="685800"/>
+            <a:ext cx="6096000" cy="3429000"/>
+          </a:xfrm>
+          <a:custGeom>
+            <a:avLst/>
+            <a:gdLst/>
+            <a:ahLst/>
+            <a:cxnLst/>
+            <a:rect l="l" t="t" r="r" b="b"/>
+            <a:pathLst>
+              <a:path w="120000" h="120000" extrusionOk="0">
+                <a:moveTo>
+                  <a:pt x="0" y="0"/>
+                </a:moveTo>
+                <a:lnTo>
+                  <a:pt x="120000" y="0"/>
+                </a:lnTo>
+                <a:lnTo>
+                  <a:pt x="120000" y="120000"/>
+                </a:lnTo>
+                <a:lnTo>
+                  <a:pt x="0" y="120000"/>
+                </a:lnTo>
+                <a:close/>
+              </a:path>
+            </a:pathLst>
+          </a:custGeom>
+        </p:spPr>
+      </p:sp>
+      <p:sp>
+        <p:nvSpPr>
+          <p:cNvPr id="186" name="Google Shape;186;g2efd6a1ad4f_0_15:notes"/>
+          <p:cNvSpPr txBox="1">
+            <a:spLocks noGrp="1"/>
+          </p:cNvSpPr>
+          <p:nvPr>
+            <p:ph type="body" idx="1"/>
+          </p:nvPr>
+        </p:nvSpPr>
+        <p:spPr>
+          <a:xfrm>
+            <a:off x="685800" y="4343400"/>
+            <a:ext cx="5486400" cy="4114800"/>
+          </a:xfrm>
+          <a:prstGeom prst="rect">
+            <a:avLst/>
+          </a:prstGeom>
+        </p:spPr>
+        <p:txBody>
+          <a:bodyPr spcFirstLastPara="1" wrap="square" lIns="91425" tIns="91425" rIns="91425" bIns="91425" anchor="t" anchorCtr="0">
+            <a:noAutofit/>
+          </a:bodyPr>
+          <a:lstStyle/>
+          <a:p>
+            <a:pPr marL="0" lvl="0" indent="0" algn="l" rtl="0">
+              <a:spcBef>
+                <a:spcPts val="0"/>
+              </a:spcBef>
+              <a:spcAft>
+                <a:spcPts val="0"/>
+              </a:spcAft>
+              <a:buNone/>
+            </a:pPr>
+            <a:endParaRPr/>
+          </a:p>
+        </p:txBody>
+      </p:sp>
+    </p:spTree>
+  </p:cSld>
+  <p:clrMapOvr>
+    <a:masterClrMapping/>
+  </p:clrMapOvr>
+</p:notes>
+</file>
+
+<file path=ppt/notesSlides/notesSlide11.xml><?xml version="1.0" encoding="utf-8"?>
+<p:notes xmlns:a="http://schemas.openxmlformats.org/drawingml/2006/main" xmlns:r="http://schemas.openxmlformats.org/officeDocument/2006/relationships" xmlns:p="http://schemas.openxmlformats.org/presentationml/2006/main" showMasterSp="0" showMasterPhAnim="0">
+  <p:cSld>
+    <p:spTree>
+      <p:nvGrpSpPr>
         <p:cNvPr id="1" name="Shape 190"/>
         <p:cNvGrpSpPr/>
         <p:nvPr/>
@@ -952,7 +1057,7 @@
 </p:notes>
 </file>
 
-<file path=ppt/notesSlides/notesSlide11.xml><?xml version="1.0" encoding="utf-8"?>
+<file path=ppt/notesSlides/notesSlide12.xml><?xml version="1.0" encoding="utf-8"?>
 <p:notes xmlns:a="http://schemas.openxmlformats.org/drawingml/2006/main" xmlns:r="http://schemas.openxmlformats.org/officeDocument/2006/relationships" xmlns:p="http://schemas.openxmlformats.org/presentationml/2006/main" showMasterSp="0" showMasterPhAnim="0">
   <p:cSld>
     <p:spTree>
@@ -1056,7 +1161,7 @@
 </p:notes>
 </file>
 
-<file path=ppt/notesSlides/notesSlide12.xml><?xml version="1.0" encoding="utf-8"?>
+<file path=ppt/notesSlides/notesSlide13.xml><?xml version="1.0" encoding="utf-8"?>
 <p:notes xmlns:a="http://schemas.openxmlformats.org/drawingml/2006/main" xmlns:r="http://schemas.openxmlformats.org/officeDocument/2006/relationships" xmlns:p="http://schemas.openxmlformats.org/presentationml/2006/main" showMasterSp="0" showMasterPhAnim="0">
   <p:cSld>
     <p:spTree>
@@ -1477,6 +1582,133 @@
   <p:cSld>
     <p:spTree>
       <p:nvGrpSpPr>
+        <p:cNvPr id="1" name="Shape 154">
+          <a:extLst>
+            <a:ext uri="{FF2B5EF4-FFF2-40B4-BE49-F238E27FC236}">
+              <a16:creationId xmlns:a16="http://schemas.microsoft.com/office/drawing/2014/main" id="{91641813-E52A-026E-EB5E-3F1741B08F1F}"/>
+            </a:ext>
+          </a:extLst>
+        </p:cNvPr>
+        <p:cNvGrpSpPr/>
+        <p:nvPr/>
+      </p:nvGrpSpPr>
+      <p:grpSpPr>
+        <a:xfrm>
+          <a:off x="0" y="0"/>
+          <a:ext cx="0" cy="0"/>
+          <a:chOff x="0" y="0"/>
+          <a:chExt cx="0" cy="0"/>
+        </a:xfrm>
+      </p:grpSpPr>
+      <p:sp>
+        <p:nvSpPr>
+          <p:cNvPr id="155" name="Google Shape;155;g2efd6a1ad4f_0_5:notes">
+            <a:extLst>
+              <a:ext uri="{FF2B5EF4-FFF2-40B4-BE49-F238E27FC236}">
+                <a16:creationId xmlns:a16="http://schemas.microsoft.com/office/drawing/2014/main" id="{330A7756-9093-F543-06ED-F11A84E8A62F}"/>
+              </a:ext>
+            </a:extLst>
+          </p:cNvPr>
+          <p:cNvSpPr>
+            <a:spLocks noGrp="1" noRot="1" noChangeAspect="1"/>
+          </p:cNvSpPr>
+          <p:nvPr>
+            <p:ph type="sldImg" idx="2"/>
+          </p:nvPr>
+        </p:nvSpPr>
+        <p:spPr>
+          <a:xfrm>
+            <a:off x="381000" y="685800"/>
+            <a:ext cx="6096000" cy="3429000"/>
+          </a:xfrm>
+          <a:custGeom>
+            <a:avLst/>
+            <a:gdLst/>
+            <a:ahLst/>
+            <a:cxnLst/>
+            <a:rect l="l" t="t" r="r" b="b"/>
+            <a:pathLst>
+              <a:path w="120000" h="120000" extrusionOk="0">
+                <a:moveTo>
+                  <a:pt x="0" y="0"/>
+                </a:moveTo>
+                <a:lnTo>
+                  <a:pt x="120000" y="0"/>
+                </a:lnTo>
+                <a:lnTo>
+                  <a:pt x="120000" y="120000"/>
+                </a:lnTo>
+                <a:lnTo>
+                  <a:pt x="0" y="120000"/>
+                </a:lnTo>
+                <a:close/>
+              </a:path>
+            </a:pathLst>
+          </a:custGeom>
+        </p:spPr>
+      </p:sp>
+      <p:sp>
+        <p:nvSpPr>
+          <p:cNvPr id="156" name="Google Shape;156;g2efd6a1ad4f_0_5:notes">
+            <a:extLst>
+              <a:ext uri="{FF2B5EF4-FFF2-40B4-BE49-F238E27FC236}">
+                <a16:creationId xmlns:a16="http://schemas.microsoft.com/office/drawing/2014/main" id="{D6824963-7B77-8C7C-2193-6A36B7FC5FFF}"/>
+              </a:ext>
+            </a:extLst>
+          </p:cNvPr>
+          <p:cNvSpPr txBox="1">
+            <a:spLocks noGrp="1"/>
+          </p:cNvSpPr>
+          <p:nvPr>
+            <p:ph type="body" idx="1"/>
+          </p:nvPr>
+        </p:nvSpPr>
+        <p:spPr>
+          <a:xfrm>
+            <a:off x="685800" y="4343400"/>
+            <a:ext cx="5486400" cy="4114800"/>
+          </a:xfrm>
+          <a:prstGeom prst="rect">
+            <a:avLst/>
+          </a:prstGeom>
+        </p:spPr>
+        <p:txBody>
+          <a:bodyPr spcFirstLastPara="1" wrap="square" lIns="91425" tIns="91425" rIns="91425" bIns="91425" anchor="t" anchorCtr="0">
+            <a:noAutofit/>
+          </a:bodyPr>
+          <a:lstStyle/>
+          <a:p>
+            <a:pPr marL="0" lvl="0" indent="0" algn="l" rtl="0">
+              <a:spcBef>
+                <a:spcPts val="0"/>
+              </a:spcBef>
+              <a:spcAft>
+                <a:spcPts val="0"/>
+              </a:spcAft>
+              <a:buNone/>
+            </a:pPr>
+            <a:endParaRPr/>
+          </a:p>
+        </p:txBody>
+      </p:sp>
+    </p:spTree>
+    <p:extLst>
+      <p:ext uri="{BB962C8B-B14F-4D97-AF65-F5344CB8AC3E}">
+        <p14:creationId xmlns:p14="http://schemas.microsoft.com/office/powerpoint/2010/main" val="3102706098"/>
+      </p:ext>
+    </p:extLst>
+  </p:cSld>
+  <p:clrMapOvr>
+    <a:masterClrMapping/>
+  </p:clrMapOvr>
+</p:notes>
+</file>
+
+<file path=ppt/notesSlides/notesSlide6.xml><?xml version="1.0" encoding="utf-8"?>
+<p:notes xmlns:a="http://schemas.openxmlformats.org/drawingml/2006/main" xmlns:r="http://schemas.openxmlformats.org/officeDocument/2006/relationships" xmlns:p="http://schemas.openxmlformats.org/presentationml/2006/main" showMasterSp="0" showMasterPhAnim="0">
+  <p:cSld>
+    <p:spTree>
+      <p:nvGrpSpPr>
         <p:cNvPr id="1" name="Shape 160"/>
         <p:cNvGrpSpPr/>
         <p:nvPr/>
@@ -1576,7 +1808,7 @@
 </p:notes>
 </file>
 
-<file path=ppt/notesSlides/notesSlide6.xml><?xml version="1.0" encoding="utf-8"?>
+<file path=ppt/notesSlides/notesSlide7.xml><?xml version="1.0" encoding="utf-8"?>
 <p:notes xmlns:a="http://schemas.openxmlformats.org/drawingml/2006/main" xmlns:r="http://schemas.openxmlformats.org/officeDocument/2006/relationships" xmlns:p="http://schemas.openxmlformats.org/presentationml/2006/main" showMasterSp="0" showMasterPhAnim="0">
   <p:cSld>
     <p:spTree>
@@ -1680,7 +1912,7 @@
 </p:notes>
 </file>
 
-<file path=ppt/notesSlides/notesSlide7.xml><?xml version="1.0" encoding="utf-8"?>
+<file path=ppt/notesSlides/notesSlide8.xml><?xml version="1.0" encoding="utf-8"?>
 <p:notes xmlns:a="http://schemas.openxmlformats.org/drawingml/2006/main" xmlns:r="http://schemas.openxmlformats.org/officeDocument/2006/relationships" xmlns:p="http://schemas.openxmlformats.org/presentationml/2006/main" showMasterSp="0" showMasterPhAnim="0">
   <p:cSld>
     <p:spTree>
@@ -1784,7 +2016,7 @@
 </p:notes>
 </file>
 
-<file path=ppt/notesSlides/notesSlide8.xml><?xml version="1.0" encoding="utf-8"?>
+<file path=ppt/notesSlides/notesSlide9.xml><?xml version="1.0" encoding="utf-8"?>
 <p:notes xmlns:a="http://schemas.openxmlformats.org/drawingml/2006/main" xmlns:r="http://schemas.openxmlformats.org/officeDocument/2006/relationships" xmlns:p="http://schemas.openxmlformats.org/presentationml/2006/main" showMasterSp="0" showMasterPhAnim="0">
   <p:cSld>
     <p:spTree>
@@ -1845,110 +2077,6 @@
       <p:sp>
         <p:nvSpPr>
           <p:cNvPr id="180" name="Google Shape;180;g2245a1bb278_0_138:notes"/>
-          <p:cNvSpPr txBox="1">
-            <a:spLocks noGrp="1"/>
-          </p:cNvSpPr>
-          <p:nvPr>
-            <p:ph type="body" idx="1"/>
-          </p:nvPr>
-        </p:nvSpPr>
-        <p:spPr>
-          <a:xfrm>
-            <a:off x="685800" y="4343400"/>
-            <a:ext cx="5486400" cy="4114800"/>
-          </a:xfrm>
-          <a:prstGeom prst="rect">
-            <a:avLst/>
-          </a:prstGeom>
-        </p:spPr>
-        <p:txBody>
-          <a:bodyPr spcFirstLastPara="1" wrap="square" lIns="91425" tIns="91425" rIns="91425" bIns="91425" anchor="t" anchorCtr="0">
-            <a:noAutofit/>
-          </a:bodyPr>
-          <a:lstStyle/>
-          <a:p>
-            <a:pPr marL="0" lvl="0" indent="0" algn="l" rtl="0">
-              <a:spcBef>
-                <a:spcPts val="0"/>
-              </a:spcBef>
-              <a:spcAft>
-                <a:spcPts val="0"/>
-              </a:spcAft>
-              <a:buNone/>
-            </a:pPr>
-            <a:endParaRPr/>
-          </a:p>
-        </p:txBody>
-      </p:sp>
-    </p:spTree>
-  </p:cSld>
-  <p:clrMapOvr>
-    <a:masterClrMapping/>
-  </p:clrMapOvr>
-</p:notes>
-</file>
-
-<file path=ppt/notesSlides/notesSlide9.xml><?xml version="1.0" encoding="utf-8"?>
-<p:notes xmlns:a="http://schemas.openxmlformats.org/drawingml/2006/main" xmlns:r="http://schemas.openxmlformats.org/officeDocument/2006/relationships" xmlns:p="http://schemas.openxmlformats.org/presentationml/2006/main" showMasterSp="0" showMasterPhAnim="0">
-  <p:cSld>
-    <p:spTree>
-      <p:nvGrpSpPr>
-        <p:cNvPr id="1" name="Shape 184"/>
-        <p:cNvGrpSpPr/>
-        <p:nvPr/>
-      </p:nvGrpSpPr>
-      <p:grpSpPr>
-        <a:xfrm>
-          <a:off x="0" y="0"/>
-          <a:ext cx="0" cy="0"/>
-          <a:chOff x="0" y="0"/>
-          <a:chExt cx="0" cy="0"/>
-        </a:xfrm>
-      </p:grpSpPr>
-      <p:sp>
-        <p:nvSpPr>
-          <p:cNvPr id="185" name="Google Shape;185;g2efd6a1ad4f_0_15:notes"/>
-          <p:cNvSpPr>
-            <a:spLocks noGrp="1" noRot="1" noChangeAspect="1"/>
-          </p:cNvSpPr>
-          <p:nvPr>
-            <p:ph type="sldImg" idx="2"/>
-          </p:nvPr>
-        </p:nvSpPr>
-        <p:spPr>
-          <a:xfrm>
-            <a:off x="381000" y="685800"/>
-            <a:ext cx="6096000" cy="3429000"/>
-          </a:xfrm>
-          <a:custGeom>
-            <a:avLst/>
-            <a:gdLst/>
-            <a:ahLst/>
-            <a:cxnLst/>
-            <a:rect l="l" t="t" r="r" b="b"/>
-            <a:pathLst>
-              <a:path w="120000" h="120000" extrusionOk="0">
-                <a:moveTo>
-                  <a:pt x="0" y="0"/>
-                </a:moveTo>
-                <a:lnTo>
-                  <a:pt x="120000" y="0"/>
-                </a:lnTo>
-                <a:lnTo>
-                  <a:pt x="120000" y="120000"/>
-                </a:lnTo>
-                <a:lnTo>
-                  <a:pt x="0" y="120000"/>
-                </a:lnTo>
-                <a:close/>
-              </a:path>
-            </a:pathLst>
-          </a:custGeom>
-        </p:spPr>
-      </p:sp>
-      <p:sp>
-        <p:nvSpPr>
-          <p:cNvPr id="186" name="Google Shape;186;g2efd6a1ad4f_0_15:notes"/>
           <p:cNvSpPr txBox="1">
             <a:spLocks noGrp="1"/>
           </p:cNvSpPr>
@@ -10172,6 +10300,733 @@
   <p:cSld>
     <p:spTree>
       <p:nvGrpSpPr>
+        <p:cNvPr id="1" name="Shape 181"/>
+        <p:cNvGrpSpPr/>
+        <p:nvPr/>
+      </p:nvGrpSpPr>
+      <p:grpSpPr>
+        <a:xfrm>
+          <a:off x="0" y="0"/>
+          <a:ext cx="0" cy="0"/>
+          <a:chOff x="0" y="0"/>
+          <a:chExt cx="0" cy="0"/>
+        </a:xfrm>
+      </p:grpSpPr>
+      <p:sp>
+        <p:nvSpPr>
+          <p:cNvPr id="182" name="Google Shape;182;p21"/>
+          <p:cNvSpPr txBox="1">
+            <a:spLocks noGrp="1"/>
+          </p:cNvSpPr>
+          <p:nvPr>
+            <p:ph type="body" idx="1"/>
+          </p:nvPr>
+        </p:nvSpPr>
+        <p:spPr>
+          <a:xfrm>
+            <a:off x="1297500" y="1567550"/>
+            <a:ext cx="7624624" cy="3479938"/>
+          </a:xfrm>
+          <a:prstGeom prst="rect">
+            <a:avLst/>
+          </a:prstGeom>
+        </p:spPr>
+        <p:txBody>
+          <a:bodyPr spcFirstLastPara="1" wrap="square" lIns="91425" tIns="91425" rIns="91425" bIns="91425" anchor="t" anchorCtr="0">
+            <a:normAutofit fontScale="85000" lnSpcReduction="20000"/>
+          </a:bodyPr>
+          <a:lstStyle/>
+          <a:p>
+            <a:pPr marR="152400" lvl="0" indent="-285750">
+              <a:buClr>
+                <a:srgbClr val="999999"/>
+              </a:buClr>
+              <a:buSzPts val="900"/>
+              <a:buFont typeface="Inter"/>
+              <a:buChar char="●"/>
+            </a:pPr>
+            <a:r>
+              <a:rPr lang="fr-FR" sz="900" dirty="0"/>
+              <a:t>CREATE or REPLACE VIEW </a:t>
+            </a:r>
+            <a:r>
+              <a:rPr lang="fr-FR" sz="900" dirty="0" err="1"/>
+              <a:t>ca_per_employe</a:t>
+            </a:r>
+            <a:r>
+              <a:rPr lang="fr-FR" sz="900" dirty="0"/>
+              <a:t> AS(</a:t>
+            </a:r>
+          </a:p>
+          <a:p>
+            <a:pPr marR="152400" lvl="0" indent="-285750">
+              <a:buClr>
+                <a:srgbClr val="999999"/>
+              </a:buClr>
+              <a:buSzPts val="900"/>
+              <a:buFont typeface="Inter"/>
+              <a:buChar char="●"/>
+            </a:pPr>
+            <a:r>
+              <a:rPr lang="fr-FR" sz="900" dirty="0" err="1"/>
+              <a:t>SELECTv.id_employe</a:t>
+            </a:r>
+            <a:r>
+              <a:rPr lang="fr-FR" sz="900" dirty="0"/>
+              <a:t>,</a:t>
+            </a:r>
+          </a:p>
+          <a:p>
+            <a:pPr marR="152400" lvl="0" indent="-285750">
+              <a:buClr>
+                <a:srgbClr val="999999"/>
+              </a:buClr>
+              <a:buSzPts val="900"/>
+              <a:buFont typeface="Inter"/>
+              <a:buChar char="●"/>
+            </a:pPr>
+            <a:r>
+              <a:rPr lang="fr-FR" sz="900" dirty="0"/>
+              <a:t>SUM(ROUND(</a:t>
+            </a:r>
+            <a:r>
+              <a:rPr lang="fr-FR" sz="900" dirty="0" err="1"/>
+              <a:t>p.prix</a:t>
+            </a:r>
+            <a:r>
+              <a:rPr lang="fr-FR" sz="900" dirty="0"/>
+              <a:t>::</a:t>
+            </a:r>
+            <a:r>
+              <a:rPr lang="fr-FR" sz="900" dirty="0" err="1"/>
+              <a:t>numeric</a:t>
+            </a:r>
+            <a:r>
+              <a:rPr lang="fr-FR" sz="900" dirty="0"/>
+              <a:t>, 2)) AS </a:t>
+            </a:r>
+            <a:r>
+              <a:rPr lang="fr-FR" sz="900" dirty="0" err="1"/>
+              <a:t>ca_arrondie_par_employe</a:t>
+            </a:r>
+            <a:endParaRPr lang="fr-FR" sz="900" dirty="0"/>
+          </a:p>
+          <a:p>
+            <a:pPr marR="152400" lvl="0" indent="-285750">
+              <a:buClr>
+                <a:srgbClr val="999999"/>
+              </a:buClr>
+              <a:buSzPts val="900"/>
+              <a:buFont typeface="Inter"/>
+              <a:buChar char="●"/>
+            </a:pPr>
+            <a:r>
+              <a:rPr lang="fr-FR" sz="900" dirty="0"/>
+              <a:t>FROM vente v</a:t>
+            </a:r>
+          </a:p>
+          <a:p>
+            <a:pPr marR="152400" lvl="0" indent="-285750">
+              <a:buClr>
+                <a:srgbClr val="999999"/>
+              </a:buClr>
+              <a:buSzPts val="900"/>
+              <a:buFont typeface="Inter"/>
+              <a:buChar char="●"/>
+            </a:pPr>
+            <a:r>
+              <a:rPr lang="fr-FR" sz="900" dirty="0"/>
+              <a:t>JOIN produit p ON </a:t>
+            </a:r>
+            <a:r>
+              <a:rPr lang="fr-FR" sz="900" dirty="0" err="1"/>
+              <a:t>v.ean</a:t>
+            </a:r>
+            <a:r>
+              <a:rPr lang="fr-FR" sz="900" dirty="0"/>
+              <a:t> = </a:t>
+            </a:r>
+            <a:r>
+              <a:rPr lang="fr-FR" sz="900" dirty="0" err="1"/>
+              <a:t>p.ean</a:t>
+            </a:r>
+            <a:endParaRPr lang="fr-FR" sz="900" dirty="0"/>
+          </a:p>
+          <a:p>
+            <a:pPr marR="152400" lvl="0" indent="-285750">
+              <a:buClr>
+                <a:srgbClr val="999999"/>
+              </a:buClr>
+              <a:buSzPts val="900"/>
+              <a:buFont typeface="Inter"/>
+              <a:buChar char="●"/>
+            </a:pPr>
+            <a:r>
+              <a:rPr lang="fr-FR" sz="900" dirty="0"/>
+              <a:t>GROUP BY </a:t>
+            </a:r>
+            <a:r>
+              <a:rPr lang="fr-FR" sz="900" dirty="0" err="1"/>
+              <a:t>v.id_employe</a:t>
+            </a:r>
+            <a:endParaRPr lang="fr-FR" sz="900" dirty="0"/>
+          </a:p>
+          <a:p>
+            <a:pPr marR="152400" lvl="0" indent="-285750">
+              <a:buClr>
+                <a:srgbClr val="999999"/>
+              </a:buClr>
+              <a:buSzPts val="900"/>
+              <a:buFont typeface="Inter"/>
+              <a:buChar char="●"/>
+            </a:pPr>
+            <a:r>
+              <a:rPr lang="fr-FR" sz="900" dirty="0"/>
+              <a:t>ORDER BY </a:t>
+            </a:r>
+            <a:r>
+              <a:rPr lang="fr-FR" sz="900" dirty="0" err="1"/>
+              <a:t>ca_arrondie_par_employe</a:t>
+            </a:r>
+            <a:r>
+              <a:rPr lang="fr-FR" sz="900" dirty="0"/>
+              <a:t> DESC</a:t>
+            </a:r>
+          </a:p>
+          <a:p>
+            <a:pPr marR="152400" lvl="0" indent="-285750">
+              <a:buClr>
+                <a:srgbClr val="999999"/>
+              </a:buClr>
+              <a:buSzPts val="900"/>
+              <a:buFont typeface="Inter"/>
+              <a:buChar char="●"/>
+            </a:pPr>
+            <a:r>
+              <a:rPr lang="fr-FR" sz="900" dirty="0"/>
+              <a:t>);</a:t>
+            </a:r>
+          </a:p>
+          <a:p>
+            <a:pPr marR="152400" lvl="0" indent="-285750">
+              <a:buClr>
+                <a:srgbClr val="999999"/>
+              </a:buClr>
+              <a:buSzPts val="900"/>
+              <a:buFont typeface="Inter"/>
+              <a:buChar char="●"/>
+            </a:pPr>
+            <a:endParaRPr lang="fr-FR" sz="900" dirty="0"/>
+          </a:p>
+          <a:p>
+            <a:pPr marR="152400" lvl="0" indent="-285750">
+              <a:buClr>
+                <a:srgbClr val="999999"/>
+              </a:buClr>
+              <a:buSzPts val="900"/>
+              <a:buFont typeface="Inter"/>
+              <a:buChar char="●"/>
+            </a:pPr>
+            <a:r>
+              <a:rPr lang="en-US" sz="900" dirty="0"/>
+              <a:t>CREATE or REPLACE VIEW </a:t>
+            </a:r>
+            <a:r>
+              <a:rPr lang="en-US" sz="900" dirty="0" err="1"/>
+              <a:t>ca_arrondi</a:t>
+            </a:r>
+            <a:r>
+              <a:rPr lang="en-US" sz="900" dirty="0"/>
+              <a:t> AS(</a:t>
+            </a:r>
+          </a:p>
+          <a:p>
+            <a:pPr marR="152400" lvl="0" indent="-285750">
+              <a:buClr>
+                <a:srgbClr val="999999"/>
+              </a:buClr>
+              <a:buSzPts val="900"/>
+              <a:buFont typeface="Inter"/>
+              <a:buChar char="●"/>
+            </a:pPr>
+            <a:r>
+              <a:rPr lang="en-US" sz="900" dirty="0" err="1"/>
+              <a:t>SELECTid_employe</a:t>
+            </a:r>
+            <a:r>
+              <a:rPr lang="en-US" sz="900" dirty="0"/>
+              <a:t>,</a:t>
+            </a:r>
+          </a:p>
+          <a:p>
+            <a:pPr marR="152400" lvl="0" indent="-285750">
+              <a:buClr>
+                <a:srgbClr val="999999"/>
+              </a:buClr>
+              <a:buSzPts val="900"/>
+              <a:buFont typeface="Inter"/>
+              <a:buChar char="●"/>
+            </a:pPr>
+            <a:r>
+              <a:rPr lang="en-US" sz="900" dirty="0"/>
+              <a:t>SUM(</a:t>
+            </a:r>
+            <a:r>
+              <a:rPr lang="en-US" sz="900" dirty="0" err="1"/>
+              <a:t>ca_arrondie_par_employe</a:t>
+            </a:r>
+            <a:r>
+              <a:rPr lang="en-US" sz="900" dirty="0"/>
+              <a:t>) OVER() AS </a:t>
+            </a:r>
+            <a:r>
+              <a:rPr lang="en-US" sz="900" dirty="0" err="1"/>
+              <a:t>ca_arrondi</a:t>
+            </a:r>
+            <a:endParaRPr lang="en-US" sz="900" dirty="0"/>
+          </a:p>
+          <a:p>
+            <a:pPr marR="152400" lvl="0" indent="-285750">
+              <a:buClr>
+                <a:srgbClr val="999999"/>
+              </a:buClr>
+              <a:buSzPts val="900"/>
+              <a:buFont typeface="Inter"/>
+              <a:buChar char="●"/>
+            </a:pPr>
+            <a:r>
+              <a:rPr lang="en-US" sz="900" dirty="0"/>
+              <a:t>FROM </a:t>
+            </a:r>
+            <a:r>
+              <a:rPr lang="en-US" sz="900" dirty="0" err="1"/>
+              <a:t>ca_per_employe</a:t>
+            </a:r>
+            <a:endParaRPr lang="en-US" sz="900" dirty="0"/>
+          </a:p>
+          <a:p>
+            <a:pPr marR="152400" lvl="0" indent="-285750">
+              <a:buClr>
+                <a:srgbClr val="999999"/>
+              </a:buClr>
+              <a:buSzPts val="900"/>
+              <a:buFont typeface="Inter"/>
+              <a:buChar char="●"/>
+            </a:pPr>
+            <a:r>
+              <a:rPr lang="en-US" sz="900" dirty="0"/>
+              <a:t>);</a:t>
+            </a:r>
+            <a:endParaRPr lang="fr-FR" sz="900" dirty="0"/>
+          </a:p>
+          <a:p>
+            <a:pPr marR="152400" lvl="0" indent="-285750">
+              <a:buClr>
+                <a:srgbClr val="999999"/>
+              </a:buClr>
+              <a:buSzPts val="900"/>
+              <a:buFont typeface="Inter"/>
+              <a:buChar char="●"/>
+            </a:pPr>
+            <a:endParaRPr lang="fr-FR" sz="900" dirty="0"/>
+          </a:p>
+          <a:p>
+            <a:pPr marR="152400" lvl="0" indent="-285750">
+              <a:buClr>
+                <a:srgbClr val="999999"/>
+              </a:buClr>
+              <a:buSzPts val="900"/>
+              <a:buFont typeface="Inter"/>
+              <a:buChar char="●"/>
+            </a:pPr>
+            <a:r>
+              <a:rPr lang="fr-FR" sz="900" dirty="0"/>
+              <a:t>SELECT</a:t>
+            </a:r>
+          </a:p>
+          <a:p>
+            <a:pPr marR="152400" lvl="0" indent="-285750">
+              <a:buClr>
+                <a:srgbClr val="999999"/>
+              </a:buClr>
+              <a:buSzPts val="900"/>
+              <a:buFont typeface="Inter"/>
+              <a:buChar char="●"/>
+            </a:pPr>
+            <a:r>
+              <a:rPr lang="fr-FR" sz="900" dirty="0" err="1"/>
+              <a:t>e.employe</a:t>
+            </a:r>
+            <a:r>
+              <a:rPr lang="fr-FR" sz="900" dirty="0"/>
+              <a:t>,</a:t>
+            </a:r>
+          </a:p>
+          <a:p>
+            <a:pPr marR="152400" lvl="0" indent="-285750">
+              <a:buClr>
+                <a:srgbClr val="999999"/>
+              </a:buClr>
+              <a:buSzPts val="900"/>
+              <a:buFont typeface="Inter"/>
+              <a:buChar char="●"/>
+            </a:pPr>
+            <a:r>
+              <a:rPr lang="fr-FR" sz="900" dirty="0"/>
+              <a:t>CONCAT(</a:t>
+            </a:r>
+            <a:r>
+              <a:rPr lang="fr-FR" sz="900" dirty="0" err="1"/>
+              <a:t>c.jour</a:t>
+            </a:r>
+            <a:r>
+              <a:rPr lang="fr-FR" sz="900" dirty="0"/>
+              <a:t>,'/',</a:t>
+            </a:r>
+            <a:r>
+              <a:rPr lang="fr-FR" sz="900" dirty="0" err="1"/>
+              <a:t>c.mois</a:t>
+            </a:r>
+            <a:r>
+              <a:rPr lang="fr-FR" sz="900" dirty="0"/>
+              <a:t>,'/',</a:t>
+            </a:r>
+            <a:r>
+              <a:rPr lang="fr-FR" sz="900" dirty="0" err="1"/>
+              <a:t>c.annee</a:t>
+            </a:r>
+            <a:r>
+              <a:rPr lang="fr-FR" sz="900" dirty="0"/>
+              <a:t>) AS </a:t>
+            </a:r>
+            <a:r>
+              <a:rPr lang="fr-FR" sz="900" dirty="0" err="1"/>
+              <a:t>date_de_début</a:t>
+            </a:r>
+            <a:r>
+              <a:rPr lang="fr-FR" sz="900" dirty="0"/>
+              <a:t>,</a:t>
+            </a:r>
+          </a:p>
+          <a:p>
+            <a:pPr marR="152400" lvl="0" indent="-285750">
+              <a:buClr>
+                <a:srgbClr val="999999"/>
+              </a:buClr>
+              <a:buSzPts val="900"/>
+              <a:buFont typeface="Inter"/>
+              <a:buChar char="●"/>
+            </a:pPr>
+            <a:r>
+              <a:rPr lang="fr-FR" sz="900" dirty="0" err="1"/>
+              <a:t>cap.ca_arrondie_par_employe</a:t>
+            </a:r>
+            <a:r>
+              <a:rPr lang="fr-FR" sz="900" dirty="0"/>
+              <a:t>,</a:t>
+            </a:r>
+          </a:p>
+          <a:p>
+            <a:pPr marR="152400" lvl="0" indent="-285750">
+              <a:buClr>
+                <a:srgbClr val="999999"/>
+              </a:buClr>
+              <a:buSzPts val="900"/>
+              <a:buFont typeface="Inter"/>
+              <a:buChar char="●"/>
+            </a:pPr>
+            <a:r>
+              <a:rPr lang="fr-FR" sz="900" dirty="0"/>
+              <a:t>CONCAT(ROUND(</a:t>
+            </a:r>
+            <a:r>
+              <a:rPr lang="fr-FR" sz="900" dirty="0" err="1"/>
+              <a:t>cap.ca_arrondie_par_employe</a:t>
+            </a:r>
+            <a:r>
+              <a:rPr lang="fr-FR" sz="900" dirty="0"/>
+              <a:t>*100.0/ca_arrondi,2),'%') AS </a:t>
+            </a:r>
+            <a:r>
+              <a:rPr lang="fr-FR" sz="900" dirty="0" err="1"/>
+              <a:t>part_ca_par_employe</a:t>
+            </a:r>
+            <a:endParaRPr lang="fr-FR" sz="900" dirty="0"/>
+          </a:p>
+          <a:p>
+            <a:pPr marR="152400" lvl="0" indent="-285750">
+              <a:buClr>
+                <a:srgbClr val="999999"/>
+              </a:buClr>
+              <a:buSzPts val="900"/>
+              <a:buFont typeface="Inter"/>
+              <a:buChar char="●"/>
+            </a:pPr>
+            <a:r>
+              <a:rPr lang="fr-FR" sz="900" dirty="0"/>
+              <a:t>FROM </a:t>
+            </a:r>
+            <a:r>
+              <a:rPr lang="fr-FR" sz="900" dirty="0" err="1"/>
+              <a:t>ca_per_employe</a:t>
+            </a:r>
+            <a:r>
+              <a:rPr lang="fr-FR" sz="900" dirty="0"/>
+              <a:t> cap</a:t>
+            </a:r>
+          </a:p>
+          <a:p>
+            <a:pPr marR="152400" lvl="0" indent="-285750">
+              <a:buClr>
+                <a:srgbClr val="999999"/>
+              </a:buClr>
+              <a:buSzPts val="900"/>
+              <a:buFont typeface="Inter"/>
+              <a:buChar char="●"/>
+            </a:pPr>
+            <a:r>
+              <a:rPr lang="fr-FR" sz="900" dirty="0"/>
+              <a:t>JOIN </a:t>
+            </a:r>
+            <a:r>
+              <a:rPr lang="fr-FR" sz="900" dirty="0" err="1"/>
+              <a:t>ca_arrondi</a:t>
+            </a:r>
+            <a:r>
+              <a:rPr lang="fr-FR" sz="900" dirty="0"/>
+              <a:t> ca ON </a:t>
+            </a:r>
+            <a:r>
+              <a:rPr lang="fr-FR" sz="900" dirty="0" err="1"/>
+              <a:t>cap.id_employe</a:t>
+            </a:r>
+            <a:r>
+              <a:rPr lang="fr-FR" sz="900" dirty="0"/>
+              <a:t> = </a:t>
+            </a:r>
+            <a:r>
+              <a:rPr lang="fr-FR" sz="900" dirty="0" err="1"/>
+              <a:t>ca.id_employe</a:t>
+            </a:r>
+            <a:endParaRPr lang="fr-FR" sz="900" dirty="0"/>
+          </a:p>
+          <a:p>
+            <a:pPr marR="152400" lvl="0" indent="-285750">
+              <a:buClr>
+                <a:srgbClr val="999999"/>
+              </a:buClr>
+              <a:buSzPts val="900"/>
+              <a:buFont typeface="Inter"/>
+              <a:buChar char="●"/>
+            </a:pPr>
+            <a:r>
+              <a:rPr lang="fr-FR" sz="900" dirty="0"/>
+              <a:t>JOIN </a:t>
+            </a:r>
+            <a:r>
+              <a:rPr lang="fr-FR" sz="900" dirty="0" err="1"/>
+              <a:t>employe</a:t>
+            </a:r>
+            <a:r>
+              <a:rPr lang="fr-FR" sz="900" dirty="0"/>
+              <a:t> e ON </a:t>
+            </a:r>
+            <a:r>
+              <a:rPr lang="fr-FR" sz="900" dirty="0" err="1"/>
+              <a:t>e.id_employe</a:t>
+            </a:r>
+            <a:r>
+              <a:rPr lang="fr-FR" sz="900" dirty="0"/>
+              <a:t> = </a:t>
+            </a:r>
+            <a:r>
+              <a:rPr lang="fr-FR" sz="900" dirty="0" err="1"/>
+              <a:t>ca.id_employe</a:t>
+            </a:r>
+            <a:endParaRPr lang="fr-FR" sz="900" dirty="0"/>
+          </a:p>
+          <a:p>
+            <a:pPr marR="152400" lvl="0" indent="-285750">
+              <a:buClr>
+                <a:srgbClr val="999999"/>
+              </a:buClr>
+              <a:buSzPts val="900"/>
+              <a:buFont typeface="Inter"/>
+              <a:buChar char="●"/>
+            </a:pPr>
+            <a:r>
+              <a:rPr lang="fr-FR" sz="900" dirty="0"/>
+              <a:t>JOIN calendrier c ON </a:t>
+            </a:r>
+            <a:r>
+              <a:rPr lang="fr-FR" sz="900" dirty="0" err="1"/>
+              <a:t>e.date_debut</a:t>
+            </a:r>
+            <a:r>
+              <a:rPr lang="fr-FR" sz="900" dirty="0"/>
+              <a:t> = </a:t>
+            </a:r>
+            <a:r>
+              <a:rPr lang="fr-FR" sz="900" dirty="0" err="1"/>
+              <a:t>c.date</a:t>
+            </a:r>
+            <a:endParaRPr lang="fr-FR" sz="900" dirty="0"/>
+          </a:p>
+          <a:p>
+            <a:pPr marR="152400" lvl="0" indent="-285750">
+              <a:buClr>
+                <a:srgbClr val="999999"/>
+              </a:buClr>
+              <a:buSzPts val="900"/>
+              <a:buFont typeface="Inter"/>
+              <a:buChar char="●"/>
+            </a:pPr>
+            <a:r>
+              <a:rPr lang="fr-FR" sz="900" dirty="0"/>
+              <a:t>ORDER BY </a:t>
+            </a:r>
+            <a:r>
+              <a:rPr lang="fr-FR" sz="900" dirty="0" err="1"/>
+              <a:t>part_ca_par_employe</a:t>
+            </a:r>
+            <a:r>
+              <a:rPr lang="fr-FR" sz="900" dirty="0"/>
+              <a:t> DESC</a:t>
+            </a:r>
+          </a:p>
+          <a:p>
+            <a:pPr marR="152400" lvl="0" indent="-285750">
+              <a:buClr>
+                <a:srgbClr val="999999"/>
+              </a:buClr>
+              <a:buSzPts val="900"/>
+              <a:buFont typeface="Inter"/>
+              <a:buChar char="●"/>
+            </a:pPr>
+            <a:r>
+              <a:rPr lang="fr-FR" sz="900" dirty="0"/>
+              <a:t>;</a:t>
+            </a:r>
+            <a:endParaRPr sz="900" dirty="0"/>
+          </a:p>
+        </p:txBody>
+      </p:sp>
+      <p:sp>
+        <p:nvSpPr>
+          <p:cNvPr id="183" name="Google Shape;183;p21"/>
+          <p:cNvSpPr txBox="1">
+            <a:spLocks noGrp="1"/>
+          </p:cNvSpPr>
+          <p:nvPr>
+            <p:ph type="title"/>
+          </p:nvPr>
+        </p:nvSpPr>
+        <p:spPr>
+          <a:xfrm>
+            <a:off x="1297500" y="393750"/>
+            <a:ext cx="7038900" cy="914100"/>
+          </a:xfrm>
+          <a:prstGeom prst="rect">
+            <a:avLst/>
+          </a:prstGeom>
+        </p:spPr>
+        <p:txBody>
+          <a:bodyPr spcFirstLastPara="1" wrap="square" lIns="91425" tIns="91425" rIns="91425" bIns="91425" anchor="t" anchorCtr="0">
+            <a:noAutofit/>
+          </a:bodyPr>
+          <a:lstStyle/>
+          <a:p>
+            <a:pPr marL="0" lvl="0" indent="0" algn="l" rtl="0">
+              <a:spcBef>
+                <a:spcPts val="0"/>
+              </a:spcBef>
+              <a:spcAft>
+                <a:spcPts val="0"/>
+              </a:spcAft>
+              <a:buSzPts val="990"/>
+              <a:buNone/>
+            </a:pPr>
+            <a:r>
+              <a:rPr lang="fr"/>
+              <a:t>Résultat des requêtes SQL</a:t>
+            </a:r>
+            <a:endParaRPr/>
+          </a:p>
+          <a:p>
+            <a:pPr marL="0" lvl="0" indent="0" algn="l" rtl="0">
+              <a:spcBef>
+                <a:spcPts val="0"/>
+              </a:spcBef>
+              <a:spcAft>
+                <a:spcPts val="0"/>
+              </a:spcAft>
+              <a:buSzPts val="990"/>
+              <a:buNone/>
+            </a:pPr>
+            <a:r>
+              <a:rPr lang="fr" sz="1850"/>
+              <a:t>Le chiffre d’affaires encaissé par employé</a:t>
+            </a:r>
+            <a:endParaRPr sz="1850"/>
+          </a:p>
+          <a:p>
+            <a:pPr marL="0" lvl="0" indent="0" algn="l" rtl="0">
+              <a:spcBef>
+                <a:spcPts val="0"/>
+              </a:spcBef>
+              <a:spcAft>
+                <a:spcPts val="0"/>
+              </a:spcAft>
+              <a:buSzPts val="990"/>
+              <a:buNone/>
+            </a:pPr>
+            <a:endParaRPr/>
+          </a:p>
+        </p:txBody>
+      </p:sp>
+      <p:pic>
+        <p:nvPicPr>
+          <p:cNvPr id="4" name="Image 3">
+            <a:extLst>
+              <a:ext uri="{FF2B5EF4-FFF2-40B4-BE49-F238E27FC236}">
+                <a16:creationId xmlns:a16="http://schemas.microsoft.com/office/drawing/2014/main" id="{306DB767-AC99-AEA5-AB6B-37C325BCED93}"/>
+              </a:ext>
+            </a:extLst>
+          </p:cNvPr>
+          <p:cNvPicPr>
+            <a:picLocks noChangeAspect="1"/>
+          </p:cNvPicPr>
+          <p:nvPr/>
+        </p:nvPicPr>
+        <p:blipFill>
+          <a:blip r:embed="rId3"/>
+          <a:stretch>
+            <a:fillRect/>
+          </a:stretch>
+        </p:blipFill>
+        <p:spPr>
+          <a:xfrm>
+            <a:off x="5109812" y="1567550"/>
+            <a:ext cx="3894677" cy="2122000"/>
+          </a:xfrm>
+          <a:prstGeom prst="rect">
+            <a:avLst/>
+          </a:prstGeom>
+        </p:spPr>
+      </p:pic>
+    </p:spTree>
+  </p:cSld>
+  <p:clrMapOvr>
+    <a:masterClrMapping/>
+  </p:clrMapOvr>
+</p:sld>
+</file>
+
+<file path=ppt/slides/slide11.xml><?xml version="1.0" encoding="utf-8"?>
+<p:sld xmlns:a="http://schemas.openxmlformats.org/drawingml/2006/main" xmlns:r="http://schemas.openxmlformats.org/officeDocument/2006/relationships" xmlns:p="http://schemas.openxmlformats.org/presentationml/2006/main">
+  <p:cSld>
+    <p:spTree>
+      <p:nvGrpSpPr>
         <p:cNvPr id="1" name="Shape 187"/>
         <p:cNvGrpSpPr/>
         <p:nvPr/>
@@ -10429,7 +11284,7 @@
 </p:sld>
 </file>
 
-<file path=ppt/slides/slide11.xml><?xml version="1.0" encoding="utf-8"?>
+<file path=ppt/slides/slide12.xml><?xml version="1.0" encoding="utf-8"?>
 <p:sld xmlns:a="http://schemas.openxmlformats.org/drawingml/2006/main" xmlns:r="http://schemas.openxmlformats.org/officeDocument/2006/relationships" xmlns:p="http://schemas.openxmlformats.org/presentationml/2006/main">
   <p:cSld>
     <p:spTree>
@@ -10501,7 +11356,7 @@
         <p:spPr>
           <a:xfrm>
             <a:off x="1297500" y="1567550"/>
-            <a:ext cx="7038900" cy="2911200"/>
+            <a:ext cx="7038900" cy="3182200"/>
           </a:xfrm>
           <a:prstGeom prst="rect">
             <a:avLst/>
@@ -10509,14 +11364,11 @@
         </p:spPr>
         <p:txBody>
           <a:bodyPr spcFirstLastPara="1" wrap="square" lIns="91425" tIns="91425" rIns="91425" bIns="91425" anchor="t" anchorCtr="0">
-            <a:normAutofit fontScale="92500" lnSpcReduction="20000"/>
+            <a:normAutofit fontScale="85000" lnSpcReduction="10000"/>
           </a:bodyPr>
           <a:lstStyle/>
           <a:p>
-            <a:pPr marL="0" lvl="0" indent="0" algn="l" rtl="0">
-              <a:spcBef>
-                <a:spcPts val="0"/>
-              </a:spcBef>
+            <a:pPr marL="0" lvl="0" indent="0">
               <a:spcAft>
                 <a:spcPts val="1200"/>
               </a:spcAft>
@@ -10524,8 +11376,13 @@
             </a:pPr>
             <a:r>
               <a:rPr lang="fr-FR" dirty="0"/>
-              <a:t>L’analyse des ventes et des logs montre que l’instabilité du chiffre d’affaires vient du fait que certaines ventes associées au 14 août 2024 ont été insérées dans la base le 15 août 2024.</a:t>
-            </a:r>
+              <a:t>L’analyse des ventes et des logs montre que l’instabilité du chiffre d’affaires vient du fait que certaines ventes associées au 14 août 2024 ont été insérées dans les logs le 15 août 2024. La variation du chiffre d’affaires est donc liée à un problème de délai d’intégration ou de synchronisation </a:t>
+            </a:r>
+            <a:r>
+              <a:rPr lang="fr-FR"/>
+              <a:t>des données.</a:t>
+            </a:r>
+            <a:endParaRPr lang="fr-FR" dirty="0"/>
           </a:p>
           <a:p>
             <a:pPr marL="0" lvl="0" indent="0" algn="l" rtl="0">
@@ -10619,7 +11476,7 @@
 </p:sld>
 </file>
 
-<file path=ppt/slides/slide12.xml><?xml version="1.0" encoding="utf-8"?>
+<file path=ppt/slides/slide13.xml><?xml version="1.0" encoding="utf-8"?>
 <p:sld xmlns:a="http://schemas.openxmlformats.org/drawingml/2006/main" xmlns:r="http://schemas.openxmlformats.org/officeDocument/2006/relationships" xmlns:p="http://schemas.openxmlformats.org/presentationml/2006/main">
   <p:cSld>
     <p:spTree>
@@ -10803,7 +11660,7 @@
 </p:sld>
 </file>
 
-<file path=ppt/slides/slide13.xml><?xml version="1.0" encoding="utf-8"?>
+<file path=ppt/slides/slide14.xml><?xml version="1.0" encoding="utf-8"?>
 <p:sld xmlns:a="http://schemas.openxmlformats.org/drawingml/2006/main" xmlns:r="http://schemas.openxmlformats.org/officeDocument/2006/relationships" xmlns:p="http://schemas.openxmlformats.org/presentationml/2006/main">
   <p:cSld>
     <p:spTree>
@@ -14203,7 +15060,7 @@
 </p:sld>
 </file>
 
-<file path=ppt/slides/slide14.xml><?xml version="1.0" encoding="utf-8"?>
+<file path=ppt/slides/slide15.xml><?xml version="1.0" encoding="utf-8"?>
 <p:sld xmlns:a="http://schemas.openxmlformats.org/drawingml/2006/main" xmlns:r="http://schemas.openxmlformats.org/officeDocument/2006/relationships" xmlns:p="http://schemas.openxmlformats.org/presentationml/2006/main">
   <p:cSld>
     <p:spTree>
@@ -14826,7 +15683,7 @@
 </p:sld>
 </file>
 
-<file path=ppt/slides/slide15.xml><?xml version="1.0" encoding="utf-8"?>
+<file path=ppt/slides/slide16.xml><?xml version="1.0" encoding="utf-8"?>
 <p:sld xmlns:a="http://schemas.openxmlformats.org/drawingml/2006/main" xmlns:r="http://schemas.openxmlformats.org/officeDocument/2006/relationships" xmlns:p="http://schemas.openxmlformats.org/presentationml/2006/main">
   <p:cSld>
     <p:spTree>
@@ -15107,7 +15964,7 @@
 </p:sld>
 </file>
 
-<file path=ppt/slides/slide16.xml><?xml version="1.0" encoding="utf-8"?>
+<file path=ppt/slides/slide17.xml><?xml version="1.0" encoding="utf-8"?>
 <p:sld xmlns:a="http://schemas.openxmlformats.org/drawingml/2006/main" xmlns:r="http://schemas.openxmlformats.org/officeDocument/2006/relationships" xmlns:p="http://schemas.openxmlformats.org/presentationml/2006/main">
   <p:cSld>
     <p:spTree>
@@ -15451,7 +16308,7 @@
 </p:sld>
 </file>
 
-<file path=ppt/slides/slide17.xml><?xml version="1.0" encoding="utf-8"?>
+<file path=ppt/slides/slide18.xml><?xml version="1.0" encoding="utf-8"?>
 <p:sld xmlns:a="http://schemas.openxmlformats.org/drawingml/2006/main" xmlns:r="http://schemas.openxmlformats.org/officeDocument/2006/relationships" xmlns:p="http://schemas.openxmlformats.org/presentationml/2006/main">
   <p:cSld>
     <p:spTree>
@@ -15724,7 +16581,7 @@
 </p:sld>
 </file>
 
-<file path=ppt/slides/slide18.xml><?xml version="1.0" encoding="utf-8"?>
+<file path=ppt/slides/slide19.xml><?xml version="1.0" encoding="utf-8"?>
 <p:sld xmlns:a="http://schemas.openxmlformats.org/drawingml/2006/main" xmlns:r="http://schemas.openxmlformats.org/officeDocument/2006/relationships" xmlns:p="http://schemas.openxmlformats.org/presentationml/2006/main">
   <p:cSld>
     <p:spTree>
@@ -16121,400 +16978,6 @@
     <p:extLst>
       <p:ext uri="{BB962C8B-B14F-4D97-AF65-F5344CB8AC3E}">
         <p14:creationId xmlns:p14="http://schemas.microsoft.com/office/powerpoint/2010/main" val="1094260605"/>
-      </p:ext>
-    </p:extLst>
-  </p:cSld>
-  <p:clrMapOvr>
-    <a:masterClrMapping/>
-  </p:clrMapOvr>
-</p:sld>
-</file>
-
-<file path=ppt/slides/slide19.xml><?xml version="1.0" encoding="utf-8"?>
-<p:sld xmlns:a="http://schemas.openxmlformats.org/drawingml/2006/main" xmlns:r="http://schemas.openxmlformats.org/officeDocument/2006/relationships" xmlns:p="http://schemas.openxmlformats.org/presentationml/2006/main">
-  <p:cSld>
-    <p:spTree>
-      <p:nvGrpSpPr>
-        <p:cNvPr id="1" name=""/>
-        <p:cNvGrpSpPr/>
-        <p:nvPr/>
-      </p:nvGrpSpPr>
-      <p:grpSpPr>
-        <a:xfrm>
-          <a:off x="0" y="0"/>
-          <a:ext cx="0" cy="0"/>
-          <a:chOff x="0" y="0"/>
-          <a:chExt cx="0" cy="0"/>
-        </a:xfrm>
-      </p:grpSpPr>
-      <p:sp>
-        <p:nvSpPr>
-          <p:cNvPr id="2" name="Titre 1">
-            <a:extLst>
-              <a:ext uri="{FF2B5EF4-FFF2-40B4-BE49-F238E27FC236}">
-                <a16:creationId xmlns:a16="http://schemas.microsoft.com/office/drawing/2014/main" id="{ABA43302-D0E7-203E-0F83-1329BD7379AE}"/>
-              </a:ext>
-            </a:extLst>
-          </p:cNvPr>
-          <p:cNvSpPr>
-            <a:spLocks noGrp="1"/>
-          </p:cNvSpPr>
-          <p:nvPr>
-            <p:ph type="title"/>
-          </p:nvPr>
-        </p:nvSpPr>
-        <p:spPr/>
-        <p:txBody>
-          <a:bodyPr>
-            <a:normAutofit fontScale="90000"/>
-          </a:bodyPr>
-          <a:lstStyle/>
-          <a:p>
-            <a:r>
-              <a:rPr lang="fr-FR" dirty="0"/>
-              <a:t>Recommandation pour l’entreprise</a:t>
-            </a:r>
-            <a:br>
-              <a:rPr lang="fr-FR" dirty="0"/>
-            </a:br>
-            <a:r>
-              <a:rPr lang="fr-FR" dirty="0"/>
-              <a:t>Automatiser le remplissage des tables de logs</a:t>
-            </a:r>
-            <a:br>
-              <a:rPr lang="fr-FR" dirty="0"/>
-            </a:br>
-            <a:endParaRPr lang="fr-FR" dirty="0"/>
-          </a:p>
-        </p:txBody>
-      </p:sp>
-      <p:sp>
-        <p:nvSpPr>
-          <p:cNvPr id="3" name="Espace réservé du texte 2">
-            <a:extLst>
-              <a:ext uri="{FF2B5EF4-FFF2-40B4-BE49-F238E27FC236}">
-                <a16:creationId xmlns:a16="http://schemas.microsoft.com/office/drawing/2014/main" id="{23E19556-E177-A858-4707-B3A47257B015}"/>
-              </a:ext>
-            </a:extLst>
-          </p:cNvPr>
-          <p:cNvSpPr>
-            <a:spLocks noGrp="1"/>
-          </p:cNvSpPr>
-          <p:nvPr>
-            <p:ph type="body" idx="1"/>
-          </p:nvPr>
-        </p:nvSpPr>
-        <p:spPr>
-          <a:xfrm>
-            <a:off x="604659" y="1307850"/>
-            <a:ext cx="8424581" cy="3714626"/>
-          </a:xfrm>
-        </p:spPr>
-        <p:txBody>
-          <a:bodyPr>
-            <a:normAutofit fontScale="70000" lnSpcReduction="20000"/>
-          </a:bodyPr>
-          <a:lstStyle/>
-          <a:p>
-            <a:pPr marL="146050" indent="0">
-              <a:buNone/>
-            </a:pPr>
-            <a:r>
-              <a:rPr lang="en-US" dirty="0"/>
-              <a:t>CREATE OR REPLACE FUNCTION </a:t>
-            </a:r>
-            <a:r>
-              <a:rPr lang="en-US" dirty="0" err="1"/>
-              <a:t>logs_employe_trigger_function</a:t>
-            </a:r>
-            <a:r>
-              <a:rPr lang="en-US" dirty="0"/>
-              <a:t>()</a:t>
-            </a:r>
-            <a:endParaRPr lang="fr-FR" dirty="0"/>
-          </a:p>
-          <a:p>
-            <a:pPr marL="146050" indent="0">
-              <a:buNone/>
-            </a:pPr>
-            <a:r>
-              <a:rPr lang="en-US" dirty="0"/>
-              <a:t>RETURNS TRIGGER AS $$</a:t>
-            </a:r>
-            <a:endParaRPr lang="fr-FR" dirty="0"/>
-          </a:p>
-          <a:p>
-            <a:pPr marL="146050" indent="0">
-              <a:buNone/>
-            </a:pPr>
-            <a:r>
-              <a:rPr lang="en-US" dirty="0"/>
-              <a:t>	BEGIN</a:t>
-            </a:r>
-            <a:endParaRPr lang="fr-FR" dirty="0"/>
-          </a:p>
-          <a:p>
-            <a:pPr marL="146050" indent="0">
-              <a:buNone/>
-            </a:pPr>
-            <a:r>
-              <a:rPr lang="en-US" dirty="0"/>
-              <a:t>		IF TG_OP ='INSERT' THEN -- operation for which the trigger was fired: INSERT, UPDATE, DELETE, or TRUNCATE</a:t>
-            </a:r>
-            <a:endParaRPr lang="fr-FR" dirty="0"/>
-          </a:p>
-          <a:p>
-            <a:pPr marL="146050" indent="0">
-              <a:buNone/>
-            </a:pPr>
-            <a:r>
-              <a:rPr lang="en-US" dirty="0"/>
-              <a:t>			INSERT INTO </a:t>
-            </a:r>
-            <a:r>
-              <a:rPr lang="en-US" dirty="0" err="1"/>
-              <a:t>logs_employe</a:t>
-            </a:r>
-            <a:r>
-              <a:rPr lang="en-US" dirty="0"/>
-              <a:t> (</a:t>
-            </a:r>
-            <a:endParaRPr lang="fr-FR" dirty="0"/>
-          </a:p>
-          <a:p>
-            <a:pPr marL="146050" indent="0">
-              <a:buNone/>
-            </a:pPr>
-            <a:r>
-              <a:rPr lang="en-US" dirty="0"/>
-              <a:t>				</a:t>
-            </a:r>
-            <a:r>
-              <a:rPr lang="fr-FR" dirty="0" err="1"/>
-              <a:t>id_user</a:t>
-            </a:r>
-            <a:r>
-              <a:rPr lang="fr-FR" dirty="0"/>
-              <a:t>,</a:t>
-            </a:r>
-          </a:p>
-          <a:p>
-            <a:pPr marL="146050" indent="0">
-              <a:buNone/>
-            </a:pPr>
-            <a:r>
-              <a:rPr lang="fr-FR" dirty="0"/>
-              <a:t>				date,</a:t>
-            </a:r>
-          </a:p>
-          <a:p>
-            <a:pPr marL="146050" indent="0">
-              <a:buNone/>
-            </a:pPr>
-            <a:r>
-              <a:rPr lang="fr-FR" dirty="0"/>
-              <a:t>				action,</a:t>
-            </a:r>
-          </a:p>
-          <a:p>
-            <a:pPr marL="146050" indent="0">
-              <a:buNone/>
-            </a:pPr>
-            <a:r>
-              <a:rPr lang="fr-FR" dirty="0"/>
-              <a:t>				</a:t>
-            </a:r>
-            <a:r>
-              <a:rPr lang="fr-FR" dirty="0" err="1"/>
-              <a:t>id_ligne</a:t>
-            </a:r>
-            <a:r>
-              <a:rPr lang="fr-FR" dirty="0"/>
-              <a:t>,				</a:t>
-            </a:r>
-          </a:p>
-          <a:p>
-            <a:pPr marL="146050" indent="0">
-              <a:buNone/>
-            </a:pPr>
-            <a:r>
-              <a:rPr lang="fr-FR" dirty="0"/>
-              <a:t>				commentaire</a:t>
-            </a:r>
-          </a:p>
-          <a:p>
-            <a:pPr marL="146050" indent="0">
-              <a:buNone/>
-            </a:pPr>
-            <a:r>
-              <a:rPr lang="fr-FR" dirty="0"/>
-              <a:t>			)</a:t>
-            </a:r>
-          </a:p>
-          <a:p>
-            <a:pPr marL="146050" indent="0">
-              <a:buNone/>
-            </a:pPr>
-            <a:r>
-              <a:rPr lang="fr-FR" dirty="0"/>
-              <a:t>			VALUES (</a:t>
-            </a:r>
-          </a:p>
-          <a:p>
-            <a:pPr marL="146050" indent="0">
-              <a:buNone/>
-            </a:pPr>
-            <a:r>
-              <a:rPr lang="fr-FR" dirty="0"/>
-              <a:t>				CURRENT_USER, -- utilisateur PostgreSQL connecté</a:t>
-            </a:r>
-          </a:p>
-          <a:p>
-            <a:pPr marL="146050" indent="0">
-              <a:buNone/>
-            </a:pPr>
-            <a:r>
-              <a:rPr lang="fr-FR" dirty="0"/>
-              <a:t>				CURRENT_DATE - DATE '1899-12-30’, -- Ex pour 14/8/2024 on a 45518. Cela sert à faire le lien avec la table calendrier qui contient toutes les dates.</a:t>
-            </a:r>
-          </a:p>
-          <a:p>
-            <a:pPr marL="146050" indent="0">
-              <a:buNone/>
-            </a:pPr>
-            <a:r>
-              <a:rPr lang="fr-FR" dirty="0"/>
-              <a:t>				TG_OP,</a:t>
-            </a:r>
-          </a:p>
-          <a:p>
-            <a:pPr marL="146050" indent="0">
-              <a:buNone/>
-            </a:pPr>
-            <a:r>
-              <a:rPr lang="fr-FR" dirty="0"/>
-              <a:t>				</a:t>
-            </a:r>
-            <a:r>
-              <a:rPr lang="fr-FR" dirty="0" err="1"/>
-              <a:t>NEW.id_employe</a:t>
-            </a:r>
-            <a:r>
-              <a:rPr lang="fr-FR" dirty="0"/>
-              <a:t>,</a:t>
-            </a:r>
-          </a:p>
-          <a:p>
-            <a:pPr marL="146050" indent="0">
-              <a:buNone/>
-            </a:pPr>
-            <a:r>
-              <a:rPr lang="fr-FR" dirty="0"/>
-              <a:t>				'Nouvel employé'</a:t>
-            </a:r>
-          </a:p>
-          <a:p>
-            <a:pPr marL="146050" indent="0">
-              <a:buNone/>
-            </a:pPr>
-            <a:r>
-              <a:rPr lang="fr-FR" dirty="0"/>
-              <a:t>			</a:t>
-            </a:r>
-            <a:r>
-              <a:rPr lang="en-US" dirty="0"/>
-              <a:t>);</a:t>
-            </a:r>
-            <a:endParaRPr lang="fr-FR" dirty="0"/>
-          </a:p>
-          <a:p>
-            <a:pPr marL="146050" indent="0">
-              <a:buNone/>
-            </a:pPr>
-            <a:r>
-              <a:rPr lang="en-US" dirty="0"/>
-              <a:t>	</a:t>
-            </a:r>
-            <a:endParaRPr lang="fr-FR" dirty="0"/>
-          </a:p>
-          <a:p>
-            <a:pPr marL="146050" indent="0">
-              <a:buNone/>
-            </a:pPr>
-            <a:r>
-              <a:rPr lang="en-US" dirty="0"/>
-              <a:t>			RETURN NEW;</a:t>
-            </a:r>
-          </a:p>
-          <a:p>
-            <a:pPr marL="146050" indent="0">
-              <a:buNone/>
-            </a:pPr>
-            <a:r>
-              <a:rPr lang="en-US" dirty="0"/>
-              <a:t>	[… ELSIF UPDATE, DELETE…]</a:t>
-            </a:r>
-          </a:p>
-          <a:p>
-            <a:pPr marL="146050" indent="0">
-              <a:buNone/>
-            </a:pPr>
-            <a:endParaRPr lang="fr-FR" dirty="0"/>
-          </a:p>
-          <a:p>
-            <a:pPr marL="146050" indent="0">
-              <a:buNone/>
-            </a:pPr>
-            <a:r>
-              <a:rPr lang="en-US" dirty="0"/>
-              <a:t>		END IF;</a:t>
-            </a:r>
-            <a:endParaRPr lang="fr-FR" dirty="0"/>
-          </a:p>
-          <a:p>
-            <a:pPr marL="146050" indent="0">
-              <a:buNone/>
-            </a:pPr>
-            <a:r>
-              <a:rPr lang="en-US" dirty="0"/>
-              <a:t>		RETURN NULL;</a:t>
-            </a:r>
-            <a:endParaRPr lang="fr-FR" dirty="0"/>
-          </a:p>
-          <a:p>
-            <a:pPr marL="146050" indent="0">
-              <a:buNone/>
-            </a:pPr>
-            <a:r>
-              <a:rPr lang="en-US" dirty="0"/>
-              <a:t>	END;</a:t>
-            </a:r>
-            <a:endParaRPr lang="fr-FR" dirty="0"/>
-          </a:p>
-          <a:p>
-            <a:pPr marL="146050" indent="0">
-              <a:buNone/>
-            </a:pPr>
-            <a:r>
-              <a:rPr lang="en-US" dirty="0"/>
-              <a:t>$$ LANGUAGE </a:t>
-            </a:r>
-            <a:r>
-              <a:rPr lang="en-US" dirty="0" err="1"/>
-              <a:t>plpgsql</a:t>
-            </a:r>
-            <a:r>
-              <a:rPr lang="en-US" dirty="0"/>
-              <a:t>;</a:t>
-            </a:r>
-            <a:endParaRPr lang="fr-FR" dirty="0"/>
-          </a:p>
-        </p:txBody>
-      </p:sp>
-    </p:spTree>
-    <p:extLst>
-      <p:ext uri="{BB962C8B-B14F-4D97-AF65-F5344CB8AC3E}">
-        <p14:creationId xmlns:p14="http://schemas.microsoft.com/office/powerpoint/2010/main" val="677342059"/>
       </p:ext>
     </p:extLst>
   </p:cSld>
@@ -16745,6 +17208,400 @@
   <p:cSld>
     <p:spTree>
       <p:nvGrpSpPr>
+        <p:cNvPr id="1" name=""/>
+        <p:cNvGrpSpPr/>
+        <p:nvPr/>
+      </p:nvGrpSpPr>
+      <p:grpSpPr>
+        <a:xfrm>
+          <a:off x="0" y="0"/>
+          <a:ext cx="0" cy="0"/>
+          <a:chOff x="0" y="0"/>
+          <a:chExt cx="0" cy="0"/>
+        </a:xfrm>
+      </p:grpSpPr>
+      <p:sp>
+        <p:nvSpPr>
+          <p:cNvPr id="2" name="Titre 1">
+            <a:extLst>
+              <a:ext uri="{FF2B5EF4-FFF2-40B4-BE49-F238E27FC236}">
+                <a16:creationId xmlns:a16="http://schemas.microsoft.com/office/drawing/2014/main" id="{ABA43302-D0E7-203E-0F83-1329BD7379AE}"/>
+              </a:ext>
+            </a:extLst>
+          </p:cNvPr>
+          <p:cNvSpPr>
+            <a:spLocks noGrp="1"/>
+          </p:cNvSpPr>
+          <p:nvPr>
+            <p:ph type="title"/>
+          </p:nvPr>
+        </p:nvSpPr>
+        <p:spPr/>
+        <p:txBody>
+          <a:bodyPr>
+            <a:normAutofit fontScale="90000"/>
+          </a:bodyPr>
+          <a:lstStyle/>
+          <a:p>
+            <a:r>
+              <a:rPr lang="fr-FR" dirty="0"/>
+              <a:t>Recommandation pour l’entreprise</a:t>
+            </a:r>
+            <a:br>
+              <a:rPr lang="fr-FR" dirty="0"/>
+            </a:br>
+            <a:r>
+              <a:rPr lang="fr-FR" dirty="0"/>
+              <a:t>Automatiser le remplissage des tables de logs</a:t>
+            </a:r>
+            <a:br>
+              <a:rPr lang="fr-FR" dirty="0"/>
+            </a:br>
+            <a:endParaRPr lang="fr-FR" dirty="0"/>
+          </a:p>
+        </p:txBody>
+      </p:sp>
+      <p:sp>
+        <p:nvSpPr>
+          <p:cNvPr id="3" name="Espace réservé du texte 2">
+            <a:extLst>
+              <a:ext uri="{FF2B5EF4-FFF2-40B4-BE49-F238E27FC236}">
+                <a16:creationId xmlns:a16="http://schemas.microsoft.com/office/drawing/2014/main" id="{23E19556-E177-A858-4707-B3A47257B015}"/>
+              </a:ext>
+            </a:extLst>
+          </p:cNvPr>
+          <p:cNvSpPr>
+            <a:spLocks noGrp="1"/>
+          </p:cNvSpPr>
+          <p:nvPr>
+            <p:ph type="body" idx="1"/>
+          </p:nvPr>
+        </p:nvSpPr>
+        <p:spPr>
+          <a:xfrm>
+            <a:off x="604659" y="1307850"/>
+            <a:ext cx="8424581" cy="3714626"/>
+          </a:xfrm>
+        </p:spPr>
+        <p:txBody>
+          <a:bodyPr>
+            <a:normAutofit fontScale="70000" lnSpcReduction="20000"/>
+          </a:bodyPr>
+          <a:lstStyle/>
+          <a:p>
+            <a:pPr marL="146050" indent="0">
+              <a:buNone/>
+            </a:pPr>
+            <a:r>
+              <a:rPr lang="en-US" dirty="0"/>
+              <a:t>CREATE OR REPLACE FUNCTION </a:t>
+            </a:r>
+            <a:r>
+              <a:rPr lang="en-US" dirty="0" err="1"/>
+              <a:t>logs_employe_trigger_function</a:t>
+            </a:r>
+            <a:r>
+              <a:rPr lang="en-US" dirty="0"/>
+              <a:t>()</a:t>
+            </a:r>
+            <a:endParaRPr lang="fr-FR" dirty="0"/>
+          </a:p>
+          <a:p>
+            <a:pPr marL="146050" indent="0">
+              <a:buNone/>
+            </a:pPr>
+            <a:r>
+              <a:rPr lang="en-US" dirty="0"/>
+              <a:t>RETURNS TRIGGER AS $$</a:t>
+            </a:r>
+            <a:endParaRPr lang="fr-FR" dirty="0"/>
+          </a:p>
+          <a:p>
+            <a:pPr marL="146050" indent="0">
+              <a:buNone/>
+            </a:pPr>
+            <a:r>
+              <a:rPr lang="en-US" dirty="0"/>
+              <a:t>	BEGIN</a:t>
+            </a:r>
+            <a:endParaRPr lang="fr-FR" dirty="0"/>
+          </a:p>
+          <a:p>
+            <a:pPr marL="146050" indent="0">
+              <a:buNone/>
+            </a:pPr>
+            <a:r>
+              <a:rPr lang="en-US" dirty="0"/>
+              <a:t>		IF TG_OP ='INSERT' THEN -- operation for which the trigger was fired: INSERT, UPDATE, DELETE, or TRUNCATE</a:t>
+            </a:r>
+            <a:endParaRPr lang="fr-FR" dirty="0"/>
+          </a:p>
+          <a:p>
+            <a:pPr marL="146050" indent="0">
+              <a:buNone/>
+            </a:pPr>
+            <a:r>
+              <a:rPr lang="en-US" dirty="0"/>
+              <a:t>			INSERT INTO </a:t>
+            </a:r>
+            <a:r>
+              <a:rPr lang="en-US" dirty="0" err="1"/>
+              <a:t>logs_employe</a:t>
+            </a:r>
+            <a:r>
+              <a:rPr lang="en-US" dirty="0"/>
+              <a:t> (</a:t>
+            </a:r>
+            <a:endParaRPr lang="fr-FR" dirty="0"/>
+          </a:p>
+          <a:p>
+            <a:pPr marL="146050" indent="0">
+              <a:buNone/>
+            </a:pPr>
+            <a:r>
+              <a:rPr lang="en-US" dirty="0"/>
+              <a:t>				</a:t>
+            </a:r>
+            <a:r>
+              <a:rPr lang="fr-FR" dirty="0" err="1"/>
+              <a:t>id_user</a:t>
+            </a:r>
+            <a:r>
+              <a:rPr lang="fr-FR" dirty="0"/>
+              <a:t>,</a:t>
+            </a:r>
+          </a:p>
+          <a:p>
+            <a:pPr marL="146050" indent="0">
+              <a:buNone/>
+            </a:pPr>
+            <a:r>
+              <a:rPr lang="fr-FR" dirty="0"/>
+              <a:t>				date,</a:t>
+            </a:r>
+          </a:p>
+          <a:p>
+            <a:pPr marL="146050" indent="0">
+              <a:buNone/>
+            </a:pPr>
+            <a:r>
+              <a:rPr lang="fr-FR" dirty="0"/>
+              <a:t>				action,</a:t>
+            </a:r>
+          </a:p>
+          <a:p>
+            <a:pPr marL="146050" indent="0">
+              <a:buNone/>
+            </a:pPr>
+            <a:r>
+              <a:rPr lang="fr-FR" dirty="0"/>
+              <a:t>				</a:t>
+            </a:r>
+            <a:r>
+              <a:rPr lang="fr-FR" dirty="0" err="1"/>
+              <a:t>id_ligne</a:t>
+            </a:r>
+            <a:r>
+              <a:rPr lang="fr-FR" dirty="0"/>
+              <a:t>,				</a:t>
+            </a:r>
+          </a:p>
+          <a:p>
+            <a:pPr marL="146050" indent="0">
+              <a:buNone/>
+            </a:pPr>
+            <a:r>
+              <a:rPr lang="fr-FR" dirty="0"/>
+              <a:t>				commentaire</a:t>
+            </a:r>
+          </a:p>
+          <a:p>
+            <a:pPr marL="146050" indent="0">
+              <a:buNone/>
+            </a:pPr>
+            <a:r>
+              <a:rPr lang="fr-FR" dirty="0"/>
+              <a:t>			)</a:t>
+            </a:r>
+          </a:p>
+          <a:p>
+            <a:pPr marL="146050" indent="0">
+              <a:buNone/>
+            </a:pPr>
+            <a:r>
+              <a:rPr lang="fr-FR" dirty="0"/>
+              <a:t>			VALUES (</a:t>
+            </a:r>
+          </a:p>
+          <a:p>
+            <a:pPr marL="146050" indent="0">
+              <a:buNone/>
+            </a:pPr>
+            <a:r>
+              <a:rPr lang="fr-FR" dirty="0"/>
+              <a:t>				CURRENT_USER, -- utilisateur PostgreSQL connecté</a:t>
+            </a:r>
+          </a:p>
+          <a:p>
+            <a:pPr marL="146050" indent="0">
+              <a:buNone/>
+            </a:pPr>
+            <a:r>
+              <a:rPr lang="fr-FR" dirty="0"/>
+              <a:t>				CURRENT_DATE - DATE '1899-12-30’, -- Ex pour 14/8/2024 on a 45518. Cela sert à faire le lien avec la table calendrier qui contient toutes les dates.</a:t>
+            </a:r>
+          </a:p>
+          <a:p>
+            <a:pPr marL="146050" indent="0">
+              <a:buNone/>
+            </a:pPr>
+            <a:r>
+              <a:rPr lang="fr-FR" dirty="0"/>
+              <a:t>				TG_OP,</a:t>
+            </a:r>
+          </a:p>
+          <a:p>
+            <a:pPr marL="146050" indent="0">
+              <a:buNone/>
+            </a:pPr>
+            <a:r>
+              <a:rPr lang="fr-FR" dirty="0"/>
+              <a:t>				</a:t>
+            </a:r>
+            <a:r>
+              <a:rPr lang="fr-FR" dirty="0" err="1"/>
+              <a:t>NEW.id_employe</a:t>
+            </a:r>
+            <a:r>
+              <a:rPr lang="fr-FR" dirty="0"/>
+              <a:t>,</a:t>
+            </a:r>
+          </a:p>
+          <a:p>
+            <a:pPr marL="146050" indent="0">
+              <a:buNone/>
+            </a:pPr>
+            <a:r>
+              <a:rPr lang="fr-FR" dirty="0"/>
+              <a:t>				'Nouvel employé'</a:t>
+            </a:r>
+          </a:p>
+          <a:p>
+            <a:pPr marL="146050" indent="0">
+              <a:buNone/>
+            </a:pPr>
+            <a:r>
+              <a:rPr lang="fr-FR" dirty="0"/>
+              <a:t>			</a:t>
+            </a:r>
+            <a:r>
+              <a:rPr lang="en-US" dirty="0"/>
+              <a:t>);</a:t>
+            </a:r>
+            <a:endParaRPr lang="fr-FR" dirty="0"/>
+          </a:p>
+          <a:p>
+            <a:pPr marL="146050" indent="0">
+              <a:buNone/>
+            </a:pPr>
+            <a:r>
+              <a:rPr lang="en-US" dirty="0"/>
+              <a:t>	</a:t>
+            </a:r>
+            <a:endParaRPr lang="fr-FR" dirty="0"/>
+          </a:p>
+          <a:p>
+            <a:pPr marL="146050" indent="0">
+              <a:buNone/>
+            </a:pPr>
+            <a:r>
+              <a:rPr lang="en-US" dirty="0"/>
+              <a:t>			RETURN NEW;</a:t>
+            </a:r>
+          </a:p>
+          <a:p>
+            <a:pPr marL="146050" indent="0">
+              <a:buNone/>
+            </a:pPr>
+            <a:r>
+              <a:rPr lang="en-US" dirty="0"/>
+              <a:t>	[… ELSIF UPDATE, DELETE…]</a:t>
+            </a:r>
+          </a:p>
+          <a:p>
+            <a:pPr marL="146050" indent="0">
+              <a:buNone/>
+            </a:pPr>
+            <a:endParaRPr lang="fr-FR" dirty="0"/>
+          </a:p>
+          <a:p>
+            <a:pPr marL="146050" indent="0">
+              <a:buNone/>
+            </a:pPr>
+            <a:r>
+              <a:rPr lang="en-US" dirty="0"/>
+              <a:t>		END IF;</a:t>
+            </a:r>
+            <a:endParaRPr lang="fr-FR" dirty="0"/>
+          </a:p>
+          <a:p>
+            <a:pPr marL="146050" indent="0">
+              <a:buNone/>
+            </a:pPr>
+            <a:r>
+              <a:rPr lang="en-US" dirty="0"/>
+              <a:t>		RETURN NULL;</a:t>
+            </a:r>
+            <a:endParaRPr lang="fr-FR" dirty="0"/>
+          </a:p>
+          <a:p>
+            <a:pPr marL="146050" indent="0">
+              <a:buNone/>
+            </a:pPr>
+            <a:r>
+              <a:rPr lang="en-US" dirty="0"/>
+              <a:t>	END;</a:t>
+            </a:r>
+            <a:endParaRPr lang="fr-FR" dirty="0"/>
+          </a:p>
+          <a:p>
+            <a:pPr marL="146050" indent="0">
+              <a:buNone/>
+            </a:pPr>
+            <a:r>
+              <a:rPr lang="en-US" dirty="0"/>
+              <a:t>$$ LANGUAGE </a:t>
+            </a:r>
+            <a:r>
+              <a:rPr lang="en-US" dirty="0" err="1"/>
+              <a:t>plpgsql</a:t>
+            </a:r>
+            <a:r>
+              <a:rPr lang="en-US" dirty="0"/>
+              <a:t>;</a:t>
+            </a:r>
+            <a:endParaRPr lang="fr-FR" dirty="0"/>
+          </a:p>
+        </p:txBody>
+      </p:sp>
+    </p:spTree>
+    <p:extLst>
+      <p:ext uri="{BB962C8B-B14F-4D97-AF65-F5344CB8AC3E}">
+        <p14:creationId xmlns:p14="http://schemas.microsoft.com/office/powerpoint/2010/main" val="677342059"/>
+      </p:ext>
+    </p:extLst>
+  </p:cSld>
+  <p:clrMapOvr>
+    <a:masterClrMapping/>
+  </p:clrMapOvr>
+</p:sld>
+</file>
+
+<file path=ppt/slides/slide21.xml><?xml version="1.0" encoding="utf-8"?>
+<p:sld xmlns:a="http://schemas.openxmlformats.org/drawingml/2006/main" xmlns:r="http://schemas.openxmlformats.org/officeDocument/2006/relationships" xmlns:p="http://schemas.openxmlformats.org/presentationml/2006/main">
+  <p:cSld>
+    <p:spTree>
+      <p:nvGrpSpPr>
         <p:cNvPr id="1" name="">
           <a:extLst>
             <a:ext uri="{FF2B5EF4-FFF2-40B4-BE49-F238E27FC236}">
@@ -16963,7 +17820,7 @@
 </p:sld>
 </file>
 
-<file path=ppt/slides/slide21.xml><?xml version="1.0" encoding="utf-8"?>
+<file path=ppt/slides/slide22.xml><?xml version="1.0" encoding="utf-8"?>
 <p:sld xmlns:a="http://schemas.openxmlformats.org/drawingml/2006/main" xmlns:r="http://schemas.openxmlformats.org/officeDocument/2006/relationships" xmlns:p="http://schemas.openxmlformats.org/presentationml/2006/main">
   <p:cSld>
     <p:spTree>
@@ -17584,8 +18441,8 @@
         </p:nvSpPr>
         <p:spPr>
           <a:xfrm>
-            <a:off x="1297500" y="1567550"/>
-            <a:ext cx="7038900" cy="2911200"/>
+            <a:off x="1297500" y="1164508"/>
+            <a:ext cx="7038900" cy="3712014"/>
           </a:xfrm>
           <a:prstGeom prst="rect">
             <a:avLst/>
@@ -17613,8 +18470,218 @@
             </a:pPr>
             <a:r>
               <a:rPr lang="fr-FR" dirty="0"/>
-              <a:t>Dictionnaire des données ici</a:t>
-            </a:r>
+              <a:t>Dictionnaire des données Ventes</a:t>
+            </a:r>
+          </a:p>
+          <a:p>
+            <a:pPr marL="457200" marR="152400" lvl="0" indent="-285750" algn="l" rtl="0">
+              <a:spcBef>
+                <a:spcPts val="0"/>
+              </a:spcBef>
+              <a:spcAft>
+                <a:spcPts val="0"/>
+              </a:spcAft>
+              <a:buClr>
+                <a:srgbClr val="999999"/>
+              </a:buClr>
+              <a:buSzPts val="900"/>
+              <a:buFont typeface="Inter"/>
+              <a:buChar char="●"/>
+            </a:pPr>
+            <a:endParaRPr lang="fr-FR" dirty="0"/>
+          </a:p>
+          <a:p>
+            <a:pPr marL="457200" marR="152400" lvl="0" indent="-285750" algn="l" rtl="0">
+              <a:spcBef>
+                <a:spcPts val="0"/>
+              </a:spcBef>
+              <a:spcAft>
+                <a:spcPts val="0"/>
+              </a:spcAft>
+              <a:buClr>
+                <a:srgbClr val="999999"/>
+              </a:buClr>
+              <a:buSzPts val="900"/>
+              <a:buFont typeface="Inter"/>
+              <a:buChar char="●"/>
+            </a:pPr>
+            <a:endParaRPr lang="fr-FR" dirty="0"/>
+          </a:p>
+          <a:p>
+            <a:pPr marL="457200" marR="152400" lvl="0" indent="-285750" algn="l" rtl="0">
+              <a:spcBef>
+                <a:spcPts val="0"/>
+              </a:spcBef>
+              <a:spcAft>
+                <a:spcPts val="0"/>
+              </a:spcAft>
+              <a:buClr>
+                <a:srgbClr val="999999"/>
+              </a:buClr>
+              <a:buSzPts val="900"/>
+              <a:buFont typeface="Inter"/>
+              <a:buChar char="●"/>
+            </a:pPr>
+            <a:endParaRPr lang="fr-FR" dirty="0"/>
+          </a:p>
+          <a:p>
+            <a:pPr marL="457200" marR="152400" lvl="0" indent="-285750" algn="l" rtl="0">
+              <a:spcBef>
+                <a:spcPts val="0"/>
+              </a:spcBef>
+              <a:spcAft>
+                <a:spcPts val="0"/>
+              </a:spcAft>
+              <a:buClr>
+                <a:srgbClr val="999999"/>
+              </a:buClr>
+              <a:buSzPts val="900"/>
+              <a:buFont typeface="Inter"/>
+              <a:buChar char="●"/>
+            </a:pPr>
+            <a:endParaRPr lang="fr-FR" dirty="0"/>
+          </a:p>
+          <a:p>
+            <a:pPr marL="457200" marR="152400" lvl="0" indent="-285750" algn="l" rtl="0">
+              <a:spcBef>
+                <a:spcPts val="0"/>
+              </a:spcBef>
+              <a:spcAft>
+                <a:spcPts val="0"/>
+              </a:spcAft>
+              <a:buClr>
+                <a:srgbClr val="999999"/>
+              </a:buClr>
+              <a:buSzPts val="900"/>
+              <a:buFont typeface="Inter"/>
+              <a:buChar char="●"/>
+            </a:pPr>
+            <a:endParaRPr lang="fr-FR" dirty="0"/>
+          </a:p>
+          <a:p>
+            <a:pPr marL="457200" marR="152400" lvl="0" indent="-285750" algn="l" rtl="0">
+              <a:spcBef>
+                <a:spcPts val="0"/>
+              </a:spcBef>
+              <a:spcAft>
+                <a:spcPts val="0"/>
+              </a:spcAft>
+              <a:buClr>
+                <a:srgbClr val="999999"/>
+              </a:buClr>
+              <a:buSzPts val="900"/>
+              <a:buFont typeface="Inter"/>
+              <a:buChar char="●"/>
+            </a:pPr>
+            <a:r>
+              <a:rPr lang="fr-FR" dirty="0"/>
+              <a:t>Dictionnaire des données Produits</a:t>
+            </a:r>
+          </a:p>
+          <a:p>
+            <a:pPr marL="457200" marR="152400" lvl="0" indent="-285750" algn="l" rtl="0">
+              <a:spcBef>
+                <a:spcPts val="0"/>
+              </a:spcBef>
+              <a:spcAft>
+                <a:spcPts val="0"/>
+              </a:spcAft>
+              <a:buClr>
+                <a:srgbClr val="999999"/>
+              </a:buClr>
+              <a:buSzPts val="900"/>
+              <a:buFont typeface="Inter"/>
+              <a:buChar char="●"/>
+            </a:pPr>
+            <a:endParaRPr lang="fr-FR" dirty="0"/>
+          </a:p>
+          <a:p>
+            <a:pPr marL="457200" marR="152400" lvl="0" indent="-285750" algn="l" rtl="0">
+              <a:spcBef>
+                <a:spcPts val="0"/>
+              </a:spcBef>
+              <a:spcAft>
+                <a:spcPts val="0"/>
+              </a:spcAft>
+              <a:buClr>
+                <a:srgbClr val="999999"/>
+              </a:buClr>
+              <a:buSzPts val="900"/>
+              <a:buFont typeface="Inter"/>
+              <a:buChar char="●"/>
+            </a:pPr>
+            <a:endParaRPr lang="fr-FR" dirty="0"/>
+          </a:p>
+          <a:p>
+            <a:pPr marL="457200" marR="152400" lvl="0" indent="-285750" algn="l" rtl="0">
+              <a:spcBef>
+                <a:spcPts val="0"/>
+              </a:spcBef>
+              <a:spcAft>
+                <a:spcPts val="0"/>
+              </a:spcAft>
+              <a:buClr>
+                <a:srgbClr val="999999"/>
+              </a:buClr>
+              <a:buSzPts val="900"/>
+              <a:buFont typeface="Inter"/>
+              <a:buChar char="●"/>
+            </a:pPr>
+            <a:endParaRPr lang="fr-FR" dirty="0"/>
+          </a:p>
+          <a:p>
+            <a:pPr marL="457200" marR="152400" lvl="0" indent="-285750" algn="l" rtl="0">
+              <a:spcBef>
+                <a:spcPts val="0"/>
+              </a:spcBef>
+              <a:spcAft>
+                <a:spcPts val="0"/>
+              </a:spcAft>
+              <a:buClr>
+                <a:srgbClr val="999999"/>
+              </a:buClr>
+              <a:buSzPts val="900"/>
+              <a:buFont typeface="Inter"/>
+              <a:buChar char="●"/>
+            </a:pPr>
+            <a:endParaRPr lang="fr-FR" dirty="0"/>
+          </a:p>
+          <a:p>
+            <a:pPr marL="457200" marR="152400" lvl="0" indent="-285750" algn="l" rtl="0">
+              <a:spcBef>
+                <a:spcPts val="0"/>
+              </a:spcBef>
+              <a:spcAft>
+                <a:spcPts val="0"/>
+              </a:spcAft>
+              <a:buClr>
+                <a:srgbClr val="999999"/>
+              </a:buClr>
+              <a:buSzPts val="900"/>
+              <a:buFont typeface="Inter"/>
+              <a:buChar char="●"/>
+            </a:pPr>
+            <a:r>
+              <a:rPr lang="fr-FR" dirty="0"/>
+              <a:t>Dictionnaire des données Employés</a:t>
+            </a:r>
+          </a:p>
+          <a:p>
+            <a:pPr marL="457200" marR="152400" lvl="0" indent="-285750" algn="l" rtl="0">
+              <a:spcBef>
+                <a:spcPts val="0"/>
+              </a:spcBef>
+              <a:spcAft>
+                <a:spcPts val="0"/>
+              </a:spcAft>
+              <a:buClr>
+                <a:srgbClr val="999999"/>
+              </a:buClr>
+              <a:buSzPts val="900"/>
+              <a:buFont typeface="Inter"/>
+              <a:buChar char="●"/>
+            </a:pPr>
+            <a:endParaRPr lang="fr-FR" dirty="0"/>
           </a:p>
           <a:p>
             <a:pPr marL="457200" marR="152400" lvl="0" indent="-285750" algn="l" rtl="0">
@@ -17776,13 +18843,13 @@
           <p:nvPr>
             <p:extLst>
               <p:ext uri="{D42A27DB-BD31-4B8C-83A1-F6EECF244321}">
-                <p14:modId xmlns:p14="http://schemas.microsoft.com/office/powerpoint/2010/main" val="4150577595"/>
+                <p14:modId xmlns:p14="http://schemas.microsoft.com/office/powerpoint/2010/main" val="1542950738"/>
               </p:ext>
             </p:extLst>
           </p:nvPr>
         </p:nvGraphicFramePr>
         <p:xfrm>
-          <a:off x="6134660" y="1276845"/>
+          <a:off x="8084484" y="439217"/>
           <a:ext cx="914400" cy="792162"/>
         </p:xfrm>
         <a:graphic>
@@ -17810,7 +18877,7 @@
                     </p:blipFill>
                     <p:spPr>
                       <a:xfrm>
-                        <a:off x="6134660" y="1276845"/>
+                        <a:off x="8084484" y="439217"/>
                         <a:ext cx="914400" cy="792162"/>
                       </a:xfrm>
                       <a:prstGeom prst="rect">
@@ -17846,8 +18913,68 @@
         </p:blipFill>
         <p:spPr>
           <a:xfrm>
-            <a:off x="0" y="2069007"/>
+            <a:off x="0" y="1530398"/>
             <a:ext cx="9144000" cy="1005485"/>
+          </a:xfrm>
+          <a:prstGeom prst="rect">
+            <a:avLst/>
+          </a:prstGeom>
+        </p:spPr>
+      </p:pic>
+      <p:pic>
+        <p:nvPicPr>
+          <p:cNvPr id="2" name="Image 1">
+            <a:extLst>
+              <a:ext uri="{FF2B5EF4-FFF2-40B4-BE49-F238E27FC236}">
+                <a16:creationId xmlns:a16="http://schemas.microsoft.com/office/drawing/2014/main" id="{31E1F68C-C91E-D37D-EE6D-0AE7F058F5C4}"/>
+              </a:ext>
+            </a:extLst>
+          </p:cNvPr>
+          <p:cNvPicPr>
+            <a:picLocks noChangeAspect="1"/>
+          </p:cNvPicPr>
+          <p:nvPr/>
+        </p:nvPicPr>
+        <p:blipFill>
+          <a:blip r:embed="rId6"/>
+          <a:stretch>
+            <a:fillRect/>
+          </a:stretch>
+        </p:blipFill>
+        <p:spPr>
+          <a:xfrm>
+            <a:off x="0" y="2901773"/>
+            <a:ext cx="9144000" cy="820757"/>
+          </a:xfrm>
+          <a:prstGeom prst="rect">
+            <a:avLst/>
+          </a:prstGeom>
+        </p:spPr>
+      </p:pic>
+      <p:pic>
+        <p:nvPicPr>
+          <p:cNvPr id="6" name="Image 5">
+            <a:extLst>
+              <a:ext uri="{FF2B5EF4-FFF2-40B4-BE49-F238E27FC236}">
+                <a16:creationId xmlns:a16="http://schemas.microsoft.com/office/drawing/2014/main" id="{9586D335-6494-0F0F-D6AB-C5FD636180E0}"/>
+              </a:ext>
+            </a:extLst>
+          </p:cNvPr>
+          <p:cNvPicPr>
+            <a:picLocks noChangeAspect="1"/>
+          </p:cNvPicPr>
+          <p:nvPr/>
+        </p:nvPicPr>
+        <p:blipFill>
+          <a:blip r:embed="rId7"/>
+          <a:stretch>
+            <a:fillRect/>
+          </a:stretch>
+        </p:blipFill>
+        <p:spPr>
+          <a:xfrm>
+            <a:off x="0" y="3971192"/>
+            <a:ext cx="9144000" cy="1172308"/>
           </a:xfrm>
           <a:prstGeom prst="rect">
             <a:avLst/>
@@ -17863,6 +18990,476 @@
 </file>
 
 <file path=ppt/slides/slide5.xml><?xml version="1.0" encoding="utf-8"?>
+<p:sld xmlns:a="http://schemas.openxmlformats.org/drawingml/2006/main" xmlns:r="http://schemas.openxmlformats.org/officeDocument/2006/relationships" xmlns:p="http://schemas.openxmlformats.org/presentationml/2006/main">
+  <p:cSld>
+    <p:spTree>
+      <p:nvGrpSpPr>
+        <p:cNvPr id="1" name="Shape 157">
+          <a:extLst>
+            <a:ext uri="{FF2B5EF4-FFF2-40B4-BE49-F238E27FC236}">
+              <a16:creationId xmlns:a16="http://schemas.microsoft.com/office/drawing/2014/main" id="{1F159A4E-556F-FFFC-815D-9ABD86B035E4}"/>
+            </a:ext>
+          </a:extLst>
+        </p:cNvPr>
+        <p:cNvGrpSpPr/>
+        <p:nvPr/>
+      </p:nvGrpSpPr>
+      <p:grpSpPr>
+        <a:xfrm>
+          <a:off x="0" y="0"/>
+          <a:ext cx="0" cy="0"/>
+          <a:chOff x="0" y="0"/>
+          <a:chExt cx="0" cy="0"/>
+        </a:xfrm>
+      </p:grpSpPr>
+      <p:sp>
+        <p:nvSpPr>
+          <p:cNvPr id="158" name="Google Shape;158;p17">
+            <a:extLst>
+              <a:ext uri="{FF2B5EF4-FFF2-40B4-BE49-F238E27FC236}">
+                <a16:creationId xmlns:a16="http://schemas.microsoft.com/office/drawing/2014/main" id="{EF128F3E-323C-F8AE-165F-A9A9F086372C}"/>
+              </a:ext>
+            </a:extLst>
+          </p:cNvPr>
+          <p:cNvSpPr txBox="1">
+            <a:spLocks noGrp="1"/>
+          </p:cNvSpPr>
+          <p:nvPr>
+            <p:ph type="body" idx="1"/>
+          </p:nvPr>
+        </p:nvSpPr>
+        <p:spPr>
+          <a:xfrm>
+            <a:off x="1297500" y="1164508"/>
+            <a:ext cx="7038900" cy="3712014"/>
+          </a:xfrm>
+          <a:prstGeom prst="rect">
+            <a:avLst/>
+          </a:prstGeom>
+        </p:spPr>
+        <p:txBody>
+          <a:bodyPr spcFirstLastPara="1" wrap="square" lIns="91425" tIns="91425" rIns="91425" bIns="91425" anchor="t" anchorCtr="0">
+            <a:normAutofit/>
+          </a:bodyPr>
+          <a:lstStyle/>
+          <a:p>
+            <a:pPr marL="457200" marR="152400" lvl="0" indent="-285750" algn="l" rtl="0">
+              <a:spcBef>
+                <a:spcPts val="0"/>
+              </a:spcBef>
+              <a:spcAft>
+                <a:spcPts val="0"/>
+              </a:spcAft>
+              <a:buClr>
+                <a:srgbClr val="999999"/>
+              </a:buClr>
+              <a:buSzPts val="900"/>
+              <a:buFont typeface="Inter"/>
+              <a:buChar char="●"/>
+            </a:pPr>
+            <a:r>
+              <a:rPr lang="fr-FR" dirty="0"/>
+              <a:t>Dictionnaire des données Clients</a:t>
+            </a:r>
+          </a:p>
+          <a:p>
+            <a:pPr marL="457200" marR="152400" lvl="0" indent="-285750" algn="l" rtl="0">
+              <a:spcBef>
+                <a:spcPts val="0"/>
+              </a:spcBef>
+              <a:spcAft>
+                <a:spcPts val="0"/>
+              </a:spcAft>
+              <a:buClr>
+                <a:srgbClr val="999999"/>
+              </a:buClr>
+              <a:buSzPts val="900"/>
+              <a:buFont typeface="Inter"/>
+              <a:buChar char="●"/>
+            </a:pPr>
+            <a:endParaRPr lang="fr-FR" dirty="0"/>
+          </a:p>
+          <a:p>
+            <a:pPr marL="457200" marR="152400" lvl="0" indent="-285750" algn="l" rtl="0">
+              <a:spcBef>
+                <a:spcPts val="0"/>
+              </a:spcBef>
+              <a:spcAft>
+                <a:spcPts val="0"/>
+              </a:spcAft>
+              <a:buClr>
+                <a:srgbClr val="999999"/>
+              </a:buClr>
+              <a:buSzPts val="900"/>
+              <a:buFont typeface="Inter"/>
+              <a:buChar char="●"/>
+            </a:pPr>
+            <a:endParaRPr lang="fr-FR" dirty="0"/>
+          </a:p>
+          <a:p>
+            <a:pPr marL="457200" marR="152400" lvl="0" indent="-285750" algn="l" rtl="0">
+              <a:spcBef>
+                <a:spcPts val="0"/>
+              </a:spcBef>
+              <a:spcAft>
+                <a:spcPts val="0"/>
+              </a:spcAft>
+              <a:buClr>
+                <a:srgbClr val="999999"/>
+              </a:buClr>
+              <a:buSzPts val="900"/>
+              <a:buFont typeface="Inter"/>
+              <a:buChar char="●"/>
+            </a:pPr>
+            <a:endParaRPr lang="fr-FR" dirty="0"/>
+          </a:p>
+          <a:p>
+            <a:pPr marL="457200" marR="152400" lvl="0" indent="-285750" algn="l" rtl="0">
+              <a:spcBef>
+                <a:spcPts val="0"/>
+              </a:spcBef>
+              <a:spcAft>
+                <a:spcPts val="0"/>
+              </a:spcAft>
+              <a:buClr>
+                <a:srgbClr val="999999"/>
+              </a:buClr>
+              <a:buSzPts val="900"/>
+              <a:buFont typeface="Inter"/>
+              <a:buChar char="●"/>
+            </a:pPr>
+            <a:endParaRPr lang="fr-FR" dirty="0"/>
+          </a:p>
+          <a:p>
+            <a:pPr marL="457200" marR="152400" lvl="0" indent="-285750" algn="l" rtl="0">
+              <a:spcBef>
+                <a:spcPts val="0"/>
+              </a:spcBef>
+              <a:spcAft>
+                <a:spcPts val="0"/>
+              </a:spcAft>
+              <a:buClr>
+                <a:srgbClr val="999999"/>
+              </a:buClr>
+              <a:buSzPts val="900"/>
+              <a:buFont typeface="Inter"/>
+              <a:buChar char="●"/>
+            </a:pPr>
+            <a:r>
+              <a:rPr lang="fr-FR" dirty="0"/>
+              <a:t>Dictionnaire des données Calendrier</a:t>
+            </a:r>
+          </a:p>
+          <a:p>
+            <a:pPr marL="457200" marR="152400" lvl="0" indent="-285750" algn="l" rtl="0">
+              <a:spcBef>
+                <a:spcPts val="0"/>
+              </a:spcBef>
+              <a:spcAft>
+                <a:spcPts val="0"/>
+              </a:spcAft>
+              <a:buClr>
+                <a:srgbClr val="999999"/>
+              </a:buClr>
+              <a:buSzPts val="900"/>
+              <a:buFont typeface="Inter"/>
+              <a:buChar char="●"/>
+            </a:pPr>
+            <a:endParaRPr lang="fr-FR" dirty="0"/>
+          </a:p>
+          <a:p>
+            <a:pPr marL="457200" marR="152400" lvl="0" indent="-285750" algn="l" rtl="0">
+              <a:spcBef>
+                <a:spcPts val="0"/>
+              </a:spcBef>
+              <a:spcAft>
+                <a:spcPts val="0"/>
+              </a:spcAft>
+              <a:buClr>
+                <a:srgbClr val="999999"/>
+              </a:buClr>
+              <a:buSzPts val="900"/>
+              <a:buFont typeface="Inter"/>
+              <a:buChar char="●"/>
+            </a:pPr>
+            <a:endParaRPr lang="fr-FR" dirty="0"/>
+          </a:p>
+          <a:p>
+            <a:pPr marL="457200" marR="152400" lvl="0" indent="-285750" algn="l" rtl="0">
+              <a:spcBef>
+                <a:spcPts val="0"/>
+              </a:spcBef>
+              <a:spcAft>
+                <a:spcPts val="0"/>
+              </a:spcAft>
+              <a:buClr>
+                <a:srgbClr val="999999"/>
+              </a:buClr>
+              <a:buSzPts val="900"/>
+              <a:buFont typeface="Inter"/>
+              <a:buChar char="●"/>
+            </a:pPr>
+            <a:endParaRPr lang="fr-FR" dirty="0"/>
+          </a:p>
+          <a:p>
+            <a:pPr marL="457200" marR="152400" lvl="0" indent="-285750" algn="l" rtl="0">
+              <a:spcBef>
+                <a:spcPts val="0"/>
+              </a:spcBef>
+              <a:spcAft>
+                <a:spcPts val="0"/>
+              </a:spcAft>
+              <a:buClr>
+                <a:srgbClr val="999999"/>
+              </a:buClr>
+              <a:buSzPts val="900"/>
+              <a:buFont typeface="Inter"/>
+              <a:buChar char="●"/>
+            </a:pPr>
+            <a:endParaRPr lang="fr-FR" dirty="0"/>
+          </a:p>
+          <a:p>
+            <a:pPr marL="457200" marR="152400" lvl="0" indent="-285750" algn="l" rtl="0">
+              <a:spcBef>
+                <a:spcPts val="0"/>
+              </a:spcBef>
+              <a:spcAft>
+                <a:spcPts val="0"/>
+              </a:spcAft>
+              <a:buClr>
+                <a:srgbClr val="999999"/>
+              </a:buClr>
+              <a:buSzPts val="900"/>
+              <a:buFont typeface="Inter"/>
+              <a:buChar char="●"/>
+            </a:pPr>
+            <a:endParaRPr lang="fr-FR" dirty="0"/>
+          </a:p>
+          <a:p>
+            <a:pPr marL="457200" marR="152400" lvl="0" indent="-285750" algn="l" rtl="0">
+              <a:spcBef>
+                <a:spcPts val="0"/>
+              </a:spcBef>
+              <a:spcAft>
+                <a:spcPts val="0"/>
+              </a:spcAft>
+              <a:buClr>
+                <a:srgbClr val="999999"/>
+              </a:buClr>
+              <a:buSzPts val="900"/>
+              <a:buFont typeface="Inter"/>
+              <a:buChar char="●"/>
+            </a:pPr>
+            <a:endParaRPr lang="fr-FR" dirty="0"/>
+          </a:p>
+          <a:p>
+            <a:pPr marL="457200" marR="152400" lvl="0" indent="-285750" algn="l" rtl="0">
+              <a:spcBef>
+                <a:spcPts val="0"/>
+              </a:spcBef>
+              <a:spcAft>
+                <a:spcPts val="0"/>
+              </a:spcAft>
+              <a:buClr>
+                <a:srgbClr val="999999"/>
+              </a:buClr>
+              <a:buSzPts val="900"/>
+              <a:buFont typeface="Inter"/>
+              <a:buChar char="●"/>
+            </a:pPr>
+            <a:endParaRPr lang="fr-FR" dirty="0"/>
+          </a:p>
+          <a:p>
+            <a:pPr marL="457200" marR="152400" lvl="0" indent="-285750" algn="l" rtl="0">
+              <a:spcBef>
+                <a:spcPts val="0"/>
+              </a:spcBef>
+              <a:spcAft>
+                <a:spcPts val="0"/>
+              </a:spcAft>
+              <a:buClr>
+                <a:srgbClr val="999999"/>
+              </a:buClr>
+              <a:buSzPts val="900"/>
+              <a:buFont typeface="Inter"/>
+              <a:buChar char="●"/>
+            </a:pPr>
+            <a:endParaRPr lang="fr-FR" dirty="0"/>
+          </a:p>
+          <a:p>
+            <a:pPr marL="457200" marR="152400" lvl="0" indent="-285750" algn="l" rtl="0">
+              <a:spcBef>
+                <a:spcPts val="0"/>
+              </a:spcBef>
+              <a:spcAft>
+                <a:spcPts val="0"/>
+              </a:spcAft>
+              <a:buClr>
+                <a:srgbClr val="999999"/>
+              </a:buClr>
+              <a:buSzPts val="900"/>
+              <a:buFont typeface="Inter"/>
+              <a:buChar char="●"/>
+            </a:pPr>
+            <a:endParaRPr lang="fr-FR" dirty="0"/>
+          </a:p>
+          <a:p>
+            <a:pPr marL="457200" marR="152400" lvl="0" indent="-285750" algn="l" rtl="0">
+              <a:spcBef>
+                <a:spcPts val="0"/>
+              </a:spcBef>
+              <a:spcAft>
+                <a:spcPts val="0"/>
+              </a:spcAft>
+              <a:buClr>
+                <a:srgbClr val="999999"/>
+              </a:buClr>
+              <a:buSzPts val="900"/>
+              <a:buFont typeface="Inter"/>
+              <a:buChar char="●"/>
+            </a:pPr>
+            <a:endParaRPr dirty="0"/>
+          </a:p>
+        </p:txBody>
+      </p:sp>
+      <p:sp>
+        <p:nvSpPr>
+          <p:cNvPr id="159" name="Google Shape;159;p17">
+            <a:extLst>
+              <a:ext uri="{FF2B5EF4-FFF2-40B4-BE49-F238E27FC236}">
+                <a16:creationId xmlns:a16="http://schemas.microsoft.com/office/drawing/2014/main" id="{5FE40768-35CE-349F-416A-9E71422D3F06}"/>
+              </a:ext>
+            </a:extLst>
+          </p:cNvPr>
+          <p:cNvSpPr txBox="1">
+            <a:spLocks noGrp="1"/>
+          </p:cNvSpPr>
+          <p:nvPr>
+            <p:ph type="title"/>
+          </p:nvPr>
+        </p:nvSpPr>
+        <p:spPr>
+          <a:xfrm>
+            <a:off x="1297500" y="393750"/>
+            <a:ext cx="7038900" cy="914100"/>
+          </a:xfrm>
+          <a:prstGeom prst="rect">
+            <a:avLst/>
+          </a:prstGeom>
+        </p:spPr>
+        <p:txBody>
+          <a:bodyPr spcFirstLastPara="1" wrap="square" lIns="91425" tIns="91425" rIns="91425" bIns="91425" anchor="t" anchorCtr="0">
+            <a:normAutofit fontScale="90000"/>
+          </a:bodyPr>
+          <a:lstStyle/>
+          <a:p>
+            <a:pPr marL="0" lvl="0" indent="0" algn="l" rtl="0">
+              <a:spcBef>
+                <a:spcPts val="0"/>
+              </a:spcBef>
+              <a:spcAft>
+                <a:spcPts val="0"/>
+              </a:spcAft>
+              <a:buNone/>
+            </a:pPr>
+            <a:r>
+              <a:rPr lang="fr" dirty="0"/>
+              <a:t>Analyse de la base de données</a:t>
+            </a:r>
+            <a:endParaRPr dirty="0"/>
+          </a:p>
+          <a:p>
+            <a:pPr marL="0" lvl="0" indent="0" algn="l" rtl="0">
+              <a:spcBef>
+                <a:spcPts val="0"/>
+              </a:spcBef>
+              <a:spcAft>
+                <a:spcPts val="0"/>
+              </a:spcAft>
+              <a:buNone/>
+            </a:pPr>
+            <a:r>
+              <a:rPr lang="fr" sz="1888" dirty="0"/>
+              <a:t>Dictionnaire des données du fichier OLAP schéma relationnel</a:t>
+            </a:r>
+            <a:endParaRPr sz="1888" dirty="0"/>
+          </a:p>
+        </p:txBody>
+      </p:sp>
+      <p:pic>
+        <p:nvPicPr>
+          <p:cNvPr id="3" name="Image 2">
+            <a:extLst>
+              <a:ext uri="{FF2B5EF4-FFF2-40B4-BE49-F238E27FC236}">
+                <a16:creationId xmlns:a16="http://schemas.microsoft.com/office/drawing/2014/main" id="{F7A04A3E-7B5D-1A9B-269B-037DF347CFC5}"/>
+              </a:ext>
+            </a:extLst>
+          </p:cNvPr>
+          <p:cNvPicPr>
+            <a:picLocks noChangeAspect="1"/>
+          </p:cNvPicPr>
+          <p:nvPr/>
+        </p:nvPicPr>
+        <p:blipFill>
+          <a:blip r:embed="rId3"/>
+          <a:stretch>
+            <a:fillRect/>
+          </a:stretch>
+        </p:blipFill>
+        <p:spPr>
+          <a:xfrm>
+            <a:off x="0" y="1592011"/>
+            <a:ext cx="9144000" cy="574431"/>
+          </a:xfrm>
+          <a:prstGeom prst="rect">
+            <a:avLst/>
+          </a:prstGeom>
+        </p:spPr>
+      </p:pic>
+      <p:pic>
+        <p:nvPicPr>
+          <p:cNvPr id="7" name="Image 6">
+            <a:extLst>
+              <a:ext uri="{FF2B5EF4-FFF2-40B4-BE49-F238E27FC236}">
+                <a16:creationId xmlns:a16="http://schemas.microsoft.com/office/drawing/2014/main" id="{82F791CE-9D7F-EB94-72EE-635A6CB11988}"/>
+              </a:ext>
+            </a:extLst>
+          </p:cNvPr>
+          <p:cNvPicPr>
+            <a:picLocks noChangeAspect="1"/>
+          </p:cNvPicPr>
+          <p:nvPr/>
+        </p:nvPicPr>
+        <p:blipFill>
+          <a:blip r:embed="rId4"/>
+          <a:stretch>
+            <a:fillRect/>
+          </a:stretch>
+        </p:blipFill>
+        <p:spPr>
+          <a:xfrm>
+            <a:off x="0" y="2735495"/>
+            <a:ext cx="9144000" cy="1348154"/>
+          </a:xfrm>
+          <a:prstGeom prst="rect">
+            <a:avLst/>
+          </a:prstGeom>
+        </p:spPr>
+      </p:pic>
+    </p:spTree>
+    <p:extLst>
+      <p:ext uri="{BB962C8B-B14F-4D97-AF65-F5344CB8AC3E}">
+        <p14:creationId xmlns:p14="http://schemas.microsoft.com/office/powerpoint/2010/main" val="653342688"/>
+      </p:ext>
+    </p:extLst>
+  </p:cSld>
+  <p:clrMapOvr>
+    <a:masterClrMapping/>
+  </p:clrMapOvr>
+</p:sld>
+</file>
+
+<file path=ppt/slides/slide6.xml><?xml version="1.0" encoding="utf-8"?>
 <p:sld xmlns:a="http://schemas.openxmlformats.org/drawingml/2006/main" xmlns:r="http://schemas.openxmlformats.org/officeDocument/2006/relationships" xmlns:p="http://schemas.openxmlformats.org/presentationml/2006/main">
   <p:cSld>
     <p:spTree>
@@ -18262,7 +19859,7 @@
 </p:sld>
 </file>
 
-<file path=ppt/slides/slide6.xml><?xml version="1.0" encoding="utf-8"?>
+<file path=ppt/slides/slide7.xml><?xml version="1.0" encoding="utf-8"?>
 <p:sld xmlns:a="http://schemas.openxmlformats.org/drawingml/2006/main" xmlns:r="http://schemas.openxmlformats.org/officeDocument/2006/relationships" xmlns:p="http://schemas.openxmlformats.org/presentationml/2006/main">
   <p:cSld>
     <p:spTree>
@@ -18349,8 +19946,8 @@
         </p:nvSpPr>
         <p:spPr>
           <a:xfrm>
-            <a:off x="1297500" y="1567550"/>
-            <a:ext cx="7038900" cy="2911200"/>
+            <a:off x="1297500" y="1567549"/>
+            <a:ext cx="7038900" cy="3508715"/>
           </a:xfrm>
           <a:prstGeom prst="rect">
             <a:avLst/>
@@ -18358,7 +19955,7 @@
         </p:spPr>
         <p:txBody>
           <a:bodyPr spcFirstLastPara="1" wrap="square" lIns="91425" tIns="91425" rIns="91425" bIns="91425" anchor="t" anchorCtr="0">
-            <a:normAutofit/>
+            <a:normAutofit fontScale="85000" lnSpcReduction="20000"/>
           </a:bodyPr>
           <a:lstStyle/>
           <a:p>
@@ -18399,6 +19996,286 @@
             <a:r>
               <a:rPr lang="fr-FR" dirty="0"/>
               <a:t>Les tables ont été créées à l’aide des scripts SQL générés par SQL Power Architect, puis alimentées avec les données extraites.</a:t>
+            </a:r>
+          </a:p>
+          <a:p>
+            <a:pPr marL="457200" marR="152400" lvl="0" indent="-285750" algn="l" rtl="0">
+              <a:spcBef>
+                <a:spcPts val="0"/>
+              </a:spcBef>
+              <a:spcAft>
+                <a:spcPts val="0"/>
+              </a:spcAft>
+              <a:buClr>
+                <a:srgbClr val="999999"/>
+              </a:buClr>
+              <a:buSzPts val="900"/>
+              <a:buFont typeface="Inter"/>
+              <a:buChar char="●"/>
+            </a:pPr>
+            <a:endParaRPr lang="fr-FR" dirty="0"/>
+          </a:p>
+          <a:p>
+            <a:pPr marL="457200" marR="152400" lvl="0" indent="-285750" algn="l" rtl="0">
+              <a:spcBef>
+                <a:spcPts val="0"/>
+              </a:spcBef>
+              <a:spcAft>
+                <a:spcPts val="0"/>
+              </a:spcAft>
+              <a:buClr>
+                <a:srgbClr val="999999"/>
+              </a:buClr>
+              <a:buSzPts val="900"/>
+              <a:buFont typeface="Inter"/>
+              <a:buChar char="●"/>
+            </a:pPr>
+            <a:r>
+              <a:rPr lang="fr-FR" dirty="0"/>
+              <a:t>Exemple de script pour la table calendrier. </a:t>
+            </a:r>
+          </a:p>
+          <a:p>
+            <a:pPr marL="457200" marR="152400" lvl="0" indent="-285750" algn="l" rtl="0">
+              <a:spcBef>
+                <a:spcPts val="0"/>
+              </a:spcBef>
+              <a:spcAft>
+                <a:spcPts val="0"/>
+              </a:spcAft>
+              <a:buClr>
+                <a:srgbClr val="999999"/>
+              </a:buClr>
+              <a:buSzPts val="900"/>
+              <a:buFont typeface="Inter"/>
+              <a:buChar char="●"/>
+            </a:pPr>
+            <a:endParaRPr lang="fr-FR" dirty="0"/>
+          </a:p>
+          <a:p>
+            <a:pPr marL="171450" marR="152400" lvl="0" indent="0">
+              <a:buClr>
+                <a:srgbClr val="999999"/>
+              </a:buClr>
+              <a:buSzPts val="900"/>
+              <a:buNone/>
+            </a:pPr>
+            <a:r>
+              <a:rPr lang="fr-FR" dirty="0"/>
+              <a:t>CREATE TABLE calendrier (</a:t>
+            </a:r>
+          </a:p>
+          <a:p>
+            <a:pPr marL="171450" marR="152400" lvl="0" indent="0">
+              <a:buClr>
+                <a:srgbClr val="999999"/>
+              </a:buClr>
+              <a:buSzPts val="900"/>
+              <a:buNone/>
+            </a:pPr>
+            <a:r>
+              <a:rPr lang="fr-FR" dirty="0"/>
+              <a:t>                date INTEGER NOT NULL,</a:t>
+            </a:r>
+          </a:p>
+          <a:p>
+            <a:pPr marL="171450" marR="152400" lvl="0" indent="0">
+              <a:buClr>
+                <a:srgbClr val="999999"/>
+              </a:buClr>
+              <a:buSzPts val="900"/>
+              <a:buNone/>
+            </a:pPr>
+            <a:r>
+              <a:rPr lang="fr-FR" dirty="0"/>
+              <a:t>                </a:t>
+            </a:r>
+            <a:r>
+              <a:rPr lang="fr-FR" dirty="0" err="1"/>
+              <a:t>annee</a:t>
+            </a:r>
+            <a:r>
+              <a:rPr lang="fr-FR" dirty="0"/>
+              <a:t> INTEGER NOT NULL,</a:t>
+            </a:r>
+          </a:p>
+          <a:p>
+            <a:pPr marL="171450" marR="152400" lvl="0" indent="0">
+              <a:buClr>
+                <a:srgbClr val="999999"/>
+              </a:buClr>
+              <a:buSzPts val="900"/>
+              <a:buNone/>
+            </a:pPr>
+            <a:r>
+              <a:rPr lang="fr-FR" dirty="0"/>
+              <a:t>                mois INTEGER NOT NULL,</a:t>
+            </a:r>
+          </a:p>
+          <a:p>
+            <a:pPr marL="171450" marR="152400" lvl="0" indent="0">
+              <a:buClr>
+                <a:srgbClr val="999999"/>
+              </a:buClr>
+              <a:buSzPts val="900"/>
+              <a:buNone/>
+            </a:pPr>
+            <a:r>
+              <a:rPr lang="fr-FR" dirty="0"/>
+              <a:t>                jour INTEGER NOT NULL,</a:t>
+            </a:r>
+          </a:p>
+          <a:p>
+            <a:pPr marL="171450" marR="152400" lvl="0" indent="0">
+              <a:buClr>
+                <a:srgbClr val="999999"/>
+              </a:buClr>
+              <a:buSzPts val="900"/>
+              <a:buNone/>
+            </a:pPr>
+            <a:r>
+              <a:rPr lang="fr-FR" dirty="0"/>
+              <a:t>                </a:t>
+            </a:r>
+            <a:r>
+              <a:rPr lang="fr-FR" dirty="0" err="1"/>
+              <a:t>mois_nom</a:t>
+            </a:r>
+            <a:r>
+              <a:rPr lang="fr-FR" dirty="0"/>
+              <a:t> VARCHAR(10) NOT NULL,</a:t>
+            </a:r>
+          </a:p>
+          <a:p>
+            <a:pPr marL="171450" marR="152400" lvl="0" indent="0">
+              <a:buClr>
+                <a:srgbClr val="999999"/>
+              </a:buClr>
+              <a:buSzPts val="900"/>
+              <a:buNone/>
+            </a:pPr>
+            <a:r>
+              <a:rPr lang="fr-FR" dirty="0"/>
+              <a:t>                </a:t>
+            </a:r>
+            <a:r>
+              <a:rPr lang="fr-FR" dirty="0" err="1"/>
+              <a:t>annee_mois</a:t>
+            </a:r>
+            <a:r>
+              <a:rPr lang="fr-FR" dirty="0"/>
+              <a:t> INTEGER NOT NULL,</a:t>
+            </a:r>
+          </a:p>
+          <a:p>
+            <a:pPr marL="171450" marR="152400" lvl="0" indent="0">
+              <a:buClr>
+                <a:srgbClr val="999999"/>
+              </a:buClr>
+              <a:buSzPts val="900"/>
+              <a:buNone/>
+            </a:pPr>
+            <a:r>
+              <a:rPr lang="fr-FR" dirty="0"/>
+              <a:t>                </a:t>
+            </a:r>
+            <a:r>
+              <a:rPr lang="fr-FR" dirty="0" err="1"/>
+              <a:t>jour_semaine</a:t>
+            </a:r>
+            <a:r>
+              <a:rPr lang="fr-FR" dirty="0"/>
+              <a:t> INTEGER NOT NULL,</a:t>
+            </a:r>
+          </a:p>
+          <a:p>
+            <a:pPr marL="171450" marR="152400" lvl="0" indent="0">
+              <a:buClr>
+                <a:srgbClr val="999999"/>
+              </a:buClr>
+              <a:buSzPts val="900"/>
+              <a:buNone/>
+            </a:pPr>
+            <a:r>
+              <a:rPr lang="fr-FR" dirty="0"/>
+              <a:t>                trimestre VARCHAR(2) NOT NULL,</a:t>
+            </a:r>
+          </a:p>
+          <a:p>
+            <a:pPr marL="171450" marR="152400" lvl="0" indent="0">
+              <a:buClr>
+                <a:srgbClr val="999999"/>
+              </a:buClr>
+              <a:buSzPts val="900"/>
+              <a:buNone/>
+            </a:pPr>
+            <a:r>
+              <a:rPr lang="fr-FR" dirty="0"/>
+              <a:t>                CONSTRAINT </a:t>
+            </a:r>
+            <a:r>
+              <a:rPr lang="fr-FR" dirty="0" err="1"/>
+              <a:t>calendrier_pk</a:t>
+            </a:r>
+            <a:r>
+              <a:rPr lang="fr-FR" dirty="0"/>
+              <a:t> PRIMARY KEY (date)</a:t>
+            </a:r>
+          </a:p>
+          <a:p>
+            <a:pPr marL="171450" marR="152400" lvl="0" indent="0">
+              <a:buClr>
+                <a:srgbClr val="999999"/>
+              </a:buClr>
+              <a:buSzPts val="900"/>
+              <a:buNone/>
+            </a:pPr>
+            <a:r>
+              <a:rPr lang="fr-FR" dirty="0"/>
+              <a:t>);</a:t>
+            </a:r>
+          </a:p>
+          <a:p>
+            <a:pPr marL="171450" marR="152400" lvl="0" indent="0">
+              <a:buClr>
+                <a:srgbClr val="999999"/>
+              </a:buClr>
+              <a:buSzPts val="900"/>
+              <a:buNone/>
+            </a:pPr>
+            <a:endParaRPr lang="fr-FR" dirty="0"/>
+          </a:p>
+          <a:p>
+            <a:pPr marL="171450" marR="152400" lvl="0" indent="0">
+              <a:buClr>
+                <a:srgbClr val="999999"/>
+              </a:buClr>
+              <a:buSzPts val="900"/>
+              <a:buNone/>
+            </a:pPr>
+            <a:r>
+              <a:rPr lang="fr-FR" dirty="0"/>
+              <a:t>Voir le rapport pour le script complet.</a:t>
+            </a:r>
+          </a:p>
+          <a:p>
+            <a:pPr marL="457200" marR="152400" lvl="0" indent="-285750" algn="l" rtl="0">
+              <a:spcBef>
+                <a:spcPts val="0"/>
+              </a:spcBef>
+              <a:spcAft>
+                <a:spcPts val="0"/>
+              </a:spcAft>
+              <a:buClr>
+                <a:srgbClr val="999999"/>
+              </a:buClr>
+              <a:buSzPts val="900"/>
+              <a:buFont typeface="Inter"/>
+              <a:buChar char="●"/>
+            </a:pPr>
+            <a:r>
+              <a:rPr lang="fr-FR" dirty="0"/>
+              <a:t>Les données ont ensuite été intégrées en important un .csv</a:t>
             </a:r>
           </a:p>
         </p:txBody>
@@ -18433,69 +20310,6 @@
           </a:prstGeom>
         </p:spPr>
       </p:pic>
-      <p:graphicFrame>
-        <p:nvGraphicFramePr>
-          <p:cNvPr id="5" name="Objet 4">
-            <a:extLst>
-              <a:ext uri="{FF2B5EF4-FFF2-40B4-BE49-F238E27FC236}">
-                <a16:creationId xmlns:a16="http://schemas.microsoft.com/office/drawing/2014/main" id="{638026A9-8391-5752-42EF-3ED3500CDEF6}"/>
-              </a:ext>
-            </a:extLst>
-          </p:cNvPr>
-          <p:cNvGraphicFramePr>
-            <a:graphicFrameLocks noChangeAspect="1"/>
-          </p:cNvGraphicFramePr>
-          <p:nvPr>
-            <p:extLst>
-              <p:ext uri="{D42A27DB-BD31-4B8C-83A1-F6EECF244321}">
-                <p14:modId xmlns:p14="http://schemas.microsoft.com/office/powerpoint/2010/main" val="694778375"/>
-              </p:ext>
-            </p:extLst>
-          </p:nvPr>
-        </p:nvGraphicFramePr>
-        <p:xfrm>
-          <a:off x="4421170" y="3632543"/>
-          <a:ext cx="862012" cy="517525"/>
-        </p:xfrm>
-        <a:graphic>
-          <a:graphicData uri="http://schemas.openxmlformats.org/presentationml/2006/ole">
-            <mc:AlternateContent xmlns:mc="http://schemas.openxmlformats.org/markup-compatibility/2006">
-              <mc:Choice xmlns:v="urn:schemas-microsoft-com:vml" Requires="v">
-                <p:oleObj name="Objet d’environnement du Gestionnaire de liaisons" showAsIcon="1" r:id="rId4" imgW="861237" imgH="517956" progId="Package">
-                  <p:embed/>
-                </p:oleObj>
-              </mc:Choice>
-              <mc:Fallback>
-                <p:oleObj name="Objet d’environnement du Gestionnaire de liaisons" showAsIcon="1" r:id="rId4" imgW="861237" imgH="517956" progId="Package">
-                  <p:embed/>
-                  <p:pic>
-                    <p:nvPicPr>
-                      <p:cNvPr id="0" name=""/>
-                      <p:cNvPicPr/>
-                      <p:nvPr/>
-                    </p:nvPicPr>
-                    <p:blipFill>
-                      <a:blip r:embed="rId5"/>
-                      <a:stretch>
-                        <a:fillRect/>
-                      </a:stretch>
-                    </p:blipFill>
-                    <p:spPr>
-                      <a:xfrm>
-                        <a:off x="4421170" y="3632543"/>
-                        <a:ext cx="862012" cy="517525"/>
-                      </a:xfrm>
-                      <a:prstGeom prst="rect">
-                        <a:avLst/>
-                      </a:prstGeom>
-                    </p:spPr>
-                  </p:pic>
-                </p:oleObj>
-              </mc:Fallback>
-            </mc:AlternateContent>
-          </a:graphicData>
-        </a:graphic>
-      </p:graphicFrame>
     </p:spTree>
   </p:cSld>
   <p:clrMapOvr>
@@ -18504,7 +20318,7 @@
 </p:sld>
 </file>
 
-<file path=ppt/slides/slide7.xml><?xml version="1.0" encoding="utf-8"?>
+<file path=ppt/slides/slide8.xml><?xml version="1.0" encoding="utf-8"?>
 <p:sld xmlns:a="http://schemas.openxmlformats.org/drawingml/2006/main" xmlns:r="http://schemas.openxmlformats.org/officeDocument/2006/relationships" xmlns:p="http://schemas.openxmlformats.org/presentationml/2006/main">
   <p:cSld>
     <p:spTree>
@@ -18781,7 +20595,7 @@
 </p:sld>
 </file>
 
-<file path=ppt/slides/slide8.xml><?xml version="1.0" encoding="utf-8"?>
+<file path=ppt/slides/slide9.xml><?xml version="1.0" encoding="utf-8"?>
 <p:sld xmlns:a="http://schemas.openxmlformats.org/drawingml/2006/main" xmlns:r="http://schemas.openxmlformats.org/officeDocument/2006/relationships" xmlns:p="http://schemas.openxmlformats.org/presentationml/2006/main">
   <p:cSld>
     <p:spTree>
@@ -19074,733 +20888,6 @@
           <a:xfrm>
             <a:off x="5719456" y="1436224"/>
             <a:ext cx="2667231" cy="3368332"/>
-          </a:xfrm>
-          <a:prstGeom prst="rect">
-            <a:avLst/>
-          </a:prstGeom>
-        </p:spPr>
-      </p:pic>
-    </p:spTree>
-  </p:cSld>
-  <p:clrMapOvr>
-    <a:masterClrMapping/>
-  </p:clrMapOvr>
-</p:sld>
-</file>
-
-<file path=ppt/slides/slide9.xml><?xml version="1.0" encoding="utf-8"?>
-<p:sld xmlns:a="http://schemas.openxmlformats.org/drawingml/2006/main" xmlns:r="http://schemas.openxmlformats.org/officeDocument/2006/relationships" xmlns:p="http://schemas.openxmlformats.org/presentationml/2006/main">
-  <p:cSld>
-    <p:spTree>
-      <p:nvGrpSpPr>
-        <p:cNvPr id="1" name="Shape 181"/>
-        <p:cNvGrpSpPr/>
-        <p:nvPr/>
-      </p:nvGrpSpPr>
-      <p:grpSpPr>
-        <a:xfrm>
-          <a:off x="0" y="0"/>
-          <a:ext cx="0" cy="0"/>
-          <a:chOff x="0" y="0"/>
-          <a:chExt cx="0" cy="0"/>
-        </a:xfrm>
-      </p:grpSpPr>
-      <p:sp>
-        <p:nvSpPr>
-          <p:cNvPr id="182" name="Google Shape;182;p21"/>
-          <p:cNvSpPr txBox="1">
-            <a:spLocks noGrp="1"/>
-          </p:cNvSpPr>
-          <p:nvPr>
-            <p:ph type="body" idx="1"/>
-          </p:nvPr>
-        </p:nvSpPr>
-        <p:spPr>
-          <a:xfrm>
-            <a:off x="1297500" y="1567550"/>
-            <a:ext cx="7624624" cy="3479938"/>
-          </a:xfrm>
-          <a:prstGeom prst="rect">
-            <a:avLst/>
-          </a:prstGeom>
-        </p:spPr>
-        <p:txBody>
-          <a:bodyPr spcFirstLastPara="1" wrap="square" lIns="91425" tIns="91425" rIns="91425" bIns="91425" anchor="t" anchorCtr="0">
-            <a:normAutofit fontScale="85000" lnSpcReduction="20000"/>
-          </a:bodyPr>
-          <a:lstStyle/>
-          <a:p>
-            <a:pPr marR="152400" lvl="0" indent="-285750">
-              <a:buClr>
-                <a:srgbClr val="999999"/>
-              </a:buClr>
-              <a:buSzPts val="900"/>
-              <a:buFont typeface="Inter"/>
-              <a:buChar char="●"/>
-            </a:pPr>
-            <a:r>
-              <a:rPr lang="fr-FR" sz="900" dirty="0"/>
-              <a:t>CREATE or REPLACE VIEW </a:t>
-            </a:r>
-            <a:r>
-              <a:rPr lang="fr-FR" sz="900" dirty="0" err="1"/>
-              <a:t>ca_per_employe</a:t>
-            </a:r>
-            <a:r>
-              <a:rPr lang="fr-FR" sz="900" dirty="0"/>
-              <a:t> AS(</a:t>
-            </a:r>
-          </a:p>
-          <a:p>
-            <a:pPr marR="152400" lvl="0" indent="-285750">
-              <a:buClr>
-                <a:srgbClr val="999999"/>
-              </a:buClr>
-              <a:buSzPts val="900"/>
-              <a:buFont typeface="Inter"/>
-              <a:buChar char="●"/>
-            </a:pPr>
-            <a:r>
-              <a:rPr lang="fr-FR" sz="900" dirty="0" err="1"/>
-              <a:t>SELECTv.id_employe</a:t>
-            </a:r>
-            <a:r>
-              <a:rPr lang="fr-FR" sz="900" dirty="0"/>
-              <a:t>,</a:t>
-            </a:r>
-          </a:p>
-          <a:p>
-            <a:pPr marR="152400" lvl="0" indent="-285750">
-              <a:buClr>
-                <a:srgbClr val="999999"/>
-              </a:buClr>
-              <a:buSzPts val="900"/>
-              <a:buFont typeface="Inter"/>
-              <a:buChar char="●"/>
-            </a:pPr>
-            <a:r>
-              <a:rPr lang="fr-FR" sz="900" dirty="0"/>
-              <a:t>SUM(ROUND(</a:t>
-            </a:r>
-            <a:r>
-              <a:rPr lang="fr-FR" sz="900" dirty="0" err="1"/>
-              <a:t>p.prix</a:t>
-            </a:r>
-            <a:r>
-              <a:rPr lang="fr-FR" sz="900" dirty="0"/>
-              <a:t>::</a:t>
-            </a:r>
-            <a:r>
-              <a:rPr lang="fr-FR" sz="900" dirty="0" err="1"/>
-              <a:t>numeric</a:t>
-            </a:r>
-            <a:r>
-              <a:rPr lang="fr-FR" sz="900" dirty="0"/>
-              <a:t>, 2)) AS </a:t>
-            </a:r>
-            <a:r>
-              <a:rPr lang="fr-FR" sz="900" dirty="0" err="1"/>
-              <a:t>ca_arrondie_par_employe</a:t>
-            </a:r>
-            <a:endParaRPr lang="fr-FR" sz="900" dirty="0"/>
-          </a:p>
-          <a:p>
-            <a:pPr marR="152400" lvl="0" indent="-285750">
-              <a:buClr>
-                <a:srgbClr val="999999"/>
-              </a:buClr>
-              <a:buSzPts val="900"/>
-              <a:buFont typeface="Inter"/>
-              <a:buChar char="●"/>
-            </a:pPr>
-            <a:r>
-              <a:rPr lang="fr-FR" sz="900" dirty="0"/>
-              <a:t>FROM vente v</a:t>
-            </a:r>
-          </a:p>
-          <a:p>
-            <a:pPr marR="152400" lvl="0" indent="-285750">
-              <a:buClr>
-                <a:srgbClr val="999999"/>
-              </a:buClr>
-              <a:buSzPts val="900"/>
-              <a:buFont typeface="Inter"/>
-              <a:buChar char="●"/>
-            </a:pPr>
-            <a:r>
-              <a:rPr lang="fr-FR" sz="900" dirty="0"/>
-              <a:t>JOIN produit p ON </a:t>
-            </a:r>
-            <a:r>
-              <a:rPr lang="fr-FR" sz="900" dirty="0" err="1"/>
-              <a:t>v.ean</a:t>
-            </a:r>
-            <a:r>
-              <a:rPr lang="fr-FR" sz="900" dirty="0"/>
-              <a:t> = </a:t>
-            </a:r>
-            <a:r>
-              <a:rPr lang="fr-FR" sz="900" dirty="0" err="1"/>
-              <a:t>p.ean</a:t>
-            </a:r>
-            <a:endParaRPr lang="fr-FR" sz="900" dirty="0"/>
-          </a:p>
-          <a:p>
-            <a:pPr marR="152400" lvl="0" indent="-285750">
-              <a:buClr>
-                <a:srgbClr val="999999"/>
-              </a:buClr>
-              <a:buSzPts val="900"/>
-              <a:buFont typeface="Inter"/>
-              <a:buChar char="●"/>
-            </a:pPr>
-            <a:r>
-              <a:rPr lang="fr-FR" sz="900" dirty="0"/>
-              <a:t>GROUP BY </a:t>
-            </a:r>
-            <a:r>
-              <a:rPr lang="fr-FR" sz="900" dirty="0" err="1"/>
-              <a:t>v.id_employe</a:t>
-            </a:r>
-            <a:endParaRPr lang="fr-FR" sz="900" dirty="0"/>
-          </a:p>
-          <a:p>
-            <a:pPr marR="152400" lvl="0" indent="-285750">
-              <a:buClr>
-                <a:srgbClr val="999999"/>
-              </a:buClr>
-              <a:buSzPts val="900"/>
-              <a:buFont typeface="Inter"/>
-              <a:buChar char="●"/>
-            </a:pPr>
-            <a:r>
-              <a:rPr lang="fr-FR" sz="900" dirty="0"/>
-              <a:t>ORDER BY </a:t>
-            </a:r>
-            <a:r>
-              <a:rPr lang="fr-FR" sz="900" dirty="0" err="1"/>
-              <a:t>ca_arrondie_par_employe</a:t>
-            </a:r>
-            <a:r>
-              <a:rPr lang="fr-FR" sz="900" dirty="0"/>
-              <a:t> DESC</a:t>
-            </a:r>
-          </a:p>
-          <a:p>
-            <a:pPr marR="152400" lvl="0" indent="-285750">
-              <a:buClr>
-                <a:srgbClr val="999999"/>
-              </a:buClr>
-              <a:buSzPts val="900"/>
-              <a:buFont typeface="Inter"/>
-              <a:buChar char="●"/>
-            </a:pPr>
-            <a:r>
-              <a:rPr lang="fr-FR" sz="900" dirty="0"/>
-              <a:t>);</a:t>
-            </a:r>
-          </a:p>
-          <a:p>
-            <a:pPr marR="152400" lvl="0" indent="-285750">
-              <a:buClr>
-                <a:srgbClr val="999999"/>
-              </a:buClr>
-              <a:buSzPts val="900"/>
-              <a:buFont typeface="Inter"/>
-              <a:buChar char="●"/>
-            </a:pPr>
-            <a:endParaRPr lang="fr-FR" sz="900" dirty="0"/>
-          </a:p>
-          <a:p>
-            <a:pPr marR="152400" lvl="0" indent="-285750">
-              <a:buClr>
-                <a:srgbClr val="999999"/>
-              </a:buClr>
-              <a:buSzPts val="900"/>
-              <a:buFont typeface="Inter"/>
-              <a:buChar char="●"/>
-            </a:pPr>
-            <a:r>
-              <a:rPr lang="en-US" sz="900" dirty="0"/>
-              <a:t>CREATE or REPLACE VIEW </a:t>
-            </a:r>
-            <a:r>
-              <a:rPr lang="en-US" sz="900" dirty="0" err="1"/>
-              <a:t>ca_arrondi</a:t>
-            </a:r>
-            <a:r>
-              <a:rPr lang="en-US" sz="900" dirty="0"/>
-              <a:t> AS(</a:t>
-            </a:r>
-          </a:p>
-          <a:p>
-            <a:pPr marR="152400" lvl="0" indent="-285750">
-              <a:buClr>
-                <a:srgbClr val="999999"/>
-              </a:buClr>
-              <a:buSzPts val="900"/>
-              <a:buFont typeface="Inter"/>
-              <a:buChar char="●"/>
-            </a:pPr>
-            <a:r>
-              <a:rPr lang="en-US" sz="900" dirty="0" err="1"/>
-              <a:t>SELECTid_employe</a:t>
-            </a:r>
-            <a:r>
-              <a:rPr lang="en-US" sz="900" dirty="0"/>
-              <a:t>,</a:t>
-            </a:r>
-          </a:p>
-          <a:p>
-            <a:pPr marR="152400" lvl="0" indent="-285750">
-              <a:buClr>
-                <a:srgbClr val="999999"/>
-              </a:buClr>
-              <a:buSzPts val="900"/>
-              <a:buFont typeface="Inter"/>
-              <a:buChar char="●"/>
-            </a:pPr>
-            <a:r>
-              <a:rPr lang="en-US" sz="900" dirty="0"/>
-              <a:t>SUM(</a:t>
-            </a:r>
-            <a:r>
-              <a:rPr lang="en-US" sz="900" dirty="0" err="1"/>
-              <a:t>ca_arrondie_par_employe</a:t>
-            </a:r>
-            <a:r>
-              <a:rPr lang="en-US" sz="900" dirty="0"/>
-              <a:t>) OVER() AS </a:t>
-            </a:r>
-            <a:r>
-              <a:rPr lang="en-US" sz="900" dirty="0" err="1"/>
-              <a:t>ca_arrondi</a:t>
-            </a:r>
-            <a:endParaRPr lang="en-US" sz="900" dirty="0"/>
-          </a:p>
-          <a:p>
-            <a:pPr marR="152400" lvl="0" indent="-285750">
-              <a:buClr>
-                <a:srgbClr val="999999"/>
-              </a:buClr>
-              <a:buSzPts val="900"/>
-              <a:buFont typeface="Inter"/>
-              <a:buChar char="●"/>
-            </a:pPr>
-            <a:r>
-              <a:rPr lang="en-US" sz="900" dirty="0"/>
-              <a:t>FROM </a:t>
-            </a:r>
-            <a:r>
-              <a:rPr lang="en-US" sz="900" dirty="0" err="1"/>
-              <a:t>ca_per_employe</a:t>
-            </a:r>
-            <a:endParaRPr lang="en-US" sz="900" dirty="0"/>
-          </a:p>
-          <a:p>
-            <a:pPr marR="152400" lvl="0" indent="-285750">
-              <a:buClr>
-                <a:srgbClr val="999999"/>
-              </a:buClr>
-              <a:buSzPts val="900"/>
-              <a:buFont typeface="Inter"/>
-              <a:buChar char="●"/>
-            </a:pPr>
-            <a:r>
-              <a:rPr lang="en-US" sz="900" dirty="0"/>
-              <a:t>);</a:t>
-            </a:r>
-            <a:endParaRPr lang="fr-FR" sz="900" dirty="0"/>
-          </a:p>
-          <a:p>
-            <a:pPr marR="152400" lvl="0" indent="-285750">
-              <a:buClr>
-                <a:srgbClr val="999999"/>
-              </a:buClr>
-              <a:buSzPts val="900"/>
-              <a:buFont typeface="Inter"/>
-              <a:buChar char="●"/>
-            </a:pPr>
-            <a:endParaRPr lang="fr-FR" sz="900" dirty="0"/>
-          </a:p>
-          <a:p>
-            <a:pPr marR="152400" lvl="0" indent="-285750">
-              <a:buClr>
-                <a:srgbClr val="999999"/>
-              </a:buClr>
-              <a:buSzPts val="900"/>
-              <a:buFont typeface="Inter"/>
-              <a:buChar char="●"/>
-            </a:pPr>
-            <a:r>
-              <a:rPr lang="fr-FR" sz="900" dirty="0"/>
-              <a:t>SELECT</a:t>
-            </a:r>
-          </a:p>
-          <a:p>
-            <a:pPr marR="152400" lvl="0" indent="-285750">
-              <a:buClr>
-                <a:srgbClr val="999999"/>
-              </a:buClr>
-              <a:buSzPts val="900"/>
-              <a:buFont typeface="Inter"/>
-              <a:buChar char="●"/>
-            </a:pPr>
-            <a:r>
-              <a:rPr lang="fr-FR" sz="900" dirty="0" err="1"/>
-              <a:t>e.employe</a:t>
-            </a:r>
-            <a:r>
-              <a:rPr lang="fr-FR" sz="900" dirty="0"/>
-              <a:t>,</a:t>
-            </a:r>
-          </a:p>
-          <a:p>
-            <a:pPr marR="152400" lvl="0" indent="-285750">
-              <a:buClr>
-                <a:srgbClr val="999999"/>
-              </a:buClr>
-              <a:buSzPts val="900"/>
-              <a:buFont typeface="Inter"/>
-              <a:buChar char="●"/>
-            </a:pPr>
-            <a:r>
-              <a:rPr lang="fr-FR" sz="900" dirty="0"/>
-              <a:t>CONCAT(</a:t>
-            </a:r>
-            <a:r>
-              <a:rPr lang="fr-FR" sz="900" dirty="0" err="1"/>
-              <a:t>c.jour</a:t>
-            </a:r>
-            <a:r>
-              <a:rPr lang="fr-FR" sz="900" dirty="0"/>
-              <a:t>,'/',</a:t>
-            </a:r>
-            <a:r>
-              <a:rPr lang="fr-FR" sz="900" dirty="0" err="1"/>
-              <a:t>c.mois</a:t>
-            </a:r>
-            <a:r>
-              <a:rPr lang="fr-FR" sz="900" dirty="0"/>
-              <a:t>,'/',</a:t>
-            </a:r>
-            <a:r>
-              <a:rPr lang="fr-FR" sz="900" dirty="0" err="1"/>
-              <a:t>c.annee</a:t>
-            </a:r>
-            <a:r>
-              <a:rPr lang="fr-FR" sz="900" dirty="0"/>
-              <a:t>) AS </a:t>
-            </a:r>
-            <a:r>
-              <a:rPr lang="fr-FR" sz="900" dirty="0" err="1"/>
-              <a:t>date_de_début</a:t>
-            </a:r>
-            <a:r>
-              <a:rPr lang="fr-FR" sz="900" dirty="0"/>
-              <a:t>,</a:t>
-            </a:r>
-          </a:p>
-          <a:p>
-            <a:pPr marR="152400" lvl="0" indent="-285750">
-              <a:buClr>
-                <a:srgbClr val="999999"/>
-              </a:buClr>
-              <a:buSzPts val="900"/>
-              <a:buFont typeface="Inter"/>
-              <a:buChar char="●"/>
-            </a:pPr>
-            <a:r>
-              <a:rPr lang="fr-FR" sz="900" dirty="0" err="1"/>
-              <a:t>cap.ca_arrondie_par_employe</a:t>
-            </a:r>
-            <a:r>
-              <a:rPr lang="fr-FR" sz="900" dirty="0"/>
-              <a:t>,</a:t>
-            </a:r>
-          </a:p>
-          <a:p>
-            <a:pPr marR="152400" lvl="0" indent="-285750">
-              <a:buClr>
-                <a:srgbClr val="999999"/>
-              </a:buClr>
-              <a:buSzPts val="900"/>
-              <a:buFont typeface="Inter"/>
-              <a:buChar char="●"/>
-            </a:pPr>
-            <a:r>
-              <a:rPr lang="fr-FR" sz="900" dirty="0"/>
-              <a:t>CONCAT(ROUND(</a:t>
-            </a:r>
-            <a:r>
-              <a:rPr lang="fr-FR" sz="900" dirty="0" err="1"/>
-              <a:t>cap.ca_arrondie_par_employe</a:t>
-            </a:r>
-            <a:r>
-              <a:rPr lang="fr-FR" sz="900" dirty="0"/>
-              <a:t>*100.0/ca_arrondi,2),'%') AS </a:t>
-            </a:r>
-            <a:r>
-              <a:rPr lang="fr-FR" sz="900" dirty="0" err="1"/>
-              <a:t>part_ca_par_employe</a:t>
-            </a:r>
-            <a:endParaRPr lang="fr-FR" sz="900" dirty="0"/>
-          </a:p>
-          <a:p>
-            <a:pPr marR="152400" lvl="0" indent="-285750">
-              <a:buClr>
-                <a:srgbClr val="999999"/>
-              </a:buClr>
-              <a:buSzPts val="900"/>
-              <a:buFont typeface="Inter"/>
-              <a:buChar char="●"/>
-            </a:pPr>
-            <a:r>
-              <a:rPr lang="fr-FR" sz="900" dirty="0"/>
-              <a:t>FROM </a:t>
-            </a:r>
-            <a:r>
-              <a:rPr lang="fr-FR" sz="900" dirty="0" err="1"/>
-              <a:t>ca_per_employe</a:t>
-            </a:r>
-            <a:r>
-              <a:rPr lang="fr-FR" sz="900" dirty="0"/>
-              <a:t> cap</a:t>
-            </a:r>
-          </a:p>
-          <a:p>
-            <a:pPr marR="152400" lvl="0" indent="-285750">
-              <a:buClr>
-                <a:srgbClr val="999999"/>
-              </a:buClr>
-              <a:buSzPts val="900"/>
-              <a:buFont typeface="Inter"/>
-              <a:buChar char="●"/>
-            </a:pPr>
-            <a:r>
-              <a:rPr lang="fr-FR" sz="900" dirty="0"/>
-              <a:t>JOIN </a:t>
-            </a:r>
-            <a:r>
-              <a:rPr lang="fr-FR" sz="900" dirty="0" err="1"/>
-              <a:t>ca_arrondi</a:t>
-            </a:r>
-            <a:r>
-              <a:rPr lang="fr-FR" sz="900" dirty="0"/>
-              <a:t> ca ON </a:t>
-            </a:r>
-            <a:r>
-              <a:rPr lang="fr-FR" sz="900" dirty="0" err="1"/>
-              <a:t>cap.id_employe</a:t>
-            </a:r>
-            <a:r>
-              <a:rPr lang="fr-FR" sz="900" dirty="0"/>
-              <a:t> = </a:t>
-            </a:r>
-            <a:r>
-              <a:rPr lang="fr-FR" sz="900" dirty="0" err="1"/>
-              <a:t>ca.id_employe</a:t>
-            </a:r>
-            <a:endParaRPr lang="fr-FR" sz="900" dirty="0"/>
-          </a:p>
-          <a:p>
-            <a:pPr marR="152400" lvl="0" indent="-285750">
-              <a:buClr>
-                <a:srgbClr val="999999"/>
-              </a:buClr>
-              <a:buSzPts val="900"/>
-              <a:buFont typeface="Inter"/>
-              <a:buChar char="●"/>
-            </a:pPr>
-            <a:r>
-              <a:rPr lang="fr-FR" sz="900" dirty="0"/>
-              <a:t>JOIN </a:t>
-            </a:r>
-            <a:r>
-              <a:rPr lang="fr-FR" sz="900" dirty="0" err="1"/>
-              <a:t>employe</a:t>
-            </a:r>
-            <a:r>
-              <a:rPr lang="fr-FR" sz="900" dirty="0"/>
-              <a:t> e ON </a:t>
-            </a:r>
-            <a:r>
-              <a:rPr lang="fr-FR" sz="900" dirty="0" err="1"/>
-              <a:t>e.id_employe</a:t>
-            </a:r>
-            <a:r>
-              <a:rPr lang="fr-FR" sz="900" dirty="0"/>
-              <a:t> = </a:t>
-            </a:r>
-            <a:r>
-              <a:rPr lang="fr-FR" sz="900" dirty="0" err="1"/>
-              <a:t>ca.id_employe</a:t>
-            </a:r>
-            <a:endParaRPr lang="fr-FR" sz="900" dirty="0"/>
-          </a:p>
-          <a:p>
-            <a:pPr marR="152400" lvl="0" indent="-285750">
-              <a:buClr>
-                <a:srgbClr val="999999"/>
-              </a:buClr>
-              <a:buSzPts val="900"/>
-              <a:buFont typeface="Inter"/>
-              <a:buChar char="●"/>
-            </a:pPr>
-            <a:r>
-              <a:rPr lang="fr-FR" sz="900" dirty="0"/>
-              <a:t>JOIN calendrier c ON </a:t>
-            </a:r>
-            <a:r>
-              <a:rPr lang="fr-FR" sz="900" dirty="0" err="1"/>
-              <a:t>e.date_debut</a:t>
-            </a:r>
-            <a:r>
-              <a:rPr lang="fr-FR" sz="900" dirty="0"/>
-              <a:t> = </a:t>
-            </a:r>
-            <a:r>
-              <a:rPr lang="fr-FR" sz="900" dirty="0" err="1"/>
-              <a:t>c.date</a:t>
-            </a:r>
-            <a:endParaRPr lang="fr-FR" sz="900" dirty="0"/>
-          </a:p>
-          <a:p>
-            <a:pPr marR="152400" lvl="0" indent="-285750">
-              <a:buClr>
-                <a:srgbClr val="999999"/>
-              </a:buClr>
-              <a:buSzPts val="900"/>
-              <a:buFont typeface="Inter"/>
-              <a:buChar char="●"/>
-            </a:pPr>
-            <a:r>
-              <a:rPr lang="fr-FR" sz="900" dirty="0"/>
-              <a:t>ORDER BY </a:t>
-            </a:r>
-            <a:r>
-              <a:rPr lang="fr-FR" sz="900" dirty="0" err="1"/>
-              <a:t>part_ca_par_employe</a:t>
-            </a:r>
-            <a:r>
-              <a:rPr lang="fr-FR" sz="900" dirty="0"/>
-              <a:t> DESC</a:t>
-            </a:r>
-          </a:p>
-          <a:p>
-            <a:pPr marR="152400" lvl="0" indent="-285750">
-              <a:buClr>
-                <a:srgbClr val="999999"/>
-              </a:buClr>
-              <a:buSzPts val="900"/>
-              <a:buFont typeface="Inter"/>
-              <a:buChar char="●"/>
-            </a:pPr>
-            <a:r>
-              <a:rPr lang="fr-FR" sz="900" dirty="0"/>
-              <a:t>;</a:t>
-            </a:r>
-            <a:endParaRPr sz="900" dirty="0"/>
-          </a:p>
-        </p:txBody>
-      </p:sp>
-      <p:sp>
-        <p:nvSpPr>
-          <p:cNvPr id="183" name="Google Shape;183;p21"/>
-          <p:cNvSpPr txBox="1">
-            <a:spLocks noGrp="1"/>
-          </p:cNvSpPr>
-          <p:nvPr>
-            <p:ph type="title"/>
-          </p:nvPr>
-        </p:nvSpPr>
-        <p:spPr>
-          <a:xfrm>
-            <a:off x="1297500" y="393750"/>
-            <a:ext cx="7038900" cy="914100"/>
-          </a:xfrm>
-          <a:prstGeom prst="rect">
-            <a:avLst/>
-          </a:prstGeom>
-        </p:spPr>
-        <p:txBody>
-          <a:bodyPr spcFirstLastPara="1" wrap="square" lIns="91425" tIns="91425" rIns="91425" bIns="91425" anchor="t" anchorCtr="0">
-            <a:noAutofit/>
-          </a:bodyPr>
-          <a:lstStyle/>
-          <a:p>
-            <a:pPr marL="0" lvl="0" indent="0" algn="l" rtl="0">
-              <a:spcBef>
-                <a:spcPts val="0"/>
-              </a:spcBef>
-              <a:spcAft>
-                <a:spcPts val="0"/>
-              </a:spcAft>
-              <a:buSzPts val="990"/>
-              <a:buNone/>
-            </a:pPr>
-            <a:r>
-              <a:rPr lang="fr"/>
-              <a:t>Résultat des requêtes SQL</a:t>
-            </a:r>
-            <a:endParaRPr/>
-          </a:p>
-          <a:p>
-            <a:pPr marL="0" lvl="0" indent="0" algn="l" rtl="0">
-              <a:spcBef>
-                <a:spcPts val="0"/>
-              </a:spcBef>
-              <a:spcAft>
-                <a:spcPts val="0"/>
-              </a:spcAft>
-              <a:buSzPts val="990"/>
-              <a:buNone/>
-            </a:pPr>
-            <a:r>
-              <a:rPr lang="fr" sz="1850"/>
-              <a:t>Le chiffre d’affaires encaissé par employé</a:t>
-            </a:r>
-            <a:endParaRPr sz="1850"/>
-          </a:p>
-          <a:p>
-            <a:pPr marL="0" lvl="0" indent="0" algn="l" rtl="0">
-              <a:spcBef>
-                <a:spcPts val="0"/>
-              </a:spcBef>
-              <a:spcAft>
-                <a:spcPts val="0"/>
-              </a:spcAft>
-              <a:buSzPts val="990"/>
-              <a:buNone/>
-            </a:pPr>
-            <a:endParaRPr/>
-          </a:p>
-        </p:txBody>
-      </p:sp>
-      <p:pic>
-        <p:nvPicPr>
-          <p:cNvPr id="4" name="Image 3">
-            <a:extLst>
-              <a:ext uri="{FF2B5EF4-FFF2-40B4-BE49-F238E27FC236}">
-                <a16:creationId xmlns:a16="http://schemas.microsoft.com/office/drawing/2014/main" id="{306DB767-AC99-AEA5-AB6B-37C325BCED93}"/>
-              </a:ext>
-            </a:extLst>
-          </p:cNvPr>
-          <p:cNvPicPr>
-            <a:picLocks noChangeAspect="1"/>
-          </p:cNvPicPr>
-          <p:nvPr/>
-        </p:nvPicPr>
-        <p:blipFill>
-          <a:blip r:embed="rId3"/>
-          <a:stretch>
-            <a:fillRect/>
-          </a:stretch>
-        </p:blipFill>
-        <p:spPr>
-          <a:xfrm>
-            <a:off x="5109812" y="1567550"/>
-            <a:ext cx="3894677" cy="2122000"/>
           </a:xfrm>
           <a:prstGeom prst="rect">
             <a:avLst/>

--- a/presentation_sebastien_ulesie.pptx
+++ b/presentation_sebastien_ulesie.pptx
@@ -5,7 +5,7 @@
     <p:sldMasterId id="2147483659" r:id="rId1"/>
   </p:sldMasterIdLst>
   <p:notesMasterIdLst>
-    <p:notesMasterId r:id="rId24"/>
+    <p:notesMasterId r:id="rId20"/>
   </p:notesMasterIdLst>
   <p:sldIdLst>
     <p:sldId id="256" r:id="rId2"/>
@@ -23,37 +23,33 @@
     <p:sldId id="267" r:id="rId14"/>
     <p:sldId id="277" r:id="rId15"/>
     <p:sldId id="273" r:id="rId16"/>
-    <p:sldId id="274" r:id="rId17"/>
-    <p:sldId id="275" r:id="rId18"/>
-    <p:sldId id="276" r:id="rId19"/>
-    <p:sldId id="278" r:id="rId20"/>
-    <p:sldId id="279" r:id="rId21"/>
-    <p:sldId id="281" r:id="rId22"/>
-    <p:sldId id="271" r:id="rId23"/>
+    <p:sldId id="275" r:id="rId17"/>
+    <p:sldId id="276" r:id="rId18"/>
+    <p:sldId id="271" r:id="rId19"/>
   </p:sldIdLst>
   <p:sldSz cx="9144000" cy="5143500" type="screen16x9"/>
   <p:notesSz cx="6858000" cy="9144000"/>
   <p:embeddedFontLst>
     <p:embeddedFont>
       <p:font typeface="Lato" panose="020F0502020204030203" pitchFamily="34" charset="0"/>
+      <p:regular r:id="rId21"/>
+      <p:bold r:id="rId22"/>
+      <p:italic r:id="rId23"/>
+      <p:boldItalic r:id="rId24"/>
+    </p:embeddedFont>
+    <p:embeddedFont>
+      <p:font typeface="Montserrat" panose="00000500000000000000" pitchFamily="2" charset="0"/>
       <p:regular r:id="rId25"/>
       <p:bold r:id="rId26"/>
       <p:italic r:id="rId27"/>
       <p:boldItalic r:id="rId28"/>
     </p:embeddedFont>
     <p:embeddedFont>
-      <p:font typeface="Montserrat" panose="00000500000000000000" pitchFamily="2" charset="0"/>
+      <p:font typeface="Segoe UI" panose="020B0502040204020203" pitchFamily="34" charset="0"/>
       <p:regular r:id="rId29"/>
       <p:bold r:id="rId30"/>
       <p:italic r:id="rId31"/>
       <p:boldItalic r:id="rId32"/>
-    </p:embeddedFont>
-    <p:embeddedFont>
-      <p:font typeface="Segoe UI" panose="020B0502040204020203" pitchFamily="34" charset="0"/>
-      <p:regular r:id="rId33"/>
-      <p:bold r:id="rId34"/>
-      <p:italic r:id="rId35"/>
-      <p:boldItalic r:id="rId36"/>
     </p:embeddedFont>
   </p:embeddedFontLst>
   <p:defaultTextStyle>
@@ -10337,13 +10333,12 @@
           </a:bodyPr>
           <a:lstStyle/>
           <a:p>
-            <a:pPr marR="152400" lvl="0" indent="-285750">
+            <a:pPr marL="171450" marR="152400" lvl="0" indent="0">
               <a:buClr>
                 <a:srgbClr val="999999"/>
               </a:buClr>
               <a:buSzPts val="900"/>
-              <a:buFont typeface="Inter"/>
-              <a:buChar char="●"/>
+              <a:buNone/>
             </a:pPr>
             <a:r>
               <a:rPr lang="fr-FR" sz="900" dirty="0"/>
@@ -10359,13 +10354,12 @@
             </a:r>
           </a:p>
           <a:p>
-            <a:pPr marR="152400" lvl="0" indent="-285750">
+            <a:pPr marL="171450" marR="152400" lvl="0" indent="0">
               <a:buClr>
                 <a:srgbClr val="999999"/>
               </a:buClr>
               <a:buSzPts val="900"/>
-              <a:buFont typeface="Inter"/>
-              <a:buChar char="●"/>
+              <a:buNone/>
             </a:pPr>
             <a:r>
               <a:rPr lang="fr-FR" sz="900" dirty="0" err="1"/>
@@ -10377,13 +10371,12 @@
             </a:r>
           </a:p>
           <a:p>
-            <a:pPr marR="152400" lvl="0" indent="-285750">
+            <a:pPr marL="171450" marR="152400" lvl="0" indent="0">
               <a:buClr>
                 <a:srgbClr val="999999"/>
               </a:buClr>
               <a:buSzPts val="900"/>
-              <a:buFont typeface="Inter"/>
-              <a:buChar char="●"/>
+              <a:buNone/>
             </a:pPr>
             <a:r>
               <a:rPr lang="fr-FR" sz="900" dirty="0"/>
@@ -10412,13 +10405,12 @@
             <a:endParaRPr lang="fr-FR" sz="900" dirty="0"/>
           </a:p>
           <a:p>
-            <a:pPr marR="152400" lvl="0" indent="-285750">
+            <a:pPr marL="171450" marR="152400" lvl="0" indent="0">
               <a:buClr>
                 <a:srgbClr val="999999"/>
               </a:buClr>
               <a:buSzPts val="900"/>
-              <a:buFont typeface="Inter"/>
-              <a:buChar char="●"/>
+              <a:buNone/>
             </a:pPr>
             <a:r>
               <a:rPr lang="fr-FR" sz="900" dirty="0"/>
@@ -10426,13 +10418,12 @@
             </a:r>
           </a:p>
           <a:p>
-            <a:pPr marR="152400" lvl="0" indent="-285750">
+            <a:pPr marL="171450" marR="152400" lvl="0" indent="0">
               <a:buClr>
                 <a:srgbClr val="999999"/>
               </a:buClr>
               <a:buSzPts val="900"/>
-              <a:buFont typeface="Inter"/>
-              <a:buChar char="●"/>
+              <a:buNone/>
             </a:pPr>
             <a:r>
               <a:rPr lang="fr-FR" sz="900" dirty="0"/>
@@ -10453,13 +10444,12 @@
             <a:endParaRPr lang="fr-FR" sz="900" dirty="0"/>
           </a:p>
           <a:p>
-            <a:pPr marR="152400" lvl="0" indent="-285750">
+            <a:pPr marL="171450" marR="152400" lvl="0" indent="0">
               <a:buClr>
                 <a:srgbClr val="999999"/>
               </a:buClr>
               <a:buSzPts val="900"/>
-              <a:buFont typeface="Inter"/>
-              <a:buChar char="●"/>
+              <a:buNone/>
             </a:pPr>
             <a:r>
               <a:rPr lang="fr-FR" sz="900" dirty="0"/>
@@ -10472,13 +10462,12 @@
             <a:endParaRPr lang="fr-FR" sz="900" dirty="0"/>
           </a:p>
           <a:p>
-            <a:pPr marR="152400" lvl="0" indent="-285750">
+            <a:pPr marL="171450" marR="152400" lvl="0" indent="0">
               <a:buClr>
                 <a:srgbClr val="999999"/>
               </a:buClr>
               <a:buSzPts val="900"/>
-              <a:buFont typeface="Inter"/>
-              <a:buChar char="●"/>
+              <a:buNone/>
             </a:pPr>
             <a:r>
               <a:rPr lang="fr-FR" sz="900" dirty="0"/>
@@ -10494,13 +10483,12 @@
             </a:r>
           </a:p>
           <a:p>
-            <a:pPr marR="152400" lvl="0" indent="-285750">
+            <a:pPr marL="171450" marR="152400" lvl="0" indent="0">
               <a:buClr>
                 <a:srgbClr val="999999"/>
               </a:buClr>
               <a:buSzPts val="900"/>
-              <a:buFont typeface="Inter"/>
-              <a:buChar char="●"/>
+              <a:buNone/>
             </a:pPr>
             <a:r>
               <a:rPr lang="fr-FR" sz="900" dirty="0"/>
@@ -10508,24 +10496,22 @@
             </a:r>
           </a:p>
           <a:p>
-            <a:pPr marR="152400" lvl="0" indent="-285750">
+            <a:pPr marL="171450" marR="152400" lvl="0" indent="0">
               <a:buClr>
                 <a:srgbClr val="999999"/>
               </a:buClr>
               <a:buSzPts val="900"/>
-              <a:buFont typeface="Inter"/>
-              <a:buChar char="●"/>
+              <a:buNone/>
             </a:pPr>
             <a:endParaRPr lang="fr-FR" sz="900" dirty="0"/>
           </a:p>
           <a:p>
-            <a:pPr marR="152400" lvl="0" indent="-285750">
+            <a:pPr marL="171450" marR="152400" lvl="0" indent="0">
               <a:buClr>
                 <a:srgbClr val="999999"/>
               </a:buClr>
               <a:buSzPts val="900"/>
-              <a:buFont typeface="Inter"/>
-              <a:buChar char="●"/>
+              <a:buNone/>
             </a:pPr>
             <a:r>
               <a:rPr lang="en-US" sz="900" dirty="0"/>
@@ -10541,13 +10527,12 @@
             </a:r>
           </a:p>
           <a:p>
-            <a:pPr marR="152400" lvl="0" indent="-285750">
+            <a:pPr marL="171450" marR="152400" lvl="0" indent="0">
               <a:buClr>
                 <a:srgbClr val="999999"/>
               </a:buClr>
               <a:buSzPts val="900"/>
-              <a:buFont typeface="Inter"/>
-              <a:buChar char="●"/>
+              <a:buNone/>
             </a:pPr>
             <a:r>
               <a:rPr lang="en-US" sz="900" dirty="0" err="1"/>
@@ -10559,13 +10544,12 @@
             </a:r>
           </a:p>
           <a:p>
-            <a:pPr marR="152400" lvl="0" indent="-285750">
+            <a:pPr marL="171450" marR="152400" lvl="0" indent="0">
               <a:buClr>
                 <a:srgbClr val="999999"/>
               </a:buClr>
               <a:buSzPts val="900"/>
-              <a:buFont typeface="Inter"/>
-              <a:buChar char="●"/>
+              <a:buNone/>
             </a:pPr>
             <a:r>
               <a:rPr lang="en-US" sz="900" dirty="0"/>
@@ -10586,13 +10570,12 @@
             <a:endParaRPr lang="en-US" sz="900" dirty="0"/>
           </a:p>
           <a:p>
-            <a:pPr marR="152400" lvl="0" indent="-285750">
+            <a:pPr marL="171450" marR="152400" lvl="0" indent="0">
               <a:buClr>
                 <a:srgbClr val="999999"/>
               </a:buClr>
               <a:buSzPts val="900"/>
-              <a:buFont typeface="Inter"/>
-              <a:buChar char="●"/>
+              <a:buNone/>
             </a:pPr>
             <a:r>
               <a:rPr lang="en-US" sz="900" dirty="0"/>
@@ -10605,13 +10588,12 @@
             <a:endParaRPr lang="en-US" sz="900" dirty="0"/>
           </a:p>
           <a:p>
-            <a:pPr marR="152400" lvl="0" indent="-285750">
+            <a:pPr marL="171450" marR="152400" lvl="0" indent="0">
               <a:buClr>
                 <a:srgbClr val="999999"/>
               </a:buClr>
               <a:buSzPts val="900"/>
-              <a:buFont typeface="Inter"/>
-              <a:buChar char="●"/>
+              <a:buNone/>
             </a:pPr>
             <a:r>
               <a:rPr lang="en-US" sz="900" dirty="0"/>
@@ -10620,24 +10602,22 @@
             <a:endParaRPr lang="fr-FR" sz="900" dirty="0"/>
           </a:p>
           <a:p>
-            <a:pPr marR="152400" lvl="0" indent="-285750">
+            <a:pPr marL="171450" marR="152400" lvl="0" indent="0">
               <a:buClr>
                 <a:srgbClr val="999999"/>
               </a:buClr>
               <a:buSzPts val="900"/>
-              <a:buFont typeface="Inter"/>
-              <a:buChar char="●"/>
+              <a:buNone/>
             </a:pPr>
             <a:endParaRPr lang="fr-FR" sz="900" dirty="0"/>
           </a:p>
           <a:p>
-            <a:pPr marR="152400" lvl="0" indent="-285750">
+            <a:pPr marL="171450" marR="152400" lvl="0" indent="0">
               <a:buClr>
                 <a:srgbClr val="999999"/>
               </a:buClr>
               <a:buSzPts val="900"/>
-              <a:buFont typeface="Inter"/>
-              <a:buChar char="●"/>
+              <a:buNone/>
             </a:pPr>
             <a:r>
               <a:rPr lang="fr-FR" sz="900" dirty="0"/>
@@ -10645,13 +10625,12 @@
             </a:r>
           </a:p>
           <a:p>
-            <a:pPr marR="152400" lvl="0" indent="-285750">
+            <a:pPr marL="171450" marR="152400" lvl="0" indent="0">
               <a:buClr>
                 <a:srgbClr val="999999"/>
               </a:buClr>
               <a:buSzPts val="900"/>
-              <a:buFont typeface="Inter"/>
-              <a:buChar char="●"/>
+              <a:buNone/>
             </a:pPr>
             <a:r>
               <a:rPr lang="fr-FR" sz="900" dirty="0" err="1"/>
@@ -10663,13 +10642,12 @@
             </a:r>
           </a:p>
           <a:p>
-            <a:pPr marR="152400" lvl="0" indent="-285750">
+            <a:pPr marL="171450" marR="152400" lvl="0" indent="0">
               <a:buClr>
                 <a:srgbClr val="999999"/>
               </a:buClr>
               <a:buSzPts val="900"/>
-              <a:buFont typeface="Inter"/>
-              <a:buChar char="●"/>
+              <a:buNone/>
             </a:pPr>
             <a:r>
               <a:rPr lang="fr-FR" sz="900" dirty="0"/>
@@ -10709,13 +10687,12 @@
             </a:r>
           </a:p>
           <a:p>
-            <a:pPr marR="152400" lvl="0" indent="-285750">
+            <a:pPr marL="171450" marR="152400" lvl="0" indent="0">
               <a:buClr>
                 <a:srgbClr val="999999"/>
               </a:buClr>
               <a:buSzPts val="900"/>
-              <a:buFont typeface="Inter"/>
-              <a:buChar char="●"/>
+              <a:buNone/>
             </a:pPr>
             <a:r>
               <a:rPr lang="fr-FR" sz="900" dirty="0" err="1"/>
@@ -10727,13 +10704,12 @@
             </a:r>
           </a:p>
           <a:p>
-            <a:pPr marR="152400" lvl="0" indent="-285750">
+            <a:pPr marL="171450" marR="152400" lvl="0" indent="0">
               <a:buClr>
                 <a:srgbClr val="999999"/>
               </a:buClr>
               <a:buSzPts val="900"/>
-              <a:buFont typeface="Inter"/>
-              <a:buChar char="●"/>
+              <a:buNone/>
             </a:pPr>
             <a:r>
               <a:rPr lang="fr-FR" sz="900" dirty="0"/>
@@ -10754,13 +10730,12 @@
             <a:endParaRPr lang="fr-FR" sz="900" dirty="0"/>
           </a:p>
           <a:p>
-            <a:pPr marR="152400" lvl="0" indent="-285750">
+            <a:pPr marL="171450" marR="152400" lvl="0" indent="0">
               <a:buClr>
                 <a:srgbClr val="999999"/>
               </a:buClr>
               <a:buSzPts val="900"/>
-              <a:buFont typeface="Inter"/>
-              <a:buChar char="●"/>
+              <a:buNone/>
             </a:pPr>
             <a:r>
               <a:rPr lang="fr-FR" sz="900" dirty="0"/>
@@ -10776,13 +10751,12 @@
             </a:r>
           </a:p>
           <a:p>
-            <a:pPr marR="152400" lvl="0" indent="-285750">
+            <a:pPr marL="171450" marR="152400" lvl="0" indent="0">
               <a:buClr>
                 <a:srgbClr val="999999"/>
               </a:buClr>
               <a:buSzPts val="900"/>
-              <a:buFont typeface="Inter"/>
-              <a:buChar char="●"/>
+              <a:buNone/>
             </a:pPr>
             <a:r>
               <a:rPr lang="fr-FR" sz="900" dirty="0"/>
@@ -10811,13 +10785,12 @@
             <a:endParaRPr lang="fr-FR" sz="900" dirty="0"/>
           </a:p>
           <a:p>
-            <a:pPr marR="152400" lvl="0" indent="-285750">
+            <a:pPr marL="171450" marR="152400" lvl="0" indent="0">
               <a:buClr>
                 <a:srgbClr val="999999"/>
               </a:buClr>
               <a:buSzPts val="900"/>
-              <a:buFont typeface="Inter"/>
-              <a:buChar char="●"/>
+              <a:buNone/>
             </a:pPr>
             <a:r>
               <a:rPr lang="fr-FR" sz="900" dirty="0"/>
@@ -10846,13 +10819,12 @@
             <a:endParaRPr lang="fr-FR" sz="900" dirty="0"/>
           </a:p>
           <a:p>
-            <a:pPr marR="152400" lvl="0" indent="-285750">
+            <a:pPr marL="171450" marR="152400" lvl="0" indent="0">
               <a:buClr>
                 <a:srgbClr val="999999"/>
               </a:buClr>
               <a:buSzPts val="900"/>
-              <a:buFont typeface="Inter"/>
-              <a:buChar char="●"/>
+              <a:buNone/>
             </a:pPr>
             <a:r>
               <a:rPr lang="fr-FR" sz="900" dirty="0"/>
@@ -10873,13 +10845,12 @@
             <a:endParaRPr lang="fr-FR" sz="900" dirty="0"/>
           </a:p>
           <a:p>
-            <a:pPr marR="152400" lvl="0" indent="-285750">
+            <a:pPr marL="171450" marR="152400" lvl="0" indent="0">
               <a:buClr>
                 <a:srgbClr val="999999"/>
               </a:buClr>
               <a:buSzPts val="900"/>
-              <a:buFont typeface="Inter"/>
-              <a:buChar char="●"/>
+              <a:buNone/>
             </a:pPr>
             <a:r>
               <a:rPr lang="fr-FR" sz="900" dirty="0"/>
@@ -10895,13 +10866,12 @@
             </a:r>
           </a:p>
           <a:p>
-            <a:pPr marR="152400" lvl="0" indent="-285750">
+            <a:pPr marL="171450" marR="152400" lvl="0" indent="0">
               <a:buClr>
                 <a:srgbClr val="999999"/>
               </a:buClr>
               <a:buSzPts val="900"/>
-              <a:buFont typeface="Inter"/>
-              <a:buChar char="●"/>
+              <a:buNone/>
             </a:pPr>
             <a:r>
               <a:rPr lang="fr-FR" sz="900" dirty="0"/>
@@ -11364,7 +11334,7 @@
         </p:spPr>
         <p:txBody>
           <a:bodyPr spcFirstLastPara="1" wrap="square" lIns="91425" tIns="91425" rIns="91425" bIns="91425" anchor="t" anchorCtr="0">
-            <a:normAutofit fontScale="85000" lnSpcReduction="10000"/>
+            <a:normAutofit lnSpcReduction="10000"/>
           </a:bodyPr>
           <a:lstStyle/>
           <a:p>
@@ -11376,19 +11346,11 @@
             </a:pPr>
             <a:r>
               <a:rPr lang="fr-FR" dirty="0"/>
-              <a:t>L’analyse des ventes et des logs montre que l’instabilité du chiffre d’affaires vient du fait que certaines ventes associées au 14 août 2024 ont été insérées dans les logs le 15 août 2024. La variation du chiffre d’affaires est donc liée à un problème de délai d’intégration ou de synchronisation </a:t>
-            </a:r>
-            <a:r>
-              <a:rPr lang="fr-FR"/>
-              <a:t>des données.</a:t>
-            </a:r>
-            <a:endParaRPr lang="fr-FR" dirty="0"/>
-          </a:p>
-          <a:p>
-            <a:pPr marL="0" lvl="0" indent="0" algn="l" rtl="0">
-              <a:spcBef>
-                <a:spcPts val="0"/>
-              </a:spcBef>
+              <a:t>L’analyse des logs montre que certaines ventes rattachées à la date commerciale du 14 août 2024 ont été insérées en base de données le 15 août 2024. Cela suggère un retard d’intégration entre la base source et le cube OLAP. La variation du chiffre d’affaires est donc probablement liée à un problème de délai d’intégration ou de synchronisation des données</a:t>
+            </a:r>
+          </a:p>
+          <a:p>
+            <a:pPr marL="0" lvl="0" indent="0">
               <a:spcAft>
                 <a:spcPts val="1200"/>
               </a:spcAft>
@@ -11396,22 +11358,7 @@
             </a:pPr>
             <a:r>
               <a:rPr lang="fr-FR" dirty="0"/>
-              <a:t>L’analyse des logs montre que les ventes ajoutées le 15 août représentent un montant total de 9 057,29€, soit exactement l’écart entre les deux chiffres d’affaires observés. Ce qui montre qu’il n’y a pas de distinction entre la date des ventes et la date d’insertion des ventes pour Power BI.</a:t>
-            </a:r>
-          </a:p>
-          <a:p>
-            <a:pPr marL="0" lvl="0" indent="0" algn="l" rtl="0">
-              <a:spcBef>
-                <a:spcPts val="0"/>
-              </a:spcBef>
-              <a:spcAft>
-                <a:spcPts val="1200"/>
-              </a:spcAft>
-              <a:buNone/>
-            </a:pPr>
-            <a:r>
-              <a:rPr lang="fr-FR" dirty="0"/>
-              <a:t>L’analyse des logs montre qu’il n’y a pas de distinction entre le chiffre d’affaires provisoire et le chiffre d’affaires final.</a:t>
+              <a:t>L’analyse des logs montre que les ventes ajoutées le 15 août représentent un montant total de 9 057,29€, soit exactement l’écart entre les deux chiffres d’affaires observés.</a:t>
             </a:r>
           </a:p>
           <a:p>
@@ -11562,14 +11509,14 @@
         </p:spPr>
         <p:txBody>
           <a:bodyPr spcFirstLastPara="1" wrap="square" lIns="91425" tIns="91425" rIns="91425" bIns="91425" anchor="t" anchorCtr="0">
-            <a:normAutofit fontScale="92500" lnSpcReduction="20000"/>
+            <a:normAutofit/>
           </a:bodyPr>
           <a:lstStyle/>
           <a:p>
             <a:pPr lvl="0"/>
             <a:r>
               <a:rPr lang="fr-FR" dirty="0"/>
-              <a:t>Mettre en place un contrôle quotidien pour comparer les ventes attendues, les ventes chargées et les ventes disponibles dans le cube OLAP,</a:t>
+              <a:t>Mettre en place une réconciliation entre la source SQL Server et le cube OLAP afin de détecter automatiquement les écarts de chiffre d’affaires,</a:t>
             </a:r>
           </a:p>
           <a:p>
@@ -11580,7 +11527,7 @@
             <a:pPr lvl="0"/>
             <a:r>
               <a:rPr lang="fr-FR" dirty="0"/>
-              <a:t>Tracer les dates d’insertion et de mise à jour afin de distinguer la date d’achat réelle de la date d’intégration dans la base de données,</a:t>
+              <a:t>Mettre en place une supervision de la base de données,</a:t>
             </a:r>
           </a:p>
           <a:p>
@@ -11591,7 +11538,7 @@
             <a:pPr lvl="0"/>
             <a:r>
               <a:rPr lang="fr-FR" dirty="0"/>
-              <a:t>Mettre en place une supervision de la base de données,</a:t>
+              <a:t>Renforcer la gouvernance des données sensibles en supprimant les informations personnelles non nécessaires pour l’analyse,</a:t>
             </a:r>
           </a:p>
           <a:p>
@@ -11602,7 +11549,7 @@
             <a:pPr lvl="0"/>
             <a:r>
               <a:rPr lang="fr-FR" dirty="0"/>
-              <a:t>Renforcer la gouvernance des données sensibles en supprimant les informations personnelles non nécessaires pour l’analyse,</a:t>
+              <a:t>Documenter le modèle de données, le dictionnaire de données et les règles de calcul des indicateurs clés,</a:t>
             </a:r>
           </a:p>
           <a:p>
@@ -11613,29 +11560,7 @@
             <a:pPr lvl="0"/>
             <a:r>
               <a:rPr lang="fr-FR" dirty="0"/>
-              <a:t>Documenter le modèle de données, le dictionnaire de données et les règles de calcul des indicateurs clés,</a:t>
-            </a:r>
-          </a:p>
-          <a:p>
-            <a:pPr lvl="0"/>
-            <a:endParaRPr lang="fr-FR" dirty="0"/>
-          </a:p>
-          <a:p>
-            <a:pPr lvl="0"/>
-            <a:r>
-              <a:rPr lang="fr-FR" dirty="0"/>
-              <a:t>Améliorer le typage et la qualité des données,</a:t>
-            </a:r>
-          </a:p>
-          <a:p>
-            <a:pPr lvl="0"/>
-            <a:endParaRPr lang="fr-FR" dirty="0"/>
-          </a:p>
-          <a:p>
-            <a:pPr lvl="0"/>
-            <a:r>
-              <a:rPr lang="fr-FR" dirty="0"/>
-              <a:t>Automatiser le remplissage de tables de logs.</a:t>
+              <a:t>Améliorer le nommage, le typage et la qualité des données.</a:t>
             </a:r>
           </a:p>
           <a:p>
@@ -11755,14 +11680,14 @@
           <p:nvPr>
             <p:extLst>
               <p:ext uri="{D42A27DB-BD31-4B8C-83A1-F6EECF244321}">
-                <p14:modId xmlns:p14="http://schemas.microsoft.com/office/powerpoint/2010/main" val="565486964"/>
+                <p14:modId xmlns:p14="http://schemas.microsoft.com/office/powerpoint/2010/main" val="580000828"/>
               </p:ext>
             </p:extLst>
           </p:nvPr>
         </p:nvGraphicFramePr>
         <p:xfrm>
-          <a:off x="975535" y="1347043"/>
-          <a:ext cx="7515658" cy="3402707"/>
+          <a:off x="1059121" y="1791675"/>
+          <a:ext cx="7515658" cy="2462949"/>
         </p:xfrm>
         <a:graphic>
           <a:graphicData uri="http://schemas.openxmlformats.org/drawingml/2006/table">
@@ -12788,457 +12713,6 @@
                   </a:ext>
                 </a:extLst>
               </a:tr>
-              <a:tr h="466928">
-                <a:tc>
-                  <a:txBody>
-                    <a:bodyPr/>
-                    <a:lstStyle/>
-                    <a:p>
-                      <a:pPr algn="ctr">
-                        <a:lnSpc>
-                          <a:spcPct val="107000"/>
-                        </a:lnSpc>
-                        <a:spcBef>
-                          <a:spcPts val="800"/>
-                        </a:spcBef>
-                        <a:buNone/>
-                      </a:pPr>
-                      <a:r>
-                        <a:rPr lang="fr-FR" sz="900" b="1">
-                          <a:solidFill>
-                            <a:srgbClr val="000000"/>
-                          </a:solidFill>
-                          <a:effectLst/>
-                          <a:latin typeface="Arial" panose="020B0604020202020204" pitchFamily="34" charset="0"/>
-                          <a:ea typeface="Times New Roman" panose="02020603050405020304" pitchFamily="18" charset="0"/>
-                        </a:rPr>
-                        <a:t>VUL-002</a:t>
-                      </a:r>
-                      <a:endParaRPr lang="fr-FR" sz="1000">
-                        <a:effectLst/>
-                        <a:latin typeface="Segoe UI" panose="020B0502040204020203" pitchFamily="34" charset="0"/>
-                        <a:ea typeface="Quattrocento Sans" panose="020B0502050000020003" pitchFamily="34" charset="0"/>
-                      </a:endParaRPr>
-                    </a:p>
-                  </a:txBody>
-                  <a:tcPr marL="41269" marR="41269" marT="0" marB="0" anchor="ctr">
-                    <a:lnL w="12700" cap="flat" cmpd="sng" algn="ctr">
-                      <a:solidFill>
-                        <a:srgbClr val="BDD7EE"/>
-                      </a:solidFill>
-                      <a:prstDash val="solid"/>
-                      <a:round/>
-                      <a:headEnd type="none" w="med" len="med"/>
-                      <a:tailEnd type="none" w="med" len="med"/>
-                    </a:lnL>
-                    <a:lnR w="12700" cap="flat" cmpd="sng" algn="ctr">
-                      <a:solidFill>
-                        <a:srgbClr val="BDD7EE"/>
-                      </a:solidFill>
-                      <a:prstDash val="solid"/>
-                      <a:round/>
-                      <a:headEnd type="none" w="med" len="med"/>
-                      <a:tailEnd type="none" w="med" len="med"/>
-                    </a:lnR>
-                    <a:lnT w="12700" cap="flat" cmpd="sng" algn="ctr">
-                      <a:solidFill>
-                        <a:srgbClr val="BDD7EE"/>
-                      </a:solidFill>
-                      <a:prstDash val="solid"/>
-                      <a:round/>
-                      <a:headEnd type="none" w="med" len="med"/>
-                      <a:tailEnd type="none" w="med" len="med"/>
-                    </a:lnT>
-                    <a:lnB w="12700" cap="flat" cmpd="sng" algn="ctr">
-                      <a:solidFill>
-                        <a:srgbClr val="BDD7EE"/>
-                      </a:solidFill>
-                      <a:prstDash val="solid"/>
-                      <a:round/>
-                      <a:headEnd type="none" w="med" len="med"/>
-                      <a:tailEnd type="none" w="med" len="med"/>
-                    </a:lnB>
-                    <a:solidFill>
-                      <a:srgbClr val="FFFFFF"/>
-                    </a:solidFill>
-                  </a:tcPr>
-                </a:tc>
-                <a:tc>
-                  <a:txBody>
-                    <a:bodyPr/>
-                    <a:lstStyle/>
-                    <a:p>
-                      <a:pPr>
-                        <a:lnSpc>
-                          <a:spcPct val="107000"/>
-                        </a:lnSpc>
-                        <a:spcBef>
-                          <a:spcPts val="800"/>
-                        </a:spcBef>
-                        <a:buNone/>
-                      </a:pPr>
-                      <a:r>
-                        <a:rPr lang="fr-FR" sz="900">
-                          <a:solidFill>
-                            <a:srgbClr val="000000"/>
-                          </a:solidFill>
-                          <a:effectLst/>
-                          <a:latin typeface="Arial" panose="020B0604020202020204" pitchFamily="34" charset="0"/>
-                          <a:ea typeface="Times New Roman" panose="02020603050405020304" pitchFamily="18" charset="0"/>
-                        </a:rPr>
-                        <a:t>Insertions tardives des ventes</a:t>
-                      </a:r>
-                      <a:endParaRPr lang="fr-FR" sz="1000">
-                        <a:effectLst/>
-                        <a:latin typeface="Segoe UI" panose="020B0502040204020203" pitchFamily="34" charset="0"/>
-                        <a:ea typeface="Quattrocento Sans" panose="020B0502050000020003" pitchFamily="34" charset="0"/>
-                      </a:endParaRPr>
-                    </a:p>
-                  </a:txBody>
-                  <a:tcPr marL="41269" marR="41269" marT="0" marB="0" anchor="ctr">
-                    <a:lnL w="12700" cap="flat" cmpd="sng" algn="ctr">
-                      <a:solidFill>
-                        <a:srgbClr val="BDD7EE"/>
-                      </a:solidFill>
-                      <a:prstDash val="solid"/>
-                      <a:round/>
-                      <a:headEnd type="none" w="med" len="med"/>
-                      <a:tailEnd type="none" w="med" len="med"/>
-                    </a:lnL>
-                    <a:lnR w="12700" cap="flat" cmpd="sng" algn="ctr">
-                      <a:solidFill>
-                        <a:srgbClr val="BDD7EE"/>
-                      </a:solidFill>
-                      <a:prstDash val="solid"/>
-                      <a:round/>
-                      <a:headEnd type="none" w="med" len="med"/>
-                      <a:tailEnd type="none" w="med" len="med"/>
-                    </a:lnR>
-                    <a:lnT w="12700" cap="flat" cmpd="sng" algn="ctr">
-                      <a:solidFill>
-                        <a:srgbClr val="BDD7EE"/>
-                      </a:solidFill>
-                      <a:prstDash val="solid"/>
-                      <a:round/>
-                      <a:headEnd type="none" w="med" len="med"/>
-                      <a:tailEnd type="none" w="med" len="med"/>
-                    </a:lnT>
-                    <a:lnB w="12700" cap="flat" cmpd="sng" algn="ctr">
-                      <a:solidFill>
-                        <a:srgbClr val="BDD7EE"/>
-                      </a:solidFill>
-                      <a:prstDash val="solid"/>
-                      <a:round/>
-                      <a:headEnd type="none" w="med" len="med"/>
-                      <a:tailEnd type="none" w="med" len="med"/>
-                    </a:lnB>
-                    <a:solidFill>
-                      <a:srgbClr val="FFFFFF"/>
-                    </a:solidFill>
-                  </a:tcPr>
-                </a:tc>
-                <a:tc>
-                  <a:txBody>
-                    <a:bodyPr/>
-                    <a:lstStyle/>
-                    <a:p>
-                      <a:pPr>
-                        <a:lnSpc>
-                          <a:spcPct val="107000"/>
-                        </a:lnSpc>
-                        <a:spcBef>
-                          <a:spcPts val="800"/>
-                        </a:spcBef>
-                        <a:buNone/>
-                      </a:pPr>
-                      <a:r>
-                        <a:rPr lang="fr-FR" sz="900" dirty="0">
-                          <a:solidFill>
-                            <a:srgbClr val="000000"/>
-                          </a:solidFill>
-                          <a:effectLst/>
-                          <a:latin typeface="Arial" panose="020B0604020202020204" pitchFamily="34" charset="0"/>
-                          <a:ea typeface="Times New Roman" panose="02020603050405020304" pitchFamily="18" charset="0"/>
-                        </a:rPr>
-                        <a:t>Données incomplètes dans Power BI</a:t>
-                      </a:r>
-                      <a:endParaRPr lang="fr-FR" sz="1000" dirty="0">
-                        <a:effectLst/>
-                        <a:latin typeface="Segoe UI" panose="020B0502040204020203" pitchFamily="34" charset="0"/>
-                        <a:ea typeface="Quattrocento Sans" panose="020B0502050000020003" pitchFamily="34" charset="0"/>
-                      </a:endParaRPr>
-                    </a:p>
-                  </a:txBody>
-                  <a:tcPr marL="41269" marR="41269" marT="0" marB="0" anchor="ctr">
-                    <a:lnL w="12700" cap="flat" cmpd="sng" algn="ctr">
-                      <a:solidFill>
-                        <a:srgbClr val="BDD7EE"/>
-                      </a:solidFill>
-                      <a:prstDash val="solid"/>
-                      <a:round/>
-                      <a:headEnd type="none" w="med" len="med"/>
-                      <a:tailEnd type="none" w="med" len="med"/>
-                    </a:lnL>
-                    <a:lnR w="12700" cap="flat" cmpd="sng" algn="ctr">
-                      <a:solidFill>
-                        <a:srgbClr val="BDD7EE"/>
-                      </a:solidFill>
-                      <a:prstDash val="solid"/>
-                      <a:round/>
-                      <a:headEnd type="none" w="med" len="med"/>
-                      <a:tailEnd type="none" w="med" len="med"/>
-                    </a:lnR>
-                    <a:lnT w="12700" cap="flat" cmpd="sng" algn="ctr">
-                      <a:solidFill>
-                        <a:srgbClr val="BDD7EE"/>
-                      </a:solidFill>
-                      <a:prstDash val="solid"/>
-                      <a:round/>
-                      <a:headEnd type="none" w="med" len="med"/>
-                      <a:tailEnd type="none" w="med" len="med"/>
-                    </a:lnT>
-                    <a:lnB w="12700" cap="flat" cmpd="sng" algn="ctr">
-                      <a:solidFill>
-                        <a:srgbClr val="BDD7EE"/>
-                      </a:solidFill>
-                      <a:prstDash val="solid"/>
-                      <a:round/>
-                      <a:headEnd type="none" w="med" len="med"/>
-                      <a:tailEnd type="none" w="med" len="med"/>
-                    </a:lnB>
-                    <a:solidFill>
-                      <a:srgbClr val="FFFFFF"/>
-                    </a:solidFill>
-                  </a:tcPr>
-                </a:tc>
-                <a:tc>
-                  <a:txBody>
-                    <a:bodyPr/>
-                    <a:lstStyle/>
-                    <a:p>
-                      <a:pPr algn="ctr">
-                        <a:lnSpc>
-                          <a:spcPct val="107000"/>
-                        </a:lnSpc>
-                        <a:spcBef>
-                          <a:spcPts val="800"/>
-                        </a:spcBef>
-                        <a:buNone/>
-                      </a:pPr>
-                      <a:r>
-                        <a:rPr lang="fr-FR" sz="900">
-                          <a:solidFill>
-                            <a:srgbClr val="000000"/>
-                          </a:solidFill>
-                          <a:effectLst/>
-                          <a:latin typeface="Arial" panose="020B0604020202020204" pitchFamily="34" charset="0"/>
-                          <a:ea typeface="Times New Roman" panose="02020603050405020304" pitchFamily="18" charset="0"/>
-                        </a:rPr>
-                        <a:t>Élevée</a:t>
-                      </a:r>
-                      <a:endParaRPr lang="fr-FR" sz="1000">
-                        <a:effectLst/>
-                        <a:latin typeface="Segoe UI" panose="020B0502040204020203" pitchFamily="34" charset="0"/>
-                        <a:ea typeface="Quattrocento Sans" panose="020B0502050000020003" pitchFamily="34" charset="0"/>
-                      </a:endParaRPr>
-                    </a:p>
-                  </a:txBody>
-                  <a:tcPr marL="41269" marR="41269" marT="0" marB="0" anchor="ctr">
-                    <a:lnL w="12700" cap="flat" cmpd="sng" algn="ctr">
-                      <a:solidFill>
-                        <a:srgbClr val="BDD7EE"/>
-                      </a:solidFill>
-                      <a:prstDash val="solid"/>
-                      <a:round/>
-                      <a:headEnd type="none" w="med" len="med"/>
-                      <a:tailEnd type="none" w="med" len="med"/>
-                    </a:lnL>
-                    <a:lnR w="12700" cap="flat" cmpd="sng" algn="ctr">
-                      <a:solidFill>
-                        <a:srgbClr val="BDD7EE"/>
-                      </a:solidFill>
-                      <a:prstDash val="solid"/>
-                      <a:round/>
-                      <a:headEnd type="none" w="med" len="med"/>
-                      <a:tailEnd type="none" w="med" len="med"/>
-                    </a:lnR>
-                    <a:lnT w="12700" cap="flat" cmpd="sng" algn="ctr">
-                      <a:solidFill>
-                        <a:srgbClr val="BDD7EE"/>
-                      </a:solidFill>
-                      <a:prstDash val="solid"/>
-                      <a:round/>
-                      <a:headEnd type="none" w="med" len="med"/>
-                      <a:tailEnd type="none" w="med" len="med"/>
-                    </a:lnT>
-                    <a:lnB w="12700" cap="flat" cmpd="sng" algn="ctr">
-                      <a:solidFill>
-                        <a:srgbClr val="BDD7EE"/>
-                      </a:solidFill>
-                      <a:prstDash val="solid"/>
-                      <a:round/>
-                      <a:headEnd type="none" w="med" len="med"/>
-                      <a:tailEnd type="none" w="med" len="med"/>
-                    </a:lnB>
-                    <a:solidFill>
-                      <a:srgbClr val="FFFFFF"/>
-                    </a:solidFill>
-                  </a:tcPr>
-                </a:tc>
-                <a:tc>
-                  <a:txBody>
-                    <a:bodyPr/>
-                    <a:lstStyle/>
-                    <a:p>
-                      <a:pPr algn="ctr">
-                        <a:lnSpc>
-                          <a:spcPct val="107000"/>
-                        </a:lnSpc>
-                        <a:spcBef>
-                          <a:spcPts val="800"/>
-                        </a:spcBef>
-                        <a:buNone/>
-                      </a:pPr>
-                      <a:r>
-                        <a:rPr lang="fr-FR" sz="900">
-                          <a:solidFill>
-                            <a:srgbClr val="000000"/>
-                          </a:solidFill>
-                          <a:effectLst/>
-                          <a:latin typeface="Arial" panose="020B0604020202020204" pitchFamily="34" charset="0"/>
-                          <a:ea typeface="Times New Roman" panose="02020603050405020304" pitchFamily="18" charset="0"/>
-                        </a:rPr>
-                        <a:t>Élevé</a:t>
-                      </a:r>
-                      <a:endParaRPr lang="fr-FR" sz="1000">
-                        <a:effectLst/>
-                        <a:latin typeface="Segoe UI" panose="020B0502040204020203" pitchFamily="34" charset="0"/>
-                        <a:ea typeface="Quattrocento Sans" panose="020B0502050000020003" pitchFamily="34" charset="0"/>
-                      </a:endParaRPr>
-                    </a:p>
-                  </a:txBody>
-                  <a:tcPr marL="41269" marR="41269" marT="0" marB="0" anchor="ctr">
-                    <a:lnL w="12700" cap="flat" cmpd="sng" algn="ctr">
-                      <a:solidFill>
-                        <a:srgbClr val="BDD7EE"/>
-                      </a:solidFill>
-                      <a:prstDash val="solid"/>
-                      <a:round/>
-                      <a:headEnd type="none" w="med" len="med"/>
-                      <a:tailEnd type="none" w="med" len="med"/>
-                    </a:lnL>
-                    <a:lnR w="12700" cap="flat" cmpd="sng" algn="ctr">
-                      <a:solidFill>
-                        <a:srgbClr val="BDD7EE"/>
-                      </a:solidFill>
-                      <a:prstDash val="solid"/>
-                      <a:round/>
-                      <a:headEnd type="none" w="med" len="med"/>
-                      <a:tailEnd type="none" w="med" len="med"/>
-                    </a:lnR>
-                    <a:lnT w="12700" cap="flat" cmpd="sng" algn="ctr">
-                      <a:solidFill>
-                        <a:srgbClr val="BDD7EE"/>
-                      </a:solidFill>
-                      <a:prstDash val="solid"/>
-                      <a:round/>
-                      <a:headEnd type="none" w="med" len="med"/>
-                      <a:tailEnd type="none" w="med" len="med"/>
-                    </a:lnT>
-                    <a:lnB w="12700" cap="flat" cmpd="sng" algn="ctr">
-                      <a:solidFill>
-                        <a:srgbClr val="BDD7EE"/>
-                      </a:solidFill>
-                      <a:prstDash val="solid"/>
-                      <a:round/>
-                      <a:headEnd type="none" w="med" len="med"/>
-                      <a:tailEnd type="none" w="med" len="med"/>
-                    </a:lnB>
-                    <a:solidFill>
-                      <a:srgbClr val="FFFFFF"/>
-                    </a:solidFill>
-                  </a:tcPr>
-                </a:tc>
-                <a:tc>
-                  <a:txBody>
-                    <a:bodyPr/>
-                    <a:lstStyle/>
-                    <a:p>
-                      <a:pPr algn="ctr">
-                        <a:lnSpc>
-                          <a:spcPct val="107000"/>
-                        </a:lnSpc>
-                        <a:spcBef>
-                          <a:spcPts val="800"/>
-                        </a:spcBef>
-                        <a:buNone/>
-                      </a:pPr>
-                      <a:r>
-                        <a:rPr lang="fr-FR" sz="900" b="1">
-                          <a:solidFill>
-                            <a:srgbClr val="FFFFFF"/>
-                          </a:solidFill>
-                          <a:effectLst/>
-                          <a:latin typeface="Arial" panose="020B0604020202020204" pitchFamily="34" charset="0"/>
-                          <a:ea typeface="Times New Roman" panose="02020603050405020304" pitchFamily="18" charset="0"/>
-                        </a:rPr>
-                        <a:t>CRITIQUE</a:t>
-                      </a:r>
-                      <a:endParaRPr lang="fr-FR" sz="1000">
-                        <a:effectLst/>
-                        <a:latin typeface="Segoe UI" panose="020B0502040204020203" pitchFamily="34" charset="0"/>
-                        <a:ea typeface="Quattrocento Sans" panose="020B0502050000020003" pitchFamily="34" charset="0"/>
-                      </a:endParaRPr>
-                    </a:p>
-                  </a:txBody>
-                  <a:tcPr marL="41269" marR="41269" marT="0" marB="0" anchor="ctr">
-                    <a:lnL w="12700" cap="flat" cmpd="sng" algn="ctr">
-                      <a:solidFill>
-                        <a:srgbClr val="BDD7EE"/>
-                      </a:solidFill>
-                      <a:prstDash val="solid"/>
-                      <a:round/>
-                      <a:headEnd type="none" w="med" len="med"/>
-                      <a:tailEnd type="none" w="med" len="med"/>
-                    </a:lnL>
-                    <a:lnR w="12700" cap="flat" cmpd="sng" algn="ctr">
-                      <a:solidFill>
-                        <a:srgbClr val="BDD7EE"/>
-                      </a:solidFill>
-                      <a:prstDash val="solid"/>
-                      <a:round/>
-                      <a:headEnd type="none" w="med" len="med"/>
-                      <a:tailEnd type="none" w="med" len="med"/>
-                    </a:lnR>
-                    <a:lnT w="12700" cap="flat" cmpd="sng" algn="ctr">
-                      <a:solidFill>
-                        <a:srgbClr val="BDD7EE"/>
-                      </a:solidFill>
-                      <a:prstDash val="solid"/>
-                      <a:round/>
-                      <a:headEnd type="none" w="med" len="med"/>
-                      <a:tailEnd type="none" w="med" len="med"/>
-                    </a:lnT>
-                    <a:lnB w="12700" cap="flat" cmpd="sng" algn="ctr">
-                      <a:solidFill>
-                        <a:srgbClr val="BDD7EE"/>
-                      </a:solidFill>
-                      <a:prstDash val="solid"/>
-                      <a:round/>
-                      <a:headEnd type="none" w="med" len="med"/>
-                      <a:tailEnd type="none" w="med" len="med"/>
-                    </a:lnB>
-                    <a:solidFill>
-                      <a:srgbClr val="C00000"/>
-                    </a:solidFill>
-                  </a:tcPr>
-                </a:tc>
-                <a:extLst>
-                  <a:ext uri="{0D108BD9-81ED-4DB2-BD59-A6C34878D82A}">
-                    <a16:rowId xmlns:a16="http://schemas.microsoft.com/office/drawing/2014/main" val="2803650548"/>
-                  </a:ext>
-                </a:extLst>
-              </a:tr>
               <a:tr h="311285">
                 <a:tc>
                   <a:txBody>
@@ -13255,7 +12729,7 @@
                         <a:buNone/>
                       </a:pPr>
                       <a:r>
-                        <a:rPr lang="fr-FR" sz="900" b="1">
+                        <a:rPr lang="fr-FR" sz="900" b="1" dirty="0">
                           <a:solidFill>
                             <a:srgbClr val="000000"/>
                           </a:solidFill>
@@ -13263,9 +12737,9 @@
                           <a:latin typeface="Arial" panose="020B0604020202020204" pitchFamily="34" charset="0"/>
                           <a:ea typeface="Times New Roman" panose="02020603050405020304" pitchFamily="18" charset="0"/>
                         </a:rPr>
-                        <a:t>VUL-003</a:t>
+                        <a:t>VUL-002</a:t>
                       </a:r>
-                      <a:endParaRPr lang="fr-FR" sz="1000">
+                      <a:endParaRPr lang="fr-FR" sz="1000" dirty="0">
                         <a:effectLst/>
                         <a:latin typeface="Segoe UI" panose="020B0502040204020203" pitchFamily="34" charset="0"/>
                         <a:ea typeface="Quattrocento Sans" panose="020B0502050000020003" pitchFamily="34" charset="0"/>
@@ -13625,7 +13099,7 @@
                         <a:buNone/>
                       </a:pPr>
                       <a:r>
-                        <a:rPr lang="fr-FR" sz="900" b="1">
+                        <a:rPr lang="fr-FR" sz="900" b="1" dirty="0">
                           <a:solidFill>
                             <a:srgbClr val="FFFFFF"/>
                           </a:solidFill>
@@ -13635,7 +13109,7 @@
                         </a:rPr>
                         <a:t>CRITIQUE</a:t>
                       </a:r>
-                      <a:endParaRPr lang="fr-FR" sz="1000">
+                      <a:endParaRPr lang="fr-FR" sz="1000" dirty="0">
                         <a:effectLst/>
                         <a:latin typeface="Segoe UI" panose="020B0502040204020203" pitchFamily="34" charset="0"/>
                         <a:ea typeface="Quattrocento Sans" panose="020B0502050000020003" pitchFamily="34" charset="0"/>
@@ -13706,7 +13180,7 @@
                         <a:buNone/>
                       </a:pPr>
                       <a:r>
-                        <a:rPr lang="fr-FR" sz="900" b="1">
+                        <a:rPr lang="fr-FR" sz="900" b="1" dirty="0">
                           <a:solidFill>
                             <a:srgbClr val="000000"/>
                           </a:solidFill>
@@ -13714,9 +13188,9 @@
                           <a:latin typeface="Arial" panose="020B0604020202020204" pitchFamily="34" charset="0"/>
                           <a:ea typeface="Times New Roman" panose="02020603050405020304" pitchFamily="18" charset="0"/>
                         </a:rPr>
-                        <a:t>VUL-004</a:t>
+                        <a:t>VUL-003</a:t>
                       </a:r>
-                      <a:endParaRPr lang="fr-FR" sz="1000">
+                      <a:endParaRPr lang="fr-FR" sz="1000" dirty="0">
                         <a:effectLst/>
                         <a:latin typeface="Segoe UI" panose="020B0502040204020203" pitchFamily="34" charset="0"/>
                         <a:ea typeface="Quattrocento Sans" panose="020B0502050000020003" pitchFamily="34" charset="0"/>
@@ -14141,7 +13615,7 @@
                   </a:ext>
                 </a:extLst>
               </a:tr>
-              <a:tr h="933856">
+              <a:tr h="461026">
                 <a:tc>
                   <a:txBody>
                     <a:bodyPr/>
@@ -14157,7 +13631,7 @@
                         <a:buNone/>
                       </a:pPr>
                       <a:r>
-                        <a:rPr lang="fr-FR" sz="900" b="1">
+                        <a:rPr lang="fr-FR" sz="900" b="1" dirty="0">
                           <a:solidFill>
                             <a:srgbClr val="000000"/>
                           </a:solidFill>
@@ -14165,9 +13639,9 @@
                           <a:latin typeface="Arial" panose="020B0604020202020204" pitchFamily="34" charset="0"/>
                           <a:ea typeface="Times New Roman" panose="02020603050405020304" pitchFamily="18" charset="0"/>
                         </a:rPr>
-                        <a:t>VUL-005</a:t>
+                        <a:t>VUL-004</a:t>
                       </a:r>
-                      <a:endParaRPr lang="fr-FR" sz="1000">
+                      <a:endParaRPr lang="fr-FR" sz="1000" dirty="0">
                         <a:effectLst/>
                         <a:latin typeface="Segoe UI" panose="020B0502040204020203" pitchFamily="34" charset="0"/>
                         <a:ea typeface="Quattrocento Sans" panose="020B0502050000020003" pitchFamily="34" charset="0"/>
@@ -14608,7 +14082,7 @@
                         <a:buNone/>
                       </a:pPr>
                       <a:r>
-                        <a:rPr lang="fr-FR" sz="900" b="1">
+                        <a:rPr lang="fr-FR" sz="900" b="1" dirty="0">
                           <a:solidFill>
                             <a:srgbClr val="000000"/>
                           </a:solidFill>
@@ -14616,9 +14090,9 @@
                           <a:latin typeface="Arial" panose="020B0604020202020204" pitchFamily="34" charset="0"/>
                           <a:ea typeface="Times New Roman" panose="02020603050405020304" pitchFamily="18" charset="0"/>
                         </a:rPr>
-                        <a:t>VUL-006</a:t>
+                        <a:t>VUL-005</a:t>
                       </a:r>
-                      <a:endParaRPr lang="fr-FR" sz="1000">
+                      <a:endParaRPr lang="fr-FR" sz="1000" dirty="0">
                         <a:effectLst/>
                         <a:latin typeface="Segoe UI" panose="020B0502040204020203" pitchFamily="34" charset="0"/>
                         <a:ea typeface="Quattrocento Sans" panose="020B0502050000020003" pitchFamily="34" charset="0"/>
@@ -15123,7 +14597,7 @@
         </p:nvSpPr>
         <p:spPr>
           <a:xfrm>
-            <a:off x="1297500" y="1307850"/>
+            <a:off x="1297500" y="1126314"/>
             <a:ext cx="7038900" cy="2911200"/>
           </a:xfrm>
         </p:spPr>
@@ -15135,7 +14609,7 @@
           <a:p>
             <a:r>
               <a:rPr lang="fr-FR" dirty="0"/>
-              <a:t>Créer une table avec les requêtes SQL suivantes pour contrôler les ventes entre ce qu’il y a dans la base de données et les logs.</a:t>
+              <a:t>Créer une table de réconciliation avec les requêtes SQL suivantes dans PostgreSQL.</a:t>
             </a:r>
           </a:p>
           <a:p>
@@ -15154,18 +14628,21 @@
             </a:r>
             <a:r>
               <a:rPr lang="en-US" dirty="0" err="1"/>
-              <a:t>controle_completude_ventes</a:t>
+              <a:t>controle_reconciliation</a:t>
             </a:r>
             <a:r>
               <a:rPr lang="en-US" dirty="0"/>
-              <a:t> (</a:t>
-            </a:r>
-            <a:endParaRPr lang="fr-FR" dirty="0"/>
+              <a:t>(</a:t>
+            </a:r>
           </a:p>
           <a:p>
             <a:pPr marL="146050" indent="0">
               <a:buNone/>
             </a:pPr>
+            <a:r>
+              <a:rPr lang="en-US" dirty="0"/>
+              <a:t>	</a:t>
+            </a:r>
             <a:r>
               <a:rPr lang="en-US" dirty="0" err="1"/>
               <a:t>id_controle</a:t>
@@ -15174,12 +14651,15 @@
               <a:rPr lang="en-US" dirty="0"/>
               <a:t> SERIAL PRIMARY KEY,</a:t>
             </a:r>
-            <a:endParaRPr lang="fr-FR" dirty="0"/>
           </a:p>
           <a:p>
             <a:pPr marL="146050" indent="0">
               <a:buNone/>
             </a:pPr>
+            <a:r>
+              <a:rPr lang="en-US" dirty="0"/>
+              <a:t>	</a:t>
+            </a:r>
             <a:r>
               <a:rPr lang="en-US" dirty="0" err="1"/>
               <a:t>date_vente</a:t>
@@ -15188,68 +14668,151 @@
               <a:rPr lang="en-US" dirty="0"/>
               <a:t> DATE NOT NULL,</a:t>
             </a:r>
-            <a:endParaRPr lang="fr-FR" dirty="0"/>
           </a:p>
           <a:p>
             <a:pPr marL="146050" indent="0">
               <a:buNone/>
             </a:pPr>
             <a:r>
-              <a:rPr lang="es-ES" dirty="0" err="1"/>
-              <a:t>nb_ventes_base</a:t>
-            </a:r>
-            <a:r>
-              <a:rPr lang="es-ES" dirty="0"/>
+              <a:rPr lang="en-US" dirty="0"/>
+              <a:t>	</a:t>
+            </a:r>
+            <a:r>
+              <a:rPr lang="en-US" dirty="0" err="1"/>
+              <a:t>nb_vente_source</a:t>
+            </a:r>
+            <a:r>
+              <a:rPr lang="en-US" dirty="0"/>
               <a:t> INTEGER,</a:t>
             </a:r>
-            <a:endParaRPr lang="fr-FR" dirty="0"/>
           </a:p>
           <a:p>
             <a:pPr marL="146050" indent="0">
               <a:buNone/>
             </a:pPr>
             <a:r>
-              <a:rPr lang="es-ES" dirty="0" err="1"/>
-              <a:t>nb_ventes_logs</a:t>
-            </a:r>
-            <a:r>
-              <a:rPr lang="es-ES" dirty="0"/>
+              <a:rPr lang="en-US" dirty="0"/>
+              <a:t>	</a:t>
+            </a:r>
+            <a:r>
+              <a:rPr lang="en-US" dirty="0" err="1"/>
+              <a:t>nb_vente_cube</a:t>
+            </a:r>
+            <a:r>
+              <a:rPr lang="en-US" dirty="0"/>
               <a:t> INTEGER,</a:t>
             </a:r>
-            <a:endParaRPr lang="fr-FR" dirty="0"/>
           </a:p>
           <a:p>
             <a:pPr marL="146050" indent="0">
               <a:buNone/>
             </a:pPr>
             <a:r>
+              <a:rPr lang="en-US" dirty="0"/>
+              <a:t>	</a:t>
+            </a:r>
+            <a:r>
               <a:rPr lang="en-US" dirty="0" err="1"/>
-              <a:t>ca_base</a:t>
+              <a:t>nb_produit_source</a:t>
+            </a:r>
+            <a:r>
+              <a:rPr lang="en-US" dirty="0"/>
+              <a:t> INTEGER,</a:t>
+            </a:r>
+          </a:p>
+          <a:p>
+            <a:pPr marL="146050" indent="0">
+              <a:buNone/>
+            </a:pPr>
+            <a:r>
+              <a:rPr lang="en-US" dirty="0"/>
+              <a:t>	</a:t>
+            </a:r>
+            <a:r>
+              <a:rPr lang="en-US" dirty="0" err="1"/>
+              <a:t>nb_produit_cube</a:t>
+            </a:r>
+            <a:r>
+              <a:rPr lang="en-US" dirty="0"/>
+              <a:t> INTEGER,</a:t>
+            </a:r>
+          </a:p>
+          <a:p>
+            <a:pPr marL="146050" indent="0">
+              <a:buNone/>
+            </a:pPr>
+            <a:r>
+              <a:rPr lang="en-US" dirty="0"/>
+              <a:t>	</a:t>
+            </a:r>
+            <a:r>
+              <a:rPr lang="en-US" dirty="0" err="1"/>
+              <a:t>nb_ticket_source</a:t>
+            </a:r>
+            <a:r>
+              <a:rPr lang="en-US" dirty="0"/>
+              <a:t> INTEGER,</a:t>
+            </a:r>
+          </a:p>
+          <a:p>
+            <a:pPr marL="146050" indent="0">
+              <a:buNone/>
+            </a:pPr>
+            <a:r>
+              <a:rPr lang="en-US" dirty="0"/>
+              <a:t>	</a:t>
+            </a:r>
+            <a:r>
+              <a:rPr lang="en-US" dirty="0" err="1"/>
+              <a:t>nb_ticket_cube</a:t>
+            </a:r>
+            <a:r>
+              <a:rPr lang="en-US" dirty="0"/>
+              <a:t> INTEGER,</a:t>
+            </a:r>
+          </a:p>
+          <a:p>
+            <a:pPr marL="146050" indent="0">
+              <a:buNone/>
+            </a:pPr>
+            <a:r>
+              <a:rPr lang="en-US" dirty="0"/>
+              <a:t>	</a:t>
+            </a:r>
+            <a:r>
+              <a:rPr lang="en-US" dirty="0" err="1"/>
+              <a:t>ca_source</a:t>
             </a:r>
             <a:r>
               <a:rPr lang="en-US" dirty="0"/>
               <a:t> NUMERIC(12,2),</a:t>
             </a:r>
-            <a:endParaRPr lang="fr-FR" dirty="0"/>
           </a:p>
           <a:p>
             <a:pPr marL="146050" indent="0">
               <a:buNone/>
             </a:pPr>
             <a:r>
+              <a:rPr lang="en-US" dirty="0"/>
+              <a:t>	</a:t>
+            </a:r>
+            <a:r>
               <a:rPr lang="en-US" dirty="0" err="1"/>
-              <a:t>ca_logs</a:t>
+              <a:t>ca_cube</a:t>
             </a:r>
             <a:r>
               <a:rPr lang="en-US" dirty="0"/>
               <a:t> NUMERIC(12,2),</a:t>
             </a:r>
-            <a:endParaRPr lang="fr-FR" dirty="0"/>
           </a:p>
           <a:p>
             <a:pPr marL="146050" indent="0">
               <a:buNone/>
             </a:pPr>
+            <a:r>
+              <a:rPr lang="en-US" dirty="0"/>
+              <a:t>	</a:t>
+            </a:r>
             <a:r>
               <a:rPr lang="en-US" dirty="0" err="1"/>
               <a:t>ecart_ca</a:t>
@@ -15258,29 +14821,22 @@
               <a:rPr lang="en-US" dirty="0"/>
               <a:t> NUMERIC(12,2),</a:t>
             </a:r>
-            <a:endParaRPr lang="fr-FR" dirty="0"/>
           </a:p>
           <a:p>
             <a:pPr marL="146050" indent="0">
               <a:buNone/>
             </a:pPr>
+            <a:r>
+              <a:rPr lang="en-US" dirty="0"/>
+              <a:t>	</a:t>
+            </a:r>
             <a:r>
               <a:rPr lang="en-US" dirty="0" err="1"/>
               <a:t>statut</a:t>
             </a:r>
             <a:r>
               <a:rPr lang="en-US" dirty="0"/>
-              <a:t> VARCHAR(10) NOT NULL </a:t>
-            </a:r>
-            <a:endParaRPr lang="fr-FR" dirty="0"/>
-          </a:p>
-          <a:p>
-            <a:pPr marL="146050" indent="0">
-              <a:buNone/>
-            </a:pPr>
-            <a:r>
-              <a:rPr lang="en-US" dirty="0"/>
-              <a:t>	CHECK(</a:t>
+              <a:t> VARCHAR(10) CHECK(</a:t>
             </a:r>
             <a:r>
               <a:rPr lang="en-US" dirty="0" err="1"/>
@@ -15288,57 +14844,34 @@
             </a:r>
             <a:r>
               <a:rPr lang="en-US" dirty="0"/>
-              <a:t> IN('ANOMALIE', 'CONFORME')),</a:t>
-            </a:r>
-            <a:endParaRPr lang="fr-FR" dirty="0"/>
+              <a:t> IN ('CONFORME', 'ÉCART')),</a:t>
+            </a:r>
           </a:p>
           <a:p>
             <a:pPr marL="146050" indent="0">
               <a:buNone/>
             </a:pPr>
+            <a:r>
+              <a:rPr lang="en-US" dirty="0"/>
+              <a:t>	</a:t>
+            </a:r>
             <a:r>
               <a:rPr lang="en-US" dirty="0" err="1"/>
               <a:t>date_controle</a:t>
             </a:r>
             <a:r>
               <a:rPr lang="en-US" dirty="0"/>
-              <a:t> TIMESTAMP NOT NULL DEFAULT CURRENT_TIMESTAMP,</a:t>
-            </a:r>
-            <a:endParaRPr lang="fr-FR" dirty="0"/>
+              <a:t> TIMESTAMP DEFAULT CURRENT_TIMESTAMP</a:t>
+            </a:r>
           </a:p>
           <a:p>
             <a:pPr marL="146050" indent="0">
               <a:buNone/>
             </a:pPr>
             <a:r>
-              <a:rPr lang="fr-FR" dirty="0" err="1"/>
-              <a:t>id_controleur</a:t>
-            </a:r>
-            <a:r>
-              <a:rPr lang="fr-FR" dirty="0"/>
-              <a:t> VARCHAR,</a:t>
-            </a:r>
-          </a:p>
-          <a:p>
-            <a:pPr marL="146050" indent="0">
-              <a:buNone/>
-            </a:pPr>
-            <a:r>
-              <a:rPr lang="fr-FR" dirty="0"/>
-              <a:t>commentaires TEXT</a:t>
-            </a:r>
-          </a:p>
-          <a:p>
-            <a:pPr marL="146050" indent="0">
-              <a:buNone/>
-            </a:pPr>
-            <a:r>
-              <a:rPr lang="fr-FR" dirty="0"/>
+              <a:rPr lang="en-US" dirty="0"/>
               <a:t>);</a:t>
             </a:r>
-          </a:p>
-          <a:p>
-            <a:endParaRPr lang="fr-FR" dirty="0"/>
           </a:p>
           <a:p>
             <a:r>
@@ -15635,17 +15168,17 @@
           <a:p>
             <a:r>
               <a:rPr lang="fr-FR" sz="2000" dirty="0"/>
-              <a:t>Contrôle quotidien des ventes</a:t>
+              <a:t>Réconciliation entre la base et le cube</a:t>
             </a:r>
           </a:p>
         </p:txBody>
       </p:sp>
       <p:pic>
         <p:nvPicPr>
-          <p:cNvPr id="6" name="Image 5">
+          <p:cNvPr id="7" name="Image 6">
             <a:extLst>
               <a:ext uri="{FF2B5EF4-FFF2-40B4-BE49-F238E27FC236}">
-                <a16:creationId xmlns:a16="http://schemas.microsoft.com/office/drawing/2014/main" id="{FAD53C3D-D20D-CA25-FC3B-C86F2FCCB940}"/>
+                <a16:creationId xmlns:a16="http://schemas.microsoft.com/office/drawing/2014/main" id="{73370870-0CCB-7F63-550E-A7E9FEF9B477}"/>
               </a:ext>
             </a:extLst>
           </p:cNvPr>
@@ -15662,8 +15195,8 @@
         </p:blipFill>
         <p:spPr>
           <a:xfrm>
-            <a:off x="0" y="3898172"/>
-            <a:ext cx="9144000" cy="1160860"/>
+            <a:off x="1559858" y="3762396"/>
+            <a:ext cx="7329423" cy="1381104"/>
           </a:xfrm>
           <a:prstGeom prst="rect">
             <a:avLst/>
@@ -15684,287 +15217,6 @@
 </file>
 
 <file path=ppt/slides/slide16.xml><?xml version="1.0" encoding="utf-8"?>
-<p:sld xmlns:a="http://schemas.openxmlformats.org/drawingml/2006/main" xmlns:r="http://schemas.openxmlformats.org/officeDocument/2006/relationships" xmlns:p="http://schemas.openxmlformats.org/presentationml/2006/main">
-  <p:cSld>
-    <p:spTree>
-      <p:nvGrpSpPr>
-        <p:cNvPr id="1" name=""/>
-        <p:cNvGrpSpPr/>
-        <p:nvPr/>
-      </p:nvGrpSpPr>
-      <p:grpSpPr>
-        <a:xfrm>
-          <a:off x="0" y="0"/>
-          <a:ext cx="0" cy="0"/>
-          <a:chOff x="0" y="0"/>
-          <a:chExt cx="0" cy="0"/>
-        </a:xfrm>
-      </p:grpSpPr>
-      <p:sp>
-        <p:nvSpPr>
-          <p:cNvPr id="2" name="Titre 1">
-            <a:extLst>
-              <a:ext uri="{FF2B5EF4-FFF2-40B4-BE49-F238E27FC236}">
-                <a16:creationId xmlns:a16="http://schemas.microsoft.com/office/drawing/2014/main" id="{C2CD53B9-323E-E2C1-8175-B132DB9D6233}"/>
-              </a:ext>
-            </a:extLst>
-          </p:cNvPr>
-          <p:cNvSpPr>
-            <a:spLocks noGrp="1"/>
-          </p:cNvSpPr>
-          <p:nvPr>
-            <p:ph type="title"/>
-          </p:nvPr>
-        </p:nvSpPr>
-        <p:spPr/>
-        <p:txBody>
-          <a:bodyPr>
-            <a:normAutofit/>
-          </a:bodyPr>
-          <a:lstStyle/>
-          <a:p>
-            <a:r>
-              <a:rPr lang="fr-FR" dirty="0"/>
-              <a:t>Recommandations pour l’entreprise</a:t>
-            </a:r>
-            <a:br>
-              <a:rPr lang="fr-FR" dirty="0"/>
-            </a:br>
-            <a:r>
-              <a:rPr lang="fr-FR" sz="2000" dirty="0"/>
-              <a:t>Distinguer date insertion et date achat</a:t>
-            </a:r>
-            <a:endParaRPr lang="fr-FR" dirty="0"/>
-          </a:p>
-        </p:txBody>
-      </p:sp>
-      <p:sp>
-        <p:nvSpPr>
-          <p:cNvPr id="3" name="Espace réservé du texte 2">
-            <a:extLst>
-              <a:ext uri="{FF2B5EF4-FFF2-40B4-BE49-F238E27FC236}">
-                <a16:creationId xmlns:a16="http://schemas.microsoft.com/office/drawing/2014/main" id="{73FBE3FA-2219-E6E2-E18C-9063B107DCE3}"/>
-              </a:ext>
-            </a:extLst>
-          </p:cNvPr>
-          <p:cNvSpPr>
-            <a:spLocks noGrp="1"/>
-          </p:cNvSpPr>
-          <p:nvPr>
-            <p:ph type="body" idx="1"/>
-          </p:nvPr>
-        </p:nvSpPr>
-        <p:spPr/>
-        <p:txBody>
-          <a:bodyPr>
-            <a:normAutofit fontScale="85000" lnSpcReduction="20000"/>
-          </a:bodyPr>
-          <a:lstStyle/>
-          <a:p>
-            <a:r>
-              <a:rPr lang="fr-FR" dirty="0"/>
-              <a:t>Mettre dans la table de vente une colonne pour la date d’insertion et dans les logs, bien distinguer date de vente et date d’insertion. Requêtes à appliquer:</a:t>
-            </a:r>
-          </a:p>
-          <a:p>
-            <a:endParaRPr lang="fr-FR" dirty="0"/>
-          </a:p>
-          <a:p>
-            <a:pPr marL="146050" indent="0">
-              <a:buNone/>
-            </a:pPr>
-            <a:r>
-              <a:rPr lang="fr-FR" dirty="0"/>
-              <a:t>ALTER TABLE vente</a:t>
-            </a:r>
-          </a:p>
-          <a:p>
-            <a:pPr marL="146050" indent="0">
-              <a:buNone/>
-            </a:pPr>
-            <a:r>
-              <a:rPr lang="fr-FR" dirty="0"/>
-              <a:t>ADD COLUMN </a:t>
-            </a:r>
-            <a:r>
-              <a:rPr lang="fr-FR" dirty="0" err="1"/>
-              <a:t>date_insertion</a:t>
-            </a:r>
-            <a:r>
-              <a:rPr lang="fr-FR" dirty="0"/>
-              <a:t> TIMESTAMP DEFAULT CURRENT_TIMESTAMP;</a:t>
-            </a:r>
-          </a:p>
-          <a:p>
-            <a:pPr marL="146050" indent="0">
-              <a:buNone/>
-            </a:pPr>
-            <a:r>
-              <a:rPr lang="fr-FR" dirty="0"/>
-              <a:t> </a:t>
-            </a:r>
-          </a:p>
-          <a:p>
-            <a:pPr marL="146050" indent="0">
-              <a:buNone/>
-            </a:pPr>
-            <a:r>
-              <a:rPr lang="fr-FR" dirty="0"/>
-              <a:t>ALTER TABLE </a:t>
-            </a:r>
-            <a:r>
-              <a:rPr lang="fr-FR" dirty="0" err="1"/>
-              <a:t>logs_ventes</a:t>
-            </a:r>
-            <a:br>
-              <a:rPr lang="fr-FR" dirty="0"/>
-            </a:br>
-            <a:r>
-              <a:rPr lang="fr-FR" dirty="0"/>
-              <a:t>RENAME COLUMN date TO </a:t>
-            </a:r>
-            <a:r>
-              <a:rPr lang="fr-FR" dirty="0" err="1"/>
-              <a:t>date_insertion</a:t>
-            </a:r>
-            <a:r>
-              <a:rPr lang="fr-FR" dirty="0"/>
-              <a:t>;</a:t>
-            </a:r>
-          </a:p>
-          <a:p>
-            <a:pPr marL="146050" indent="0">
-              <a:buNone/>
-            </a:pPr>
-            <a:r>
-              <a:rPr lang="fr-FR" dirty="0"/>
-              <a:t> </a:t>
-            </a:r>
-          </a:p>
-          <a:p>
-            <a:pPr marL="146050" indent="0">
-              <a:buNone/>
-            </a:pPr>
-            <a:r>
-              <a:rPr lang="fr-FR" dirty="0"/>
-              <a:t>ALTER TABLE </a:t>
-            </a:r>
-            <a:r>
-              <a:rPr lang="fr-FR" dirty="0" err="1"/>
-              <a:t>logs_ventes</a:t>
-            </a:r>
-            <a:endParaRPr lang="fr-FR" dirty="0"/>
-          </a:p>
-          <a:p>
-            <a:pPr marL="146050" indent="0">
-              <a:buNone/>
-            </a:pPr>
-            <a:r>
-              <a:rPr lang="fr-FR" dirty="0"/>
-              <a:t>ADD COLUMN </a:t>
-            </a:r>
-            <a:r>
-              <a:rPr lang="fr-FR" dirty="0" err="1"/>
-              <a:t>date_vente</a:t>
-            </a:r>
-            <a:r>
-              <a:rPr lang="fr-FR" dirty="0"/>
-              <a:t> TEXT;</a:t>
-            </a:r>
-          </a:p>
-          <a:p>
-            <a:pPr marL="146050" indent="0">
-              <a:buNone/>
-            </a:pPr>
-            <a:r>
-              <a:rPr lang="fr-FR" dirty="0"/>
-              <a:t>UPDATE </a:t>
-            </a:r>
-            <a:r>
-              <a:rPr lang="fr-FR" dirty="0" err="1"/>
-              <a:t>logs_ventes</a:t>
-            </a:r>
-            <a:endParaRPr lang="fr-FR" dirty="0"/>
-          </a:p>
-          <a:p>
-            <a:pPr marL="146050" indent="0">
-              <a:buNone/>
-            </a:pPr>
-            <a:r>
-              <a:rPr lang="en-US" dirty="0"/>
-              <a:t>SET </a:t>
-            </a:r>
-            <a:r>
-              <a:rPr lang="en-US" dirty="0" err="1"/>
-              <a:t>date_vente</a:t>
-            </a:r>
-            <a:r>
-              <a:rPr lang="en-US" dirty="0"/>
-              <a:t> = (</a:t>
-            </a:r>
-            <a:endParaRPr lang="fr-FR" dirty="0"/>
-          </a:p>
-          <a:p>
-            <a:pPr marL="146050" indent="0">
-              <a:buNone/>
-            </a:pPr>
-            <a:r>
-              <a:rPr lang="en-US" dirty="0"/>
-              <a:t>    CASE </a:t>
-            </a:r>
-            <a:endParaRPr lang="fr-FR" dirty="0"/>
-          </a:p>
-          <a:p>
-            <a:pPr marL="146050" indent="0">
-              <a:buNone/>
-            </a:pPr>
-            <a:r>
-              <a:rPr lang="en-US" dirty="0"/>
-              <a:t>        WHEN champs = 'Date' THEN detail</a:t>
-            </a:r>
-            <a:endParaRPr lang="fr-FR" dirty="0"/>
-          </a:p>
-          <a:p>
-            <a:pPr marL="146050" indent="0">
-              <a:buNone/>
-            </a:pPr>
-            <a:r>
-              <a:rPr lang="en-US" dirty="0"/>
-              <a:t>    </a:t>
-            </a:r>
-            <a:r>
-              <a:rPr lang="fr-FR" dirty="0"/>
-              <a:t>END</a:t>
-            </a:r>
-          </a:p>
-          <a:p>
-            <a:pPr marL="146050" indent="0">
-              <a:buNone/>
-            </a:pPr>
-            <a:r>
-              <a:rPr lang="fr-FR" dirty="0"/>
-              <a:t>);</a:t>
-            </a:r>
-          </a:p>
-          <a:p>
-            <a:endParaRPr lang="fr-FR" dirty="0"/>
-          </a:p>
-        </p:txBody>
-      </p:sp>
-    </p:spTree>
-    <p:extLst>
-      <p:ext uri="{BB962C8B-B14F-4D97-AF65-F5344CB8AC3E}">
-        <p14:creationId xmlns:p14="http://schemas.microsoft.com/office/powerpoint/2010/main" val="3239409268"/>
-      </p:ext>
-    </p:extLst>
-  </p:cSld>
-  <p:clrMapOvr>
-    <a:masterClrMapping/>
-  </p:clrMapOvr>
-</p:sld>
-</file>
-
-<file path=ppt/slides/slide17.xml><?xml version="1.0" encoding="utf-8"?>
 <p:sld xmlns:a="http://schemas.openxmlformats.org/drawingml/2006/main" xmlns:r="http://schemas.openxmlformats.org/officeDocument/2006/relationships" xmlns:p="http://schemas.openxmlformats.org/presentationml/2006/main">
   <p:cSld>
     <p:spTree>
@@ -16054,35 +15306,17 @@
           <a:p>
             <a:r>
               <a:rPr lang="fr-FR" dirty="0"/>
-              <a:t>Une supervision technique (ici avec PostgreSQL) peut être mise en place afin de surveiller les performances, l’activité des connexions, l’utilisation des index et les statistiques des tables. Exemple avec les requêtes suivantes:</a:t>
-            </a:r>
-          </a:p>
-          <a:p>
-            <a:pPr marL="146050" lvl="0" indent="0">
-              <a:buNone/>
-            </a:pPr>
+              <a:t>En complément des contrôles métier, une supervision technique peut être mise en place afin de surveiller les performances, l’activité des connexions, l’utilisation des index et les statistiques des tables. Cette supervision vient compléter des contrôles de complétude métier et permet d’identifier en amont les anomalies techniques susceptibles d’impacter les traitements BI.</a:t>
+            </a:r>
+          </a:p>
+          <a:p>
+            <a:endParaRPr lang="fr-FR" dirty="0"/>
+          </a:p>
+          <a:p>
             <a:r>
               <a:rPr lang="fr-FR" dirty="0"/>
-              <a:t>-- Pour afficher les statistiques des tables utilisateur de la base de données : </a:t>
-            </a:r>
-          </a:p>
-          <a:p>
-            <a:pPr marL="146050" indent="0">
-              <a:buNone/>
-            </a:pPr>
-            <a:r>
-              <a:rPr lang="en-US" dirty="0"/>
-              <a:t>SELECT * FROM </a:t>
-            </a:r>
-            <a:r>
-              <a:rPr lang="en-US" dirty="0" err="1"/>
-              <a:t>pg_stat_user_tables</a:t>
-            </a:r>
-            <a:r>
-              <a:rPr lang="en-US" dirty="0"/>
-              <a:t>; </a:t>
-            </a:r>
-            <a:endParaRPr lang="fr-FR" dirty="0"/>
+              <a:t>Exemple avec les requêtes PostgreSQL suivantes sur le prototype:</a:t>
+            </a:r>
           </a:p>
           <a:p>
             <a:pPr marL="146050" indent="0">
@@ -16189,29 +15423,7 @@
             </a:pPr>
             <a:r>
               <a:rPr lang="en-US" dirty="0"/>
-              <a:t>    </a:t>
-            </a:r>
-            <a:r>
-              <a:rPr lang="en-US" dirty="0" err="1"/>
-              <a:t>n_live_tup</a:t>
-            </a:r>
-            <a:r>
-              <a:rPr lang="en-US" dirty="0"/>
-              <a:t> AS </a:t>
-            </a:r>
-            <a:r>
-              <a:rPr lang="en-US" dirty="0" err="1"/>
-              <a:t>lignes_estimees</a:t>
-            </a:r>
-            <a:endParaRPr lang="fr-FR" dirty="0"/>
-          </a:p>
-          <a:p>
-            <a:pPr marL="146050" indent="0">
-              <a:buNone/>
-            </a:pPr>
-            <a:r>
-              <a:rPr lang="en-US" dirty="0"/>
-              <a:t>FROM </a:t>
+              <a:t>    FROM </a:t>
             </a:r>
             <a:r>
               <a:rPr lang="en-US" dirty="0" err="1"/>
@@ -16267,10 +15479,10 @@
       </p:sp>
       <p:pic>
         <p:nvPicPr>
-          <p:cNvPr id="5" name="Image 4">
+          <p:cNvPr id="6" name="Image 5">
             <a:extLst>
               <a:ext uri="{FF2B5EF4-FFF2-40B4-BE49-F238E27FC236}">
-                <a16:creationId xmlns:a16="http://schemas.microsoft.com/office/drawing/2014/main" id="{8DD86DEF-3492-EF94-615A-4B108A69BDFD}"/>
+                <a16:creationId xmlns:a16="http://schemas.microsoft.com/office/drawing/2014/main" id="{983B376A-0E18-E123-3E7F-6FD1CE403B73}"/>
               </a:ext>
             </a:extLst>
           </p:cNvPr>
@@ -16287,8 +15499,8 @@
         </p:blipFill>
         <p:spPr>
           <a:xfrm>
-            <a:off x="5244353" y="2571750"/>
-            <a:ext cx="3742290" cy="1818218"/>
+            <a:off x="5303477" y="2782389"/>
+            <a:ext cx="3667830" cy="2106524"/>
           </a:xfrm>
           <a:prstGeom prst="rect">
             <a:avLst/>
@@ -16308,7 +15520,7 @@
 </p:sld>
 </file>
 
-<file path=ppt/slides/slide18.xml><?xml version="1.0" encoding="utf-8"?>
+<file path=ppt/slides/slide17.xml><?xml version="1.0" encoding="utf-8"?>
 <p:sld xmlns:a="http://schemas.openxmlformats.org/drawingml/2006/main" xmlns:r="http://schemas.openxmlformats.org/officeDocument/2006/relationships" xmlns:p="http://schemas.openxmlformats.org/presentationml/2006/main">
   <p:cSld>
     <p:spTree>
@@ -16581,12 +15793,12 @@
 </p:sld>
 </file>
 
-<file path=ppt/slides/slide19.xml><?xml version="1.0" encoding="utf-8"?>
+<file path=ppt/slides/slide18.xml><?xml version="1.0" encoding="utf-8"?>
 <p:sld xmlns:a="http://schemas.openxmlformats.org/drawingml/2006/main" xmlns:r="http://schemas.openxmlformats.org/officeDocument/2006/relationships" xmlns:p="http://schemas.openxmlformats.org/presentationml/2006/main">
   <p:cSld>
     <p:spTree>
       <p:nvGrpSpPr>
-        <p:cNvPr id="1" name=""/>
+        <p:cNvPr id="1" name="Shape 220"/>
         <p:cNvGrpSpPr/>
         <p:nvPr/>
       </p:nvGrpSpPr>
@@ -16600,92 +15812,52 @@
       </p:grpSpPr>
       <p:sp>
         <p:nvSpPr>
-          <p:cNvPr id="3" name="Espace réservé du texte 2">
-            <a:extLst>
-              <a:ext uri="{FF2B5EF4-FFF2-40B4-BE49-F238E27FC236}">
-                <a16:creationId xmlns:a16="http://schemas.microsoft.com/office/drawing/2014/main" id="{B2D41D9A-B6C4-2944-516C-2C8870838FA5}"/>
-              </a:ext>
-            </a:extLst>
-          </p:cNvPr>
-          <p:cNvSpPr>
+          <p:cNvPr id="221" name="Google Shape;221;p28"/>
+          <p:cNvSpPr txBox="1">
             <a:spLocks noGrp="1"/>
           </p:cNvSpPr>
           <p:nvPr>
-            <p:ph type="body" idx="1"/>
+            <p:ph type="title"/>
           </p:nvPr>
         </p:nvSpPr>
-        <p:spPr/>
+        <p:spPr>
+          <a:xfrm>
+            <a:off x="311700" y="1388850"/>
+            <a:ext cx="8520600" cy="841800"/>
+          </a:xfrm>
+          <a:prstGeom prst="rect">
+            <a:avLst/>
+          </a:prstGeom>
+        </p:spPr>
         <p:txBody>
-          <a:bodyPr>
+          <a:bodyPr spcFirstLastPara="1" wrap="square" lIns="91425" tIns="91425" rIns="91425" bIns="91425" anchor="ctr" anchorCtr="0">
             <a:normAutofit/>
           </a:bodyPr>
           <a:lstStyle/>
           <a:p>
-            <a:r>
-              <a:rPr lang="fr-FR" dirty="0"/>
-              <a:t>En complément de la supervision technique, mettre en place une automatisation afin de compléter instantanément , à chaque modification sur les tables métiers (</a:t>
-            </a:r>
-            <a:r>
-              <a:rPr lang="fr-FR" dirty="0" err="1"/>
-              <a:t>employe</a:t>
-            </a:r>
-            <a:r>
-              <a:rPr lang="fr-FR" dirty="0"/>
-              <a:t>, vente, produit, client), les logs pour chacune de ces tables. </a:t>
-            </a:r>
-          </a:p>
-          <a:p>
-            <a:r>
-              <a:rPr lang="fr-FR" dirty="0"/>
-              <a:t>Cela permet d’éviter d’avoir une seule table de logs générique pour toutes les tables, en séparant les logs par table métier.</a:t>
-            </a:r>
-          </a:p>
-          <a:p>
-            <a:r>
-              <a:rPr lang="fr-FR" dirty="0"/>
-              <a:t>Cela permet de disposer de tables de logs dédiées par table métier, ce qui facilite les contrôles et les comparaisons. </a:t>
-            </a:r>
-          </a:p>
-          <a:p>
-            <a:r>
-              <a:rPr lang="fr-FR" dirty="0"/>
-              <a:t>Pour ce faire, on utilise un trigger afin d’automatiser l’opération. </a:t>
-            </a:r>
-          </a:p>
-          <a:p>
-            <a:pPr marL="146050" indent="0">
-              <a:buNone/>
-            </a:pPr>
-            <a:endParaRPr lang="fr-FR" dirty="0"/>
-          </a:p>
-          <a:p>
-            <a:pPr marL="146050" indent="0">
-              <a:buNone/>
-            </a:pPr>
-            <a:r>
-              <a:rPr lang="fr-FR" dirty="0"/>
-              <a:t>Exemple pour le log </a:t>
-            </a:r>
-            <a:r>
-              <a:rPr lang="fr-FR" dirty="0" err="1"/>
-              <a:t>employe</a:t>
-            </a:r>
-            <a:r>
-              <a:rPr lang="fr-FR" dirty="0"/>
-              <a:t> en slide suivante</a:t>
-            </a:r>
-          </a:p>
-          <a:p>
-            <a:endParaRPr lang="fr-FR" dirty="0"/>
+            <a:pPr marL="0" lvl="0" indent="0" algn="l" rtl="0">
+              <a:spcBef>
+                <a:spcPts val="0"/>
+              </a:spcBef>
+              <a:spcAft>
+                <a:spcPts val="0"/>
+              </a:spcAft>
+              <a:buNone/>
+            </a:pPr>
+            <a:r>
+              <a:rPr lang="fr"/>
+              <a:t>Conclusion</a:t>
+            </a:r>
+            <a:endParaRPr/>
           </a:p>
         </p:txBody>
       </p:sp>
       <p:sp>
         <p:nvSpPr>
-          <p:cNvPr id="4" name="Titre 1">
+          <p:cNvPr id="2" name="Google Shape;141;p14">
             <a:extLst>
               <a:ext uri="{FF2B5EF4-FFF2-40B4-BE49-F238E27FC236}">
-                <a16:creationId xmlns:a16="http://schemas.microsoft.com/office/drawing/2014/main" id="{FC9EF1D9-FD35-A7F9-9EF2-13312FB84EEF}"/>
+                <a16:creationId xmlns:a16="http://schemas.microsoft.com/office/drawing/2014/main" id="{722CD8E7-9D36-EE44-12F0-ABB8A5FC2A2C}"/>
               </a:ext>
             </a:extLst>
           </p:cNvPr>
@@ -16696,20 +15868,16 @@
         </p:nvSpPr>
         <p:spPr>
           <a:xfrm>
-            <a:off x="1449900" y="546150"/>
-            <a:ext cx="7038900" cy="914100"/>
+            <a:off x="147776" y="2230650"/>
+            <a:ext cx="5768930" cy="2911200"/>
           </a:xfrm>
           <a:prstGeom prst="rect">
             <a:avLst/>
           </a:prstGeom>
-          <a:noFill/>
-          <a:ln>
-            <a:noFill/>
-          </a:ln>
         </p:spPr>
         <p:txBody>
           <a:bodyPr spcFirstLastPara="1" wrap="square" lIns="91425" tIns="91425" rIns="91425" bIns="91425" anchor="t" anchorCtr="0">
-            <a:normAutofit/>
+            <a:normAutofit fontScale="92500" lnSpcReduction="20000"/>
           </a:bodyPr>
           <a:lstStyle>
             <a:defPPr marR="0" lvl="0" algn="l" rtl="0">
@@ -16734,19 +15902,17 @@
                 <a:spcPts val="0"/>
               </a:spcAft>
               <a:buClr>
-                <a:schemeClr val="lt1"/>
+                <a:srgbClr val="000000"/>
               </a:buClr>
-              <a:buSzPts val="2400"/>
-              <a:buFont typeface="Montserrat"/>
-              <a:buNone/>
-              <a:defRPr sz="2400" b="0" i="0" u="none" strike="noStrike" cap="none">
+              <a:buFont typeface="Arial"/>
+              <a:defRPr sz="1400" b="0" i="0" u="none" strike="noStrike" cap="none">
                 <a:solidFill>
-                  <a:schemeClr val="lt1"/>
+                  <a:srgbClr val="000000"/>
                 </a:solidFill>
-                <a:latin typeface="Montserrat"/>
-                <a:ea typeface="Montserrat"/>
-                <a:cs typeface="Montserrat"/>
-                <a:sym typeface="Montserrat"/>
+                <a:latin typeface="Arial"/>
+                <a:ea typeface="Arial"/>
+                <a:cs typeface="Arial"/>
+                <a:sym typeface="Arial"/>
               </a:defRPr>
             </a:lvl1pPr>
             <a:lvl2pPr marR="0" lvl="1" algn="l" rtl="0">
@@ -16760,19 +15926,17 @@
                 <a:spcPts val="0"/>
               </a:spcAft>
               <a:buClr>
-                <a:schemeClr val="lt1"/>
+                <a:srgbClr val="000000"/>
               </a:buClr>
-              <a:buSzPts val="2400"/>
-              <a:buFont typeface="Montserrat"/>
-              <a:buNone/>
-              <a:defRPr sz="2400" b="0" i="0" u="none" strike="noStrike" cap="none">
+              <a:buFont typeface="Arial"/>
+              <a:defRPr sz="1400" b="0" i="0" u="none" strike="noStrike" cap="none">
                 <a:solidFill>
-                  <a:schemeClr val="lt1"/>
+                  <a:srgbClr val="000000"/>
                 </a:solidFill>
-                <a:latin typeface="Montserrat"/>
-                <a:ea typeface="Montserrat"/>
-                <a:cs typeface="Montserrat"/>
-                <a:sym typeface="Montserrat"/>
+                <a:latin typeface="Arial"/>
+                <a:ea typeface="Arial"/>
+                <a:cs typeface="Arial"/>
+                <a:sym typeface="Arial"/>
               </a:defRPr>
             </a:lvl2pPr>
             <a:lvl3pPr marR="0" lvl="2" algn="l" rtl="0">
@@ -16786,19 +15950,17 @@
                 <a:spcPts val="0"/>
               </a:spcAft>
               <a:buClr>
-                <a:schemeClr val="lt1"/>
+                <a:srgbClr val="000000"/>
               </a:buClr>
-              <a:buSzPts val="2400"/>
-              <a:buFont typeface="Montserrat"/>
-              <a:buNone/>
-              <a:defRPr sz="2400" b="0" i="0" u="none" strike="noStrike" cap="none">
+              <a:buFont typeface="Arial"/>
+              <a:defRPr sz="1400" b="0" i="0" u="none" strike="noStrike" cap="none">
                 <a:solidFill>
-                  <a:schemeClr val="lt1"/>
+                  <a:srgbClr val="000000"/>
                 </a:solidFill>
-                <a:latin typeface="Montserrat"/>
-                <a:ea typeface="Montserrat"/>
-                <a:cs typeface="Montserrat"/>
-                <a:sym typeface="Montserrat"/>
+                <a:latin typeface="Arial"/>
+                <a:ea typeface="Arial"/>
+                <a:cs typeface="Arial"/>
+                <a:sym typeface="Arial"/>
               </a:defRPr>
             </a:lvl3pPr>
             <a:lvl4pPr marR="0" lvl="3" algn="l" rtl="0">
@@ -16812,19 +15974,17 @@
                 <a:spcPts val="0"/>
               </a:spcAft>
               <a:buClr>
-                <a:schemeClr val="lt1"/>
+                <a:srgbClr val="000000"/>
               </a:buClr>
-              <a:buSzPts val="2400"/>
-              <a:buFont typeface="Montserrat"/>
-              <a:buNone/>
-              <a:defRPr sz="2400" b="0" i="0" u="none" strike="noStrike" cap="none">
+              <a:buFont typeface="Arial"/>
+              <a:defRPr sz="1400" b="0" i="0" u="none" strike="noStrike" cap="none">
                 <a:solidFill>
-                  <a:schemeClr val="lt1"/>
+                  <a:srgbClr val="000000"/>
                 </a:solidFill>
-                <a:latin typeface="Montserrat"/>
-                <a:ea typeface="Montserrat"/>
-                <a:cs typeface="Montserrat"/>
-                <a:sym typeface="Montserrat"/>
+                <a:latin typeface="Arial"/>
+                <a:ea typeface="Arial"/>
+                <a:cs typeface="Arial"/>
+                <a:sym typeface="Arial"/>
               </a:defRPr>
             </a:lvl4pPr>
             <a:lvl5pPr marR="0" lvl="4" algn="l" rtl="0">
@@ -16838,19 +15998,17 @@
                 <a:spcPts val="0"/>
               </a:spcAft>
               <a:buClr>
-                <a:schemeClr val="lt1"/>
+                <a:srgbClr val="000000"/>
               </a:buClr>
-              <a:buSzPts val="2400"/>
-              <a:buFont typeface="Montserrat"/>
-              <a:buNone/>
-              <a:defRPr sz="2400" b="0" i="0" u="none" strike="noStrike" cap="none">
+              <a:buFont typeface="Arial"/>
+              <a:defRPr sz="1400" b="0" i="0" u="none" strike="noStrike" cap="none">
                 <a:solidFill>
-                  <a:schemeClr val="lt1"/>
+                  <a:srgbClr val="000000"/>
                 </a:solidFill>
-                <a:latin typeface="Montserrat"/>
-                <a:ea typeface="Montserrat"/>
-                <a:cs typeface="Montserrat"/>
-                <a:sym typeface="Montserrat"/>
+                <a:latin typeface="Arial"/>
+                <a:ea typeface="Arial"/>
+                <a:cs typeface="Arial"/>
+                <a:sym typeface="Arial"/>
               </a:defRPr>
             </a:lvl5pPr>
             <a:lvl6pPr marR="0" lvl="5" algn="l" rtl="0">
@@ -16864,19 +16022,17 @@
                 <a:spcPts val="0"/>
               </a:spcAft>
               <a:buClr>
-                <a:schemeClr val="lt1"/>
+                <a:srgbClr val="000000"/>
               </a:buClr>
-              <a:buSzPts val="2400"/>
-              <a:buFont typeface="Montserrat"/>
-              <a:buNone/>
-              <a:defRPr sz="2400" b="0" i="0" u="none" strike="noStrike" cap="none">
+              <a:buFont typeface="Arial"/>
+              <a:defRPr sz="1400" b="0" i="0" u="none" strike="noStrike" cap="none">
                 <a:solidFill>
-                  <a:schemeClr val="lt1"/>
+                  <a:srgbClr val="000000"/>
                 </a:solidFill>
-                <a:latin typeface="Montserrat"/>
-                <a:ea typeface="Montserrat"/>
-                <a:cs typeface="Montserrat"/>
-                <a:sym typeface="Montserrat"/>
+                <a:latin typeface="Arial"/>
+                <a:ea typeface="Arial"/>
+                <a:cs typeface="Arial"/>
+                <a:sym typeface="Arial"/>
               </a:defRPr>
             </a:lvl6pPr>
             <a:lvl7pPr marR="0" lvl="6" algn="l" rtl="0">
@@ -16890,19 +16046,17 @@
                 <a:spcPts val="0"/>
               </a:spcAft>
               <a:buClr>
-                <a:schemeClr val="lt1"/>
+                <a:srgbClr val="000000"/>
               </a:buClr>
-              <a:buSzPts val="2400"/>
-              <a:buFont typeface="Montserrat"/>
-              <a:buNone/>
-              <a:defRPr sz="2400" b="0" i="0" u="none" strike="noStrike" cap="none">
+              <a:buFont typeface="Arial"/>
+              <a:defRPr sz="1400" b="0" i="0" u="none" strike="noStrike" cap="none">
                 <a:solidFill>
-                  <a:schemeClr val="lt1"/>
+                  <a:srgbClr val="000000"/>
                 </a:solidFill>
-                <a:latin typeface="Montserrat"/>
-                <a:ea typeface="Montserrat"/>
-                <a:cs typeface="Montserrat"/>
-                <a:sym typeface="Montserrat"/>
+                <a:latin typeface="Arial"/>
+                <a:ea typeface="Arial"/>
+                <a:cs typeface="Arial"/>
+                <a:sym typeface="Arial"/>
               </a:defRPr>
             </a:lvl7pPr>
             <a:lvl8pPr marR="0" lvl="7" algn="l" rtl="0">
@@ -16916,19 +16070,17 @@
                 <a:spcPts val="0"/>
               </a:spcAft>
               <a:buClr>
-                <a:schemeClr val="lt1"/>
+                <a:srgbClr val="000000"/>
               </a:buClr>
-              <a:buSzPts val="2400"/>
-              <a:buFont typeface="Montserrat"/>
-              <a:buNone/>
-              <a:defRPr sz="2400" b="0" i="0" u="none" strike="noStrike" cap="none">
+              <a:buFont typeface="Arial"/>
+              <a:defRPr sz="1400" b="0" i="0" u="none" strike="noStrike" cap="none">
                 <a:solidFill>
-                  <a:schemeClr val="lt1"/>
+                  <a:srgbClr val="000000"/>
                 </a:solidFill>
-                <a:latin typeface="Montserrat"/>
-                <a:ea typeface="Montserrat"/>
-                <a:cs typeface="Montserrat"/>
-                <a:sym typeface="Montserrat"/>
+                <a:latin typeface="Arial"/>
+                <a:ea typeface="Arial"/>
+                <a:cs typeface="Arial"/>
+                <a:sym typeface="Arial"/>
               </a:defRPr>
             </a:lvl8pPr>
             <a:lvl9pPr marR="0" lvl="8" algn="l" rtl="0">
@@ -16942,44 +16094,107 @@
                 <a:spcPts val="0"/>
               </a:spcAft>
               <a:buClr>
-                <a:schemeClr val="lt1"/>
+                <a:srgbClr val="000000"/>
               </a:buClr>
-              <a:buSzPts val="2400"/>
-              <a:buFont typeface="Montserrat"/>
-              <a:buNone/>
-              <a:defRPr sz="2400" b="0" i="0" u="none" strike="noStrike" cap="none">
+              <a:buFont typeface="Arial"/>
+              <a:defRPr sz="1400" b="0" i="0" u="none" strike="noStrike" cap="none">
                 <a:solidFill>
-                  <a:schemeClr val="lt1"/>
+                  <a:srgbClr val="000000"/>
                 </a:solidFill>
-                <a:latin typeface="Montserrat"/>
-                <a:ea typeface="Montserrat"/>
-                <a:cs typeface="Montserrat"/>
-                <a:sym typeface="Montserrat"/>
+                <a:latin typeface="Arial"/>
+                <a:ea typeface="Arial"/>
+                <a:cs typeface="Arial"/>
+                <a:sym typeface="Arial"/>
               </a:defRPr>
             </a:lvl9pPr>
           </a:lstStyle>
           <a:p>
             <a:r>
-              <a:rPr lang="fr-FR" dirty="0"/>
-              <a:t>Recommandation pour l’entreprise</a:t>
-            </a:r>
-            <a:br>
-              <a:rPr lang="fr-FR" dirty="0"/>
-            </a:br>
-            <a:r>
-              <a:rPr lang="fr-FR" sz="2000" dirty="0"/>
-              <a:t>Automatiser le remplissage des tables de logs</a:t>
-            </a:r>
-            <a:endParaRPr lang="fr-FR" dirty="0"/>
+              <a:rPr lang="fr-FR" dirty="0">
+                <a:solidFill>
+                  <a:schemeClr val="bg1"/>
+                </a:solidFill>
+              </a:rPr>
+              <a:t>L’audit a confirmé que le chiffre d’affaires correct du 14 août 2024 est de 284 243,88 €.</a:t>
+            </a:r>
+          </a:p>
+          <a:p>
+            <a:endParaRPr lang="fr-FR" dirty="0">
+              <a:solidFill>
+                <a:schemeClr val="bg1"/>
+              </a:solidFill>
+            </a:endParaRPr>
+          </a:p>
+          <a:p>
+            <a:r>
+              <a:rPr lang="fr-FR" dirty="0">
+                <a:solidFill>
+                  <a:schemeClr val="bg1"/>
+                </a:solidFill>
+              </a:rPr>
+              <a:t>L’écart avec le premier montant observé, soit 275 186,59 €, est cohérent avec l’hypothèse d’une intégration tardive de certaines ventes ou d’un retard de synchronisation entre la source  et le cube OLAP. Toutefois, en l’absence d’accès aux logs ETL, aux historiques de rafraîchissement du cube et aux journaux d’activités Power BI, la cause technique exacte ne peut pas être établie de manière certaine.</a:t>
+            </a:r>
+          </a:p>
+          <a:p>
+            <a:endParaRPr lang="fr-FR" dirty="0">
+              <a:solidFill>
+                <a:schemeClr val="bg1"/>
+              </a:solidFill>
+            </a:endParaRPr>
+          </a:p>
+          <a:p>
+            <a:r>
+              <a:rPr lang="fr-FR" dirty="0">
+                <a:solidFill>
+                  <a:schemeClr val="bg1"/>
+                </a:solidFill>
+              </a:rPr>
+              <a:t>Le problème principal n’est donc pas un problème de calcul du chiffre d’affaires, mais un problème de fiabilité du processus d’intégration et de publication des données.</a:t>
+            </a:r>
+          </a:p>
+          <a:p>
+            <a:endParaRPr lang="fr-FR" dirty="0">
+              <a:solidFill>
+                <a:schemeClr val="bg1"/>
+              </a:solidFill>
+            </a:endParaRPr>
+          </a:p>
+          <a:p>
+            <a:r>
+              <a:rPr lang="fr-FR" dirty="0">
+                <a:solidFill>
+                  <a:schemeClr val="bg1"/>
+                </a:solidFill>
+              </a:rPr>
+              <a:t>La mise en œuvre de ces actions est importante pour restaurer la confiance dans les indicateurs BI et permettre à </a:t>
+            </a:r>
+            <a:r>
+              <a:rPr lang="fr-FR" dirty="0" err="1">
+                <a:solidFill>
+                  <a:schemeClr val="bg1"/>
+                </a:solidFill>
+              </a:rPr>
+              <a:t>SuperSmartMarket</a:t>
+            </a:r>
+            <a:r>
+              <a:rPr lang="fr-FR" dirty="0">
+                <a:solidFill>
+                  <a:schemeClr val="bg1"/>
+                </a:solidFill>
+              </a:rPr>
+              <a:t> de poursuivre son ambition de personnalisation client sur des bases de données fiables.</a:t>
+            </a:r>
+          </a:p>
+          <a:p>
+            <a:endParaRPr lang="fr-FR" dirty="0">
+              <a:solidFill>
+                <a:schemeClr val="bg1"/>
+              </a:solidFill>
+            </a:endParaRPr>
           </a:p>
         </p:txBody>
       </p:sp>
     </p:spTree>
-    <p:extLst>
-      <p:ext uri="{BB962C8B-B14F-4D97-AF65-F5344CB8AC3E}">
-        <p14:creationId xmlns:p14="http://schemas.microsoft.com/office/powerpoint/2010/main" val="1094260605"/>
-      </p:ext>
-    </p:extLst>
   </p:cSld>
   <p:clrMapOvr>
     <a:masterClrMapping/>
@@ -17192,1011 +16407,6 @@
               <a:t>- la part de chiffre d’affaires encaissé par employé.</a:t>
             </a:r>
             <a:endParaRPr dirty="0"/>
-          </a:p>
-        </p:txBody>
-      </p:sp>
-    </p:spTree>
-  </p:cSld>
-  <p:clrMapOvr>
-    <a:masterClrMapping/>
-  </p:clrMapOvr>
-</p:sld>
-</file>
-
-<file path=ppt/slides/slide20.xml><?xml version="1.0" encoding="utf-8"?>
-<p:sld xmlns:a="http://schemas.openxmlformats.org/drawingml/2006/main" xmlns:r="http://schemas.openxmlformats.org/officeDocument/2006/relationships" xmlns:p="http://schemas.openxmlformats.org/presentationml/2006/main">
-  <p:cSld>
-    <p:spTree>
-      <p:nvGrpSpPr>
-        <p:cNvPr id="1" name=""/>
-        <p:cNvGrpSpPr/>
-        <p:nvPr/>
-      </p:nvGrpSpPr>
-      <p:grpSpPr>
-        <a:xfrm>
-          <a:off x="0" y="0"/>
-          <a:ext cx="0" cy="0"/>
-          <a:chOff x="0" y="0"/>
-          <a:chExt cx="0" cy="0"/>
-        </a:xfrm>
-      </p:grpSpPr>
-      <p:sp>
-        <p:nvSpPr>
-          <p:cNvPr id="2" name="Titre 1">
-            <a:extLst>
-              <a:ext uri="{FF2B5EF4-FFF2-40B4-BE49-F238E27FC236}">
-                <a16:creationId xmlns:a16="http://schemas.microsoft.com/office/drawing/2014/main" id="{ABA43302-D0E7-203E-0F83-1329BD7379AE}"/>
-              </a:ext>
-            </a:extLst>
-          </p:cNvPr>
-          <p:cNvSpPr>
-            <a:spLocks noGrp="1"/>
-          </p:cNvSpPr>
-          <p:nvPr>
-            <p:ph type="title"/>
-          </p:nvPr>
-        </p:nvSpPr>
-        <p:spPr/>
-        <p:txBody>
-          <a:bodyPr>
-            <a:normAutofit fontScale="90000"/>
-          </a:bodyPr>
-          <a:lstStyle/>
-          <a:p>
-            <a:r>
-              <a:rPr lang="fr-FR" dirty="0"/>
-              <a:t>Recommandation pour l’entreprise</a:t>
-            </a:r>
-            <a:br>
-              <a:rPr lang="fr-FR" dirty="0"/>
-            </a:br>
-            <a:r>
-              <a:rPr lang="fr-FR" dirty="0"/>
-              <a:t>Automatiser le remplissage des tables de logs</a:t>
-            </a:r>
-            <a:br>
-              <a:rPr lang="fr-FR" dirty="0"/>
-            </a:br>
-            <a:endParaRPr lang="fr-FR" dirty="0"/>
-          </a:p>
-        </p:txBody>
-      </p:sp>
-      <p:sp>
-        <p:nvSpPr>
-          <p:cNvPr id="3" name="Espace réservé du texte 2">
-            <a:extLst>
-              <a:ext uri="{FF2B5EF4-FFF2-40B4-BE49-F238E27FC236}">
-                <a16:creationId xmlns:a16="http://schemas.microsoft.com/office/drawing/2014/main" id="{23E19556-E177-A858-4707-B3A47257B015}"/>
-              </a:ext>
-            </a:extLst>
-          </p:cNvPr>
-          <p:cNvSpPr>
-            <a:spLocks noGrp="1"/>
-          </p:cNvSpPr>
-          <p:nvPr>
-            <p:ph type="body" idx="1"/>
-          </p:nvPr>
-        </p:nvSpPr>
-        <p:spPr>
-          <a:xfrm>
-            <a:off x="604659" y="1307850"/>
-            <a:ext cx="8424581" cy="3714626"/>
-          </a:xfrm>
-        </p:spPr>
-        <p:txBody>
-          <a:bodyPr>
-            <a:normAutofit fontScale="70000" lnSpcReduction="20000"/>
-          </a:bodyPr>
-          <a:lstStyle/>
-          <a:p>
-            <a:pPr marL="146050" indent="0">
-              <a:buNone/>
-            </a:pPr>
-            <a:r>
-              <a:rPr lang="en-US" dirty="0"/>
-              <a:t>CREATE OR REPLACE FUNCTION </a:t>
-            </a:r>
-            <a:r>
-              <a:rPr lang="en-US" dirty="0" err="1"/>
-              <a:t>logs_employe_trigger_function</a:t>
-            </a:r>
-            <a:r>
-              <a:rPr lang="en-US" dirty="0"/>
-              <a:t>()</a:t>
-            </a:r>
-            <a:endParaRPr lang="fr-FR" dirty="0"/>
-          </a:p>
-          <a:p>
-            <a:pPr marL="146050" indent="0">
-              <a:buNone/>
-            </a:pPr>
-            <a:r>
-              <a:rPr lang="en-US" dirty="0"/>
-              <a:t>RETURNS TRIGGER AS $$</a:t>
-            </a:r>
-            <a:endParaRPr lang="fr-FR" dirty="0"/>
-          </a:p>
-          <a:p>
-            <a:pPr marL="146050" indent="0">
-              <a:buNone/>
-            </a:pPr>
-            <a:r>
-              <a:rPr lang="en-US" dirty="0"/>
-              <a:t>	BEGIN</a:t>
-            </a:r>
-            <a:endParaRPr lang="fr-FR" dirty="0"/>
-          </a:p>
-          <a:p>
-            <a:pPr marL="146050" indent="0">
-              <a:buNone/>
-            </a:pPr>
-            <a:r>
-              <a:rPr lang="en-US" dirty="0"/>
-              <a:t>		IF TG_OP ='INSERT' THEN -- operation for which the trigger was fired: INSERT, UPDATE, DELETE, or TRUNCATE</a:t>
-            </a:r>
-            <a:endParaRPr lang="fr-FR" dirty="0"/>
-          </a:p>
-          <a:p>
-            <a:pPr marL="146050" indent="0">
-              <a:buNone/>
-            </a:pPr>
-            <a:r>
-              <a:rPr lang="en-US" dirty="0"/>
-              <a:t>			INSERT INTO </a:t>
-            </a:r>
-            <a:r>
-              <a:rPr lang="en-US" dirty="0" err="1"/>
-              <a:t>logs_employe</a:t>
-            </a:r>
-            <a:r>
-              <a:rPr lang="en-US" dirty="0"/>
-              <a:t> (</a:t>
-            </a:r>
-            <a:endParaRPr lang="fr-FR" dirty="0"/>
-          </a:p>
-          <a:p>
-            <a:pPr marL="146050" indent="0">
-              <a:buNone/>
-            </a:pPr>
-            <a:r>
-              <a:rPr lang="en-US" dirty="0"/>
-              <a:t>				</a:t>
-            </a:r>
-            <a:r>
-              <a:rPr lang="fr-FR" dirty="0" err="1"/>
-              <a:t>id_user</a:t>
-            </a:r>
-            <a:r>
-              <a:rPr lang="fr-FR" dirty="0"/>
-              <a:t>,</a:t>
-            </a:r>
-          </a:p>
-          <a:p>
-            <a:pPr marL="146050" indent="0">
-              <a:buNone/>
-            </a:pPr>
-            <a:r>
-              <a:rPr lang="fr-FR" dirty="0"/>
-              <a:t>				date,</a:t>
-            </a:r>
-          </a:p>
-          <a:p>
-            <a:pPr marL="146050" indent="0">
-              <a:buNone/>
-            </a:pPr>
-            <a:r>
-              <a:rPr lang="fr-FR" dirty="0"/>
-              <a:t>				action,</a:t>
-            </a:r>
-          </a:p>
-          <a:p>
-            <a:pPr marL="146050" indent="0">
-              <a:buNone/>
-            </a:pPr>
-            <a:r>
-              <a:rPr lang="fr-FR" dirty="0"/>
-              <a:t>				</a:t>
-            </a:r>
-            <a:r>
-              <a:rPr lang="fr-FR" dirty="0" err="1"/>
-              <a:t>id_ligne</a:t>
-            </a:r>
-            <a:r>
-              <a:rPr lang="fr-FR" dirty="0"/>
-              <a:t>,				</a:t>
-            </a:r>
-          </a:p>
-          <a:p>
-            <a:pPr marL="146050" indent="0">
-              <a:buNone/>
-            </a:pPr>
-            <a:r>
-              <a:rPr lang="fr-FR" dirty="0"/>
-              <a:t>				commentaire</a:t>
-            </a:r>
-          </a:p>
-          <a:p>
-            <a:pPr marL="146050" indent="0">
-              <a:buNone/>
-            </a:pPr>
-            <a:r>
-              <a:rPr lang="fr-FR" dirty="0"/>
-              <a:t>			)</a:t>
-            </a:r>
-          </a:p>
-          <a:p>
-            <a:pPr marL="146050" indent="0">
-              <a:buNone/>
-            </a:pPr>
-            <a:r>
-              <a:rPr lang="fr-FR" dirty="0"/>
-              <a:t>			VALUES (</a:t>
-            </a:r>
-          </a:p>
-          <a:p>
-            <a:pPr marL="146050" indent="0">
-              <a:buNone/>
-            </a:pPr>
-            <a:r>
-              <a:rPr lang="fr-FR" dirty="0"/>
-              <a:t>				CURRENT_USER, -- utilisateur PostgreSQL connecté</a:t>
-            </a:r>
-          </a:p>
-          <a:p>
-            <a:pPr marL="146050" indent="0">
-              <a:buNone/>
-            </a:pPr>
-            <a:r>
-              <a:rPr lang="fr-FR" dirty="0"/>
-              <a:t>				CURRENT_DATE - DATE '1899-12-30’, -- Ex pour 14/8/2024 on a 45518. Cela sert à faire le lien avec la table calendrier qui contient toutes les dates.</a:t>
-            </a:r>
-          </a:p>
-          <a:p>
-            <a:pPr marL="146050" indent="0">
-              <a:buNone/>
-            </a:pPr>
-            <a:r>
-              <a:rPr lang="fr-FR" dirty="0"/>
-              <a:t>				TG_OP,</a:t>
-            </a:r>
-          </a:p>
-          <a:p>
-            <a:pPr marL="146050" indent="0">
-              <a:buNone/>
-            </a:pPr>
-            <a:r>
-              <a:rPr lang="fr-FR" dirty="0"/>
-              <a:t>				</a:t>
-            </a:r>
-            <a:r>
-              <a:rPr lang="fr-FR" dirty="0" err="1"/>
-              <a:t>NEW.id_employe</a:t>
-            </a:r>
-            <a:r>
-              <a:rPr lang="fr-FR" dirty="0"/>
-              <a:t>,</a:t>
-            </a:r>
-          </a:p>
-          <a:p>
-            <a:pPr marL="146050" indent="0">
-              <a:buNone/>
-            </a:pPr>
-            <a:r>
-              <a:rPr lang="fr-FR" dirty="0"/>
-              <a:t>				'Nouvel employé'</a:t>
-            </a:r>
-          </a:p>
-          <a:p>
-            <a:pPr marL="146050" indent="0">
-              <a:buNone/>
-            </a:pPr>
-            <a:r>
-              <a:rPr lang="fr-FR" dirty="0"/>
-              <a:t>			</a:t>
-            </a:r>
-            <a:r>
-              <a:rPr lang="en-US" dirty="0"/>
-              <a:t>);</a:t>
-            </a:r>
-            <a:endParaRPr lang="fr-FR" dirty="0"/>
-          </a:p>
-          <a:p>
-            <a:pPr marL="146050" indent="0">
-              <a:buNone/>
-            </a:pPr>
-            <a:r>
-              <a:rPr lang="en-US" dirty="0"/>
-              <a:t>	</a:t>
-            </a:r>
-            <a:endParaRPr lang="fr-FR" dirty="0"/>
-          </a:p>
-          <a:p>
-            <a:pPr marL="146050" indent="0">
-              <a:buNone/>
-            </a:pPr>
-            <a:r>
-              <a:rPr lang="en-US" dirty="0"/>
-              <a:t>			RETURN NEW;</a:t>
-            </a:r>
-          </a:p>
-          <a:p>
-            <a:pPr marL="146050" indent="0">
-              <a:buNone/>
-            </a:pPr>
-            <a:r>
-              <a:rPr lang="en-US" dirty="0"/>
-              <a:t>	[… ELSIF UPDATE, DELETE…]</a:t>
-            </a:r>
-          </a:p>
-          <a:p>
-            <a:pPr marL="146050" indent="0">
-              <a:buNone/>
-            </a:pPr>
-            <a:endParaRPr lang="fr-FR" dirty="0"/>
-          </a:p>
-          <a:p>
-            <a:pPr marL="146050" indent="0">
-              <a:buNone/>
-            </a:pPr>
-            <a:r>
-              <a:rPr lang="en-US" dirty="0"/>
-              <a:t>		END IF;</a:t>
-            </a:r>
-            <a:endParaRPr lang="fr-FR" dirty="0"/>
-          </a:p>
-          <a:p>
-            <a:pPr marL="146050" indent="0">
-              <a:buNone/>
-            </a:pPr>
-            <a:r>
-              <a:rPr lang="en-US" dirty="0"/>
-              <a:t>		RETURN NULL;</a:t>
-            </a:r>
-            <a:endParaRPr lang="fr-FR" dirty="0"/>
-          </a:p>
-          <a:p>
-            <a:pPr marL="146050" indent="0">
-              <a:buNone/>
-            </a:pPr>
-            <a:r>
-              <a:rPr lang="en-US" dirty="0"/>
-              <a:t>	END;</a:t>
-            </a:r>
-            <a:endParaRPr lang="fr-FR" dirty="0"/>
-          </a:p>
-          <a:p>
-            <a:pPr marL="146050" indent="0">
-              <a:buNone/>
-            </a:pPr>
-            <a:r>
-              <a:rPr lang="en-US" dirty="0"/>
-              <a:t>$$ LANGUAGE </a:t>
-            </a:r>
-            <a:r>
-              <a:rPr lang="en-US" dirty="0" err="1"/>
-              <a:t>plpgsql</a:t>
-            </a:r>
-            <a:r>
-              <a:rPr lang="en-US" dirty="0"/>
-              <a:t>;</a:t>
-            </a:r>
-            <a:endParaRPr lang="fr-FR" dirty="0"/>
-          </a:p>
-        </p:txBody>
-      </p:sp>
-    </p:spTree>
-    <p:extLst>
-      <p:ext uri="{BB962C8B-B14F-4D97-AF65-F5344CB8AC3E}">
-        <p14:creationId xmlns:p14="http://schemas.microsoft.com/office/powerpoint/2010/main" val="677342059"/>
-      </p:ext>
-    </p:extLst>
-  </p:cSld>
-  <p:clrMapOvr>
-    <a:masterClrMapping/>
-  </p:clrMapOvr>
-</p:sld>
-</file>
-
-<file path=ppt/slides/slide21.xml><?xml version="1.0" encoding="utf-8"?>
-<p:sld xmlns:a="http://schemas.openxmlformats.org/drawingml/2006/main" xmlns:r="http://schemas.openxmlformats.org/officeDocument/2006/relationships" xmlns:p="http://schemas.openxmlformats.org/presentationml/2006/main">
-  <p:cSld>
-    <p:spTree>
-      <p:nvGrpSpPr>
-        <p:cNvPr id="1" name="">
-          <a:extLst>
-            <a:ext uri="{FF2B5EF4-FFF2-40B4-BE49-F238E27FC236}">
-              <a16:creationId xmlns:a16="http://schemas.microsoft.com/office/drawing/2014/main" id="{9EDB10CB-1015-7F5E-667E-FA3D05B5D3D5}"/>
-            </a:ext>
-          </a:extLst>
-        </p:cNvPr>
-        <p:cNvGrpSpPr/>
-        <p:nvPr/>
-      </p:nvGrpSpPr>
-      <p:grpSpPr>
-        <a:xfrm>
-          <a:off x="0" y="0"/>
-          <a:ext cx="0" cy="0"/>
-          <a:chOff x="0" y="0"/>
-          <a:chExt cx="0" cy="0"/>
-        </a:xfrm>
-      </p:grpSpPr>
-      <p:sp>
-        <p:nvSpPr>
-          <p:cNvPr id="2" name="Titre 1">
-            <a:extLst>
-              <a:ext uri="{FF2B5EF4-FFF2-40B4-BE49-F238E27FC236}">
-                <a16:creationId xmlns:a16="http://schemas.microsoft.com/office/drawing/2014/main" id="{0C58AFB1-9ABB-7BD4-A82A-D6C11EA07C68}"/>
-              </a:ext>
-            </a:extLst>
-          </p:cNvPr>
-          <p:cNvSpPr>
-            <a:spLocks noGrp="1"/>
-          </p:cNvSpPr>
-          <p:nvPr>
-            <p:ph type="title"/>
-          </p:nvPr>
-        </p:nvSpPr>
-        <p:spPr/>
-        <p:txBody>
-          <a:bodyPr>
-            <a:normAutofit fontScale="90000"/>
-          </a:bodyPr>
-          <a:lstStyle/>
-          <a:p>
-            <a:r>
-              <a:rPr lang="fr-FR" dirty="0"/>
-              <a:t>Recommandation pour l’entreprise</a:t>
-            </a:r>
-            <a:br>
-              <a:rPr lang="fr-FR" dirty="0"/>
-            </a:br>
-            <a:r>
-              <a:rPr lang="fr-FR" dirty="0"/>
-              <a:t>Automatiser le remplissage des tables de logs</a:t>
-            </a:r>
-            <a:br>
-              <a:rPr lang="fr-FR" dirty="0"/>
-            </a:br>
-            <a:endParaRPr lang="fr-FR" dirty="0"/>
-          </a:p>
-        </p:txBody>
-      </p:sp>
-      <p:sp>
-        <p:nvSpPr>
-          <p:cNvPr id="3" name="Espace réservé du texte 2">
-            <a:extLst>
-              <a:ext uri="{FF2B5EF4-FFF2-40B4-BE49-F238E27FC236}">
-                <a16:creationId xmlns:a16="http://schemas.microsoft.com/office/drawing/2014/main" id="{D43EA5C6-FC4B-D76F-9E70-044169092734}"/>
-              </a:ext>
-            </a:extLst>
-          </p:cNvPr>
-          <p:cNvSpPr>
-            <a:spLocks noGrp="1"/>
-          </p:cNvSpPr>
-          <p:nvPr>
-            <p:ph type="body" idx="1"/>
-          </p:nvPr>
-        </p:nvSpPr>
-        <p:spPr>
-          <a:xfrm>
-            <a:off x="604659" y="1307850"/>
-            <a:ext cx="8424581" cy="3714626"/>
-          </a:xfrm>
-        </p:spPr>
-        <p:txBody>
-          <a:bodyPr>
-            <a:normAutofit/>
-          </a:bodyPr>
-          <a:lstStyle/>
-          <a:p>
-            <a:pPr marL="146050" indent="0">
-              <a:buNone/>
-            </a:pPr>
-            <a:r>
-              <a:rPr lang="en-US" dirty="0"/>
-              <a:t>CREATE OR REPLACE TRIGGER </a:t>
-            </a:r>
-            <a:r>
-              <a:rPr lang="en-US" dirty="0" err="1"/>
-              <a:t>logs_employe_trigger</a:t>
-            </a:r>
-            <a:endParaRPr lang="fr-FR" dirty="0"/>
-          </a:p>
-          <a:p>
-            <a:pPr marL="146050" indent="0">
-              <a:buNone/>
-            </a:pPr>
-            <a:r>
-              <a:rPr lang="en-US" dirty="0"/>
-              <a:t>BEFORE INSERT OR UPDATE OR DELETE ON employe</a:t>
-            </a:r>
-            <a:endParaRPr lang="fr-FR" dirty="0"/>
-          </a:p>
-          <a:p>
-            <a:pPr marL="146050" indent="0">
-              <a:buNone/>
-            </a:pPr>
-            <a:r>
-              <a:rPr lang="en-US" dirty="0"/>
-              <a:t>	FOR EACH ROW</a:t>
-            </a:r>
-            <a:endParaRPr lang="fr-FR" dirty="0"/>
-          </a:p>
-          <a:p>
-            <a:pPr marL="146050" indent="0">
-              <a:buNone/>
-            </a:pPr>
-            <a:r>
-              <a:rPr lang="en-US" dirty="0"/>
-              <a:t>	EXECUTE FUNCTION </a:t>
-            </a:r>
-            <a:r>
-              <a:rPr lang="en-US" dirty="0" err="1"/>
-              <a:t>logs_employe_trigger_function</a:t>
-            </a:r>
-            <a:r>
-              <a:rPr lang="en-US" dirty="0"/>
-              <a:t>();</a:t>
-            </a:r>
-          </a:p>
-          <a:p>
-            <a:pPr marL="146050" indent="0">
-              <a:buNone/>
-            </a:pPr>
-            <a:endParaRPr lang="en-US" dirty="0"/>
-          </a:p>
-          <a:p>
-            <a:pPr marL="146050" indent="0">
-              <a:buNone/>
-            </a:pPr>
-            <a:r>
-              <a:rPr lang="en-US" dirty="0" err="1"/>
-              <a:t>Exemple</a:t>
-            </a:r>
-            <a:r>
-              <a:rPr lang="en-US" dirty="0"/>
-              <a:t> de </a:t>
-            </a:r>
-            <a:r>
-              <a:rPr lang="en-US" dirty="0" err="1"/>
-              <a:t>résultats</a:t>
-            </a:r>
-            <a:r>
-              <a:rPr lang="en-US" dirty="0"/>
-              <a:t> </a:t>
-            </a:r>
-            <a:r>
-              <a:rPr lang="en-US" dirty="0" err="1"/>
-              <a:t>d’insertion</a:t>
-            </a:r>
-            <a:r>
-              <a:rPr lang="en-US" dirty="0"/>
-              <a:t>, suppression, mise à jour:</a:t>
-            </a:r>
-            <a:endParaRPr lang="fr-FR" dirty="0"/>
-          </a:p>
-        </p:txBody>
-      </p:sp>
-      <p:pic>
-        <p:nvPicPr>
-          <p:cNvPr id="5" name="Image 4">
-            <a:extLst>
-              <a:ext uri="{FF2B5EF4-FFF2-40B4-BE49-F238E27FC236}">
-                <a16:creationId xmlns:a16="http://schemas.microsoft.com/office/drawing/2014/main" id="{B633ED99-4620-1314-018F-7CD8B201602A}"/>
-              </a:ext>
-            </a:extLst>
-          </p:cNvPr>
-          <p:cNvPicPr>
-            <a:picLocks noChangeAspect="1"/>
-          </p:cNvPicPr>
-          <p:nvPr/>
-        </p:nvPicPr>
-        <p:blipFill>
-          <a:blip r:embed="rId2"/>
-          <a:stretch>
-            <a:fillRect/>
-          </a:stretch>
-        </p:blipFill>
-        <p:spPr>
-          <a:xfrm>
-            <a:off x="1757689" y="2936033"/>
-            <a:ext cx="6690940" cy="1813717"/>
-          </a:xfrm>
-          <a:prstGeom prst="rect">
-            <a:avLst/>
-          </a:prstGeom>
-        </p:spPr>
-      </p:pic>
-    </p:spTree>
-    <p:extLst>
-      <p:ext uri="{BB962C8B-B14F-4D97-AF65-F5344CB8AC3E}">
-        <p14:creationId xmlns:p14="http://schemas.microsoft.com/office/powerpoint/2010/main" val="3939006677"/>
-      </p:ext>
-    </p:extLst>
-  </p:cSld>
-  <p:clrMapOvr>
-    <a:masterClrMapping/>
-  </p:clrMapOvr>
-</p:sld>
-</file>
-
-<file path=ppt/slides/slide22.xml><?xml version="1.0" encoding="utf-8"?>
-<p:sld xmlns:a="http://schemas.openxmlformats.org/drawingml/2006/main" xmlns:r="http://schemas.openxmlformats.org/officeDocument/2006/relationships" xmlns:p="http://schemas.openxmlformats.org/presentationml/2006/main">
-  <p:cSld>
-    <p:spTree>
-      <p:nvGrpSpPr>
-        <p:cNvPr id="1" name="Shape 220"/>
-        <p:cNvGrpSpPr/>
-        <p:nvPr/>
-      </p:nvGrpSpPr>
-      <p:grpSpPr>
-        <a:xfrm>
-          <a:off x="0" y="0"/>
-          <a:ext cx="0" cy="0"/>
-          <a:chOff x="0" y="0"/>
-          <a:chExt cx="0" cy="0"/>
-        </a:xfrm>
-      </p:grpSpPr>
-      <p:sp>
-        <p:nvSpPr>
-          <p:cNvPr id="221" name="Google Shape;221;p28"/>
-          <p:cNvSpPr txBox="1">
-            <a:spLocks noGrp="1"/>
-          </p:cNvSpPr>
-          <p:nvPr>
-            <p:ph type="title"/>
-          </p:nvPr>
-        </p:nvSpPr>
-        <p:spPr>
-          <a:xfrm>
-            <a:off x="311700" y="1388850"/>
-            <a:ext cx="8520600" cy="841800"/>
-          </a:xfrm>
-          <a:prstGeom prst="rect">
-            <a:avLst/>
-          </a:prstGeom>
-        </p:spPr>
-        <p:txBody>
-          <a:bodyPr spcFirstLastPara="1" wrap="square" lIns="91425" tIns="91425" rIns="91425" bIns="91425" anchor="ctr" anchorCtr="0">
-            <a:normAutofit/>
-          </a:bodyPr>
-          <a:lstStyle/>
-          <a:p>
-            <a:pPr marL="0" lvl="0" indent="0" algn="l" rtl="0">
-              <a:spcBef>
-                <a:spcPts val="0"/>
-              </a:spcBef>
-              <a:spcAft>
-                <a:spcPts val="0"/>
-              </a:spcAft>
-              <a:buNone/>
-            </a:pPr>
-            <a:r>
-              <a:rPr lang="fr"/>
-              <a:t>Conclusion</a:t>
-            </a:r>
-            <a:endParaRPr/>
-          </a:p>
-        </p:txBody>
-      </p:sp>
-      <p:sp>
-        <p:nvSpPr>
-          <p:cNvPr id="2" name="Google Shape;141;p14">
-            <a:extLst>
-              <a:ext uri="{FF2B5EF4-FFF2-40B4-BE49-F238E27FC236}">
-                <a16:creationId xmlns:a16="http://schemas.microsoft.com/office/drawing/2014/main" id="{722CD8E7-9D36-EE44-12F0-ABB8A5FC2A2C}"/>
-              </a:ext>
-            </a:extLst>
-          </p:cNvPr>
-          <p:cNvSpPr txBox="1">
-            <a:spLocks/>
-          </p:cNvSpPr>
-          <p:nvPr/>
-        </p:nvSpPr>
-        <p:spPr>
-          <a:xfrm>
-            <a:off x="147776" y="2230650"/>
-            <a:ext cx="5768930" cy="2911200"/>
-          </a:xfrm>
-          <a:prstGeom prst="rect">
-            <a:avLst/>
-          </a:prstGeom>
-        </p:spPr>
-        <p:txBody>
-          <a:bodyPr spcFirstLastPara="1" wrap="square" lIns="91425" tIns="91425" rIns="91425" bIns="91425" anchor="t" anchorCtr="0">
-            <a:normAutofit lnSpcReduction="10000"/>
-          </a:bodyPr>
-          <a:lstStyle>
-            <a:defPPr marR="0" lvl="0" algn="l" rtl="0">
-              <a:lnSpc>
-                <a:spcPct val="100000"/>
-              </a:lnSpc>
-              <a:spcBef>
-                <a:spcPts val="0"/>
-              </a:spcBef>
-              <a:spcAft>
-                <a:spcPts val="0"/>
-              </a:spcAft>
-            </a:defPPr>
-            <a:lvl1pPr marR="0" lvl="0" algn="l" rtl="0">
-              <a:lnSpc>
-                <a:spcPct val="100000"/>
-              </a:lnSpc>
-              <a:spcBef>
-                <a:spcPts val="0"/>
-              </a:spcBef>
-              <a:spcAft>
-                <a:spcPts val="0"/>
-              </a:spcAft>
-              <a:buClr>
-                <a:srgbClr val="000000"/>
-              </a:buClr>
-              <a:buFont typeface="Arial"/>
-              <a:defRPr sz="1400" b="0" i="0" u="none" strike="noStrike" cap="none">
-                <a:solidFill>
-                  <a:srgbClr val="000000"/>
-                </a:solidFill>
-                <a:latin typeface="Arial"/>
-                <a:ea typeface="Arial"/>
-                <a:cs typeface="Arial"/>
-                <a:sym typeface="Arial"/>
-              </a:defRPr>
-            </a:lvl1pPr>
-            <a:lvl2pPr marR="0" lvl="1" algn="l" rtl="0">
-              <a:lnSpc>
-                <a:spcPct val="100000"/>
-              </a:lnSpc>
-              <a:spcBef>
-                <a:spcPts val="0"/>
-              </a:spcBef>
-              <a:spcAft>
-                <a:spcPts val="0"/>
-              </a:spcAft>
-              <a:buClr>
-                <a:srgbClr val="000000"/>
-              </a:buClr>
-              <a:buFont typeface="Arial"/>
-              <a:defRPr sz="1400" b="0" i="0" u="none" strike="noStrike" cap="none">
-                <a:solidFill>
-                  <a:srgbClr val="000000"/>
-                </a:solidFill>
-                <a:latin typeface="Arial"/>
-                <a:ea typeface="Arial"/>
-                <a:cs typeface="Arial"/>
-                <a:sym typeface="Arial"/>
-              </a:defRPr>
-            </a:lvl2pPr>
-            <a:lvl3pPr marR="0" lvl="2" algn="l" rtl="0">
-              <a:lnSpc>
-                <a:spcPct val="100000"/>
-              </a:lnSpc>
-              <a:spcBef>
-                <a:spcPts val="0"/>
-              </a:spcBef>
-              <a:spcAft>
-                <a:spcPts val="0"/>
-              </a:spcAft>
-              <a:buClr>
-                <a:srgbClr val="000000"/>
-              </a:buClr>
-              <a:buFont typeface="Arial"/>
-              <a:defRPr sz="1400" b="0" i="0" u="none" strike="noStrike" cap="none">
-                <a:solidFill>
-                  <a:srgbClr val="000000"/>
-                </a:solidFill>
-                <a:latin typeface="Arial"/>
-                <a:ea typeface="Arial"/>
-                <a:cs typeface="Arial"/>
-                <a:sym typeface="Arial"/>
-              </a:defRPr>
-            </a:lvl3pPr>
-            <a:lvl4pPr marR="0" lvl="3" algn="l" rtl="0">
-              <a:lnSpc>
-                <a:spcPct val="100000"/>
-              </a:lnSpc>
-              <a:spcBef>
-                <a:spcPts val="0"/>
-              </a:spcBef>
-              <a:spcAft>
-                <a:spcPts val="0"/>
-              </a:spcAft>
-              <a:buClr>
-                <a:srgbClr val="000000"/>
-              </a:buClr>
-              <a:buFont typeface="Arial"/>
-              <a:defRPr sz="1400" b="0" i="0" u="none" strike="noStrike" cap="none">
-                <a:solidFill>
-                  <a:srgbClr val="000000"/>
-                </a:solidFill>
-                <a:latin typeface="Arial"/>
-                <a:ea typeface="Arial"/>
-                <a:cs typeface="Arial"/>
-                <a:sym typeface="Arial"/>
-              </a:defRPr>
-            </a:lvl4pPr>
-            <a:lvl5pPr marR="0" lvl="4" algn="l" rtl="0">
-              <a:lnSpc>
-                <a:spcPct val="100000"/>
-              </a:lnSpc>
-              <a:spcBef>
-                <a:spcPts val="0"/>
-              </a:spcBef>
-              <a:spcAft>
-                <a:spcPts val="0"/>
-              </a:spcAft>
-              <a:buClr>
-                <a:srgbClr val="000000"/>
-              </a:buClr>
-              <a:buFont typeface="Arial"/>
-              <a:defRPr sz="1400" b="0" i="0" u="none" strike="noStrike" cap="none">
-                <a:solidFill>
-                  <a:srgbClr val="000000"/>
-                </a:solidFill>
-                <a:latin typeface="Arial"/>
-                <a:ea typeface="Arial"/>
-                <a:cs typeface="Arial"/>
-                <a:sym typeface="Arial"/>
-              </a:defRPr>
-            </a:lvl5pPr>
-            <a:lvl6pPr marR="0" lvl="5" algn="l" rtl="0">
-              <a:lnSpc>
-                <a:spcPct val="100000"/>
-              </a:lnSpc>
-              <a:spcBef>
-                <a:spcPts val="0"/>
-              </a:spcBef>
-              <a:spcAft>
-                <a:spcPts val="0"/>
-              </a:spcAft>
-              <a:buClr>
-                <a:srgbClr val="000000"/>
-              </a:buClr>
-              <a:buFont typeface="Arial"/>
-              <a:defRPr sz="1400" b="0" i="0" u="none" strike="noStrike" cap="none">
-                <a:solidFill>
-                  <a:srgbClr val="000000"/>
-                </a:solidFill>
-                <a:latin typeface="Arial"/>
-                <a:ea typeface="Arial"/>
-                <a:cs typeface="Arial"/>
-                <a:sym typeface="Arial"/>
-              </a:defRPr>
-            </a:lvl6pPr>
-            <a:lvl7pPr marR="0" lvl="6" algn="l" rtl="0">
-              <a:lnSpc>
-                <a:spcPct val="100000"/>
-              </a:lnSpc>
-              <a:spcBef>
-                <a:spcPts val="0"/>
-              </a:spcBef>
-              <a:spcAft>
-                <a:spcPts val="0"/>
-              </a:spcAft>
-              <a:buClr>
-                <a:srgbClr val="000000"/>
-              </a:buClr>
-              <a:buFont typeface="Arial"/>
-              <a:defRPr sz="1400" b="0" i="0" u="none" strike="noStrike" cap="none">
-                <a:solidFill>
-                  <a:srgbClr val="000000"/>
-                </a:solidFill>
-                <a:latin typeface="Arial"/>
-                <a:ea typeface="Arial"/>
-                <a:cs typeface="Arial"/>
-                <a:sym typeface="Arial"/>
-              </a:defRPr>
-            </a:lvl7pPr>
-            <a:lvl8pPr marR="0" lvl="7" algn="l" rtl="0">
-              <a:lnSpc>
-                <a:spcPct val="100000"/>
-              </a:lnSpc>
-              <a:spcBef>
-                <a:spcPts val="0"/>
-              </a:spcBef>
-              <a:spcAft>
-                <a:spcPts val="0"/>
-              </a:spcAft>
-              <a:buClr>
-                <a:srgbClr val="000000"/>
-              </a:buClr>
-              <a:buFont typeface="Arial"/>
-              <a:defRPr sz="1400" b="0" i="0" u="none" strike="noStrike" cap="none">
-                <a:solidFill>
-                  <a:srgbClr val="000000"/>
-                </a:solidFill>
-                <a:latin typeface="Arial"/>
-                <a:ea typeface="Arial"/>
-                <a:cs typeface="Arial"/>
-                <a:sym typeface="Arial"/>
-              </a:defRPr>
-            </a:lvl8pPr>
-            <a:lvl9pPr marR="0" lvl="8" algn="l" rtl="0">
-              <a:lnSpc>
-                <a:spcPct val="100000"/>
-              </a:lnSpc>
-              <a:spcBef>
-                <a:spcPts val="0"/>
-              </a:spcBef>
-              <a:spcAft>
-                <a:spcPts val="0"/>
-              </a:spcAft>
-              <a:buClr>
-                <a:srgbClr val="000000"/>
-              </a:buClr>
-              <a:buFont typeface="Arial"/>
-              <a:defRPr sz="1400" b="0" i="0" u="none" strike="noStrike" cap="none">
-                <a:solidFill>
-                  <a:srgbClr val="000000"/>
-                </a:solidFill>
-                <a:latin typeface="Arial"/>
-                <a:ea typeface="Arial"/>
-                <a:cs typeface="Arial"/>
-                <a:sym typeface="Arial"/>
-              </a:defRPr>
-            </a:lvl9pPr>
-          </a:lstStyle>
-          <a:p>
-            <a:r>
-              <a:rPr lang="fr-FR" dirty="0">
-                <a:solidFill>
-                  <a:schemeClr val="bg1"/>
-                </a:solidFill>
-              </a:rPr>
-              <a:t>L’audit a confirmé que le chiffre d’affaires correct du 14 août 2024 est de 284 243,88 €.</a:t>
-            </a:r>
-          </a:p>
-          <a:p>
-            <a:r>
-              <a:rPr lang="fr-FR" dirty="0">
-                <a:solidFill>
-                  <a:schemeClr val="bg1"/>
-                </a:solidFill>
-              </a:rPr>
-              <a:t>L’écart avec le premier montant observé, soit 275 186,59 €, s’explique par l’intégration tardive de certaines ventes. Ces ventes, bien que rattachées à la journée du 14 août 2024, ont été insérées le 15 août 2024.</a:t>
-            </a:r>
-          </a:p>
-          <a:p>
-            <a:r>
-              <a:rPr lang="fr-FR" dirty="0">
-                <a:solidFill>
-                  <a:schemeClr val="bg1"/>
-                </a:solidFill>
-              </a:rPr>
-              <a:t>Le problème principal n’est donc pas un problème de calcul du chiffre d’affaires, mais un problème de fiabilité du processus d’intégration et de publication des données.</a:t>
-            </a:r>
-          </a:p>
-          <a:p>
-            <a:r>
-              <a:rPr lang="fr-FR" dirty="0">
-                <a:solidFill>
-                  <a:schemeClr val="bg1"/>
-                </a:solidFill>
-              </a:rPr>
-              <a:t>La mise en œuvre de ces actions est importante pour restaurer la confiance dans les indicateurs BI et permettre à </a:t>
-            </a:r>
-            <a:r>
-              <a:rPr lang="fr-FR" dirty="0" err="1">
-                <a:solidFill>
-                  <a:schemeClr val="bg1"/>
-                </a:solidFill>
-              </a:rPr>
-              <a:t>SuperSmartMarket</a:t>
-            </a:r>
-            <a:r>
-              <a:rPr lang="fr-FR" dirty="0">
-                <a:solidFill>
-                  <a:schemeClr val="bg1"/>
-                </a:solidFill>
-              </a:rPr>
-              <a:t> de poursuivre son ambition de personnalisation client sur des bases de données fiables.</a:t>
-            </a:r>
-          </a:p>
-          <a:p>
-            <a:endParaRPr lang="fr-FR" dirty="0">
-              <a:solidFill>
-                <a:schemeClr val="bg1"/>
-              </a:solidFill>
-            </a:endParaRPr>
           </a:p>
         </p:txBody>
       </p:sp>
